--- a/Mamta_Saini_Case_Conference.pptx
+++ b/Mamta_Saini_Case_Conference.pptx
@@ -4921,7 +4921,7 @@
       </p:grpSpPr>
       <p:sp>
         <p:nvSpPr>
-          <p:cNvPr id="10" name="Bg"/>
+          <p:cNvPr id="9" name="WhiteBG"/>
           <p:cNvSpPr>
             <a:spLocks noGrp="1"/>
           </p:cNvSpPr>
@@ -4936,7 +4936,7 @@
             <a:avLst/>
           </a:prstGeom>
           <a:solidFill>
-            <a:srgbClr val="EAF3F7"/>
+            <a:srgbClr val="FFFFFF"/>
           </a:solidFill>
         </p:spPr>
         <p:txBody>
@@ -4956,8 +4956,8 @@
         </p:nvSpPr>
         <p:spPr>
           <a:xfrm>
-            <a:off x="0" y="1500000"/>
-            <a:ext cx="12192000" cy="1700000"/>
+            <a:off x="800000" y="1500000"/>
+            <a:ext cx="10592000" cy="1500000"/>
           </a:xfrm>
           <a:prstGeom prst="rect">
             <a:avLst/>
@@ -4977,9 +4977,9 @@
               <a:buNone/>
             </a:pPr>
             <a:r>
-              <a:rPr lang="en-US" sz="5400" b="1" dirty="0">
-                <a:solidFill>
-                  <a:srgbClr val="3494BA"/>
+              <a:rPr lang="en-US" sz="2800" b="1" u="sng" dirty="0">
+                <a:solidFill>
+                  <a:srgbClr val="000000"/>
                 </a:solidFill>
                 <a:latin typeface="Times New Roman" pitchFamily="18" charset="0"/>
                 <a:cs typeface="Times New Roman" pitchFamily="18" charset="0"/>
@@ -4999,8 +4999,8 @@
         </p:nvSpPr>
         <p:spPr>
           <a:xfrm>
-            <a:off x="1200000" y="3350000"/>
-            <a:ext cx="9792000" cy="2900000"/>
+            <a:off x="1200000" y="3200000"/>
+            <a:ext cx="9792000" cy="3000000"/>
           </a:xfrm>
           <a:prstGeom prst="rect">
             <a:avLst/>
@@ -5022,7 +5022,7 @@
             <a:r>
               <a:rPr lang="en-US" sz="2000" b="1" dirty="0">
                 <a:solidFill>
-                  <a:srgbClr val="1F3B4D"/>
+                  <a:srgbClr val="000000"/>
                 </a:solidFill>
                 <a:latin typeface="Times New Roman" pitchFamily="18" charset="0"/>
                 <a:cs typeface="Times New Roman" pitchFamily="18" charset="0"/>
@@ -5038,9 +5038,9 @@
               <a:buNone/>
             </a:pPr>
             <a:r>
-              <a:rPr lang="en-US" sz="1500" dirty="0">
-                <a:solidFill>
-                  <a:srgbClr val="1F3B4D"/>
+              <a:rPr lang="en-US" sz="1400" dirty="0">
+                <a:solidFill>
+                  <a:srgbClr val="000000"/>
                 </a:solidFill>
                 <a:latin typeface="Times New Roman" pitchFamily="18" charset="0"/>
                 <a:cs typeface="Times New Roman" pitchFamily="18" charset="0"/>
@@ -5056,9 +5056,9 @@
               <a:buNone/>
             </a:pPr>
             <a:r>
-              <a:rPr lang="en-US" sz="1500" dirty="0">
-                <a:solidFill>
-                  <a:srgbClr val="1F3B4D"/>
+              <a:rPr lang="en-US" sz="1400" dirty="0">
+                <a:solidFill>
+                  <a:srgbClr val="000000"/>
                 </a:solidFill>
                 <a:latin typeface="Times New Roman" pitchFamily="18" charset="0"/>
                 <a:cs typeface="Times New Roman" pitchFamily="18" charset="0"/>
@@ -5074,9 +5074,9 @@
               <a:buNone/>
             </a:pPr>
             <a:r>
-              <a:rPr lang="en-US" sz="1500" dirty="0">
-                <a:solidFill>
-                  <a:srgbClr val="1F3B4D"/>
+              <a:rPr lang="en-US" sz="1400" dirty="0">
+                <a:solidFill>
+                  <a:srgbClr val="000000"/>
                 </a:solidFill>
                 <a:latin typeface="Times New Roman" pitchFamily="18" charset="0"/>
                 <a:cs typeface="Times New Roman" pitchFamily="18" charset="0"/>
@@ -5092,9 +5092,9 @@
               <a:buNone/>
             </a:pPr>
             <a:r>
-              <a:rPr lang="en-US" sz="1500" dirty="0">
-                <a:solidFill>
-                  <a:srgbClr val="1F3B4D"/>
+              <a:rPr lang="en-US" sz="1400" dirty="0">
+                <a:solidFill>
+                  <a:srgbClr val="000000"/>
                 </a:solidFill>
                 <a:latin typeface="Times New Roman" pitchFamily="18" charset="0"/>
                 <a:cs typeface="Times New Roman" pitchFamily="18" charset="0"/>
@@ -5110,9 +5110,9 @@
               <a:buNone/>
             </a:pPr>
             <a:r>
-              <a:rPr lang="en-US" sz="1500" dirty="0">
-                <a:solidFill>
-                  <a:srgbClr val="1F3B4D"/>
+              <a:rPr lang="en-US" sz="1400" dirty="0">
+                <a:solidFill>
+                  <a:srgbClr val="000000"/>
                 </a:solidFill>
                 <a:latin typeface="Times New Roman" pitchFamily="18" charset="0"/>
                 <a:cs typeface="Times New Roman" pitchFamily="18" charset="0"/>
@@ -5149,7 +5149,7 @@
       </p:grpSpPr>
       <p:sp>
         <p:nvSpPr>
-          <p:cNvPr id="10" name="TitleBar"/>
+          <p:cNvPr id="9" name="WhiteBG"/>
           <p:cNvSpPr>
             <a:spLocks noGrp="1"/>
           </p:cNvSpPr>
@@ -5158,43 +5158,25 @@
         <p:spPr>
           <a:xfrm>
             <a:off x="0" y="0"/>
-            <a:ext cx="12192000" cy="900000"/>
+            <a:ext cx="12192000" cy="6858000"/>
           </a:xfrm>
           <a:prstGeom prst="rect">
             <a:avLst/>
           </a:prstGeom>
           <a:solidFill>
-            <a:srgbClr val="3494BA"/>
+            <a:srgbClr val="FFFFFF"/>
           </a:solidFill>
         </p:spPr>
         <p:txBody>
-          <a:bodyPr wrap="square" anchor="ctr">
+          <a:bodyPr wrap="square" anchor="t">
             <a:normAutofit/>
           </a:bodyPr>
           <a:lstStyle/>
-          <a:p>
-            <a:pPr lvl="0" algn="l">
-              <a:spcAft>
-                <a:spcPts val="0"/>
-              </a:spcAft>
-              <a:buNone/>
-            </a:pPr>
-            <a:r>
-              <a:rPr lang="en-US" sz="2600" b="1" dirty="0">
-                <a:solidFill>
-                  <a:srgbClr val="FFFFFF"/>
-                </a:solidFill>
-                <a:latin typeface="Times New Roman" pitchFamily="18" charset="0"/>
-                <a:cs typeface="Times New Roman" pitchFamily="18" charset="0"/>
-              </a:rPr>
-              <a:t>  Family History</a:t>
-            </a:r>
-          </a:p>
-        </p:txBody>
-      </p:sp>
-      <p:sp>
-        <p:nvSpPr>
-          <p:cNvPr id="11" name="Body"/>
+        </p:txBody>
+      </p:sp>
+      <p:sp>
+        <p:nvSpPr>
+          <p:cNvPr id="10" name="Heading"/>
           <p:cNvSpPr>
             <a:spLocks noGrp="1"/>
           </p:cNvSpPr>
@@ -5202,8 +5184,8 @@
         </p:nvSpPr>
         <p:spPr>
           <a:xfrm>
-            <a:off x="610000" y="1050000"/>
-            <a:ext cx="10972000" cy="5558000"/>
+            <a:off x="610000" y="300000"/>
+            <a:ext cx="10972000" cy="900000"/>
           </a:xfrm>
           <a:prstGeom prst="rect">
             <a:avLst/>
@@ -5216,6 +5198,49 @@
           </a:bodyPr>
           <a:lstStyle/>
           <a:p>
+            <a:pPr lvl="0" algn="l">
+              <a:spcAft>
+                <a:spcPts val="0"/>
+              </a:spcAft>
+              <a:buNone/>
+            </a:pPr>
+            <a:r>
+              <a:rPr lang="en-US" sz="2800" b="1" u="sng" dirty="0">
+                <a:solidFill>
+                  <a:srgbClr val="000000"/>
+                </a:solidFill>
+                <a:latin typeface="Times New Roman" pitchFamily="18" charset="0"/>
+                <a:cs typeface="Times New Roman" pitchFamily="18" charset="0"/>
+              </a:rPr>
+              <a:t>Family History</a:t>
+            </a:r>
+          </a:p>
+        </p:txBody>
+      </p:sp>
+      <p:sp>
+        <p:nvSpPr>
+          <p:cNvPr id="11" name="Body"/>
+          <p:cNvSpPr>
+            <a:spLocks noGrp="1"/>
+          </p:cNvSpPr>
+          <p:nvPr/>
+        </p:nvSpPr>
+        <p:spPr>
+          <a:xfrm>
+            <a:off x="610000" y="1250000"/>
+            <a:ext cx="10972000" cy="5358000"/>
+          </a:xfrm>
+          <a:prstGeom prst="rect">
+            <a:avLst/>
+          </a:prstGeom>
+          <a:noFill/>
+        </p:spPr>
+        <p:txBody>
+          <a:bodyPr wrap="square" anchor="t">
+            <a:normAutofit/>
+          </a:bodyPr>
+          <a:lstStyle/>
+          <a:p>
             <a:pPr marL="285750" indent="-285750" lvl="0">
               <a:spcAft>
                 <a:spcPts val="600"/>
@@ -5224,9 +5249,9 @@
               <a:buChar char="•"/>
             </a:pPr>
             <a:r>
-              <a:rPr lang="en-US" sz="1600" b="1" dirty="0">
-                <a:solidFill>
-                  <a:srgbClr val="1F3B4D"/>
+              <a:rPr lang="en-US" sz="1400" b="1" dirty="0">
+                <a:solidFill>
+                  <a:srgbClr val="000000"/>
                 </a:solidFill>
                 <a:latin typeface="Times New Roman" pitchFamily="18" charset="0"/>
                 <a:cs typeface="Times New Roman" pitchFamily="18" charset="0"/>
@@ -5234,9 +5259,9 @@
               <a:t>Family history of illness: </a:t>
             </a:r>
             <a:r>
-              <a:rPr lang="en-US" sz="1600" dirty="0">
-                <a:solidFill>
-                  <a:srgbClr val="222222"/>
+              <a:rPr lang="en-US" sz="1400" dirty="0">
+                <a:solidFill>
+                  <a:srgbClr val="000000"/>
                 </a:solidFill>
                 <a:latin typeface="Times New Roman" pitchFamily="18" charset="0"/>
                 <a:cs typeface="Times New Roman" pitchFamily="18" charset="0"/>
@@ -5253,9 +5278,9 @@
               <a:buChar char="•"/>
             </a:pPr>
             <a:r>
-              <a:rPr lang="en-US" sz="1600" b="1" dirty="0">
-                <a:solidFill>
-                  <a:srgbClr val="1F3B4D"/>
+              <a:rPr lang="en-US" sz="1400" b="1" dirty="0">
+                <a:solidFill>
+                  <a:srgbClr val="000000"/>
                 </a:solidFill>
                 <a:latin typeface="Times New Roman" pitchFamily="18" charset="0"/>
                 <a:cs typeface="Times New Roman" pitchFamily="18" charset="0"/>
@@ -5263,9 +5288,9 @@
               <a:t>Living arrangement: </a:t>
             </a:r>
             <a:r>
-              <a:rPr lang="en-US" sz="1600" dirty="0">
-                <a:solidFill>
-                  <a:srgbClr val="222222"/>
+              <a:rPr lang="en-US" sz="1400" dirty="0">
+                <a:solidFill>
+                  <a:srgbClr val="000000"/>
                 </a:solidFill>
                 <a:latin typeface="Times New Roman" pitchFamily="18" charset="0"/>
                 <a:cs typeface="Times New Roman" pitchFamily="18" charset="0"/>
@@ -5282,9 +5307,9 @@
               <a:buChar char="•"/>
             </a:pPr>
             <a:r>
-              <a:rPr lang="en-US" sz="1600" b="1" dirty="0">
-                <a:solidFill>
-                  <a:srgbClr val="1F3B4D"/>
+              <a:rPr lang="en-US" sz="1400" b="1" dirty="0">
+                <a:solidFill>
+                  <a:srgbClr val="000000"/>
                 </a:solidFill>
                 <a:latin typeface="Times New Roman" pitchFamily="18" charset="0"/>
                 <a:cs typeface="Times New Roman" pitchFamily="18" charset="0"/>
@@ -5292,9 +5317,9 @@
               <a:t>Primary caregiver: </a:t>
             </a:r>
             <a:r>
-              <a:rPr lang="en-US" sz="1600" dirty="0">
-                <a:solidFill>
-                  <a:srgbClr val="222222"/>
+              <a:rPr lang="en-US" sz="1400" dirty="0">
+                <a:solidFill>
+                  <a:srgbClr val="000000"/>
                 </a:solidFill>
                 <a:latin typeface="Times New Roman" pitchFamily="18" charset="0"/>
                 <a:cs typeface="Times New Roman" pitchFamily="18" charset="0"/>
@@ -5311,9 +5336,9 @@
               <a:buChar char="•"/>
             </a:pPr>
             <a:r>
-              <a:rPr lang="en-US" sz="1600" b="1" dirty="0">
-                <a:solidFill>
-                  <a:srgbClr val="1F3B4D"/>
+              <a:rPr lang="en-US" sz="1400" b="1" dirty="0">
+                <a:solidFill>
+                  <a:srgbClr val="000000"/>
                 </a:solidFill>
                 <a:latin typeface="Times New Roman" pitchFamily="18" charset="0"/>
                 <a:cs typeface="Times New Roman" pitchFamily="18" charset="0"/>
@@ -5321,9 +5346,9 @@
               <a:t>Communication pattern: </a:t>
             </a:r>
             <a:r>
-              <a:rPr lang="en-US" sz="1600" dirty="0">
-                <a:solidFill>
-                  <a:srgbClr val="222222"/>
+              <a:rPr lang="en-US" sz="1400" dirty="0">
+                <a:solidFill>
+                  <a:srgbClr val="000000"/>
                 </a:solidFill>
                 <a:latin typeface="Times New Roman" pitchFamily="18" charset="0"/>
                 <a:cs typeface="Times New Roman" pitchFamily="18" charset="0"/>
@@ -5340,9 +5365,9 @@
               <a:buChar char="•"/>
             </a:pPr>
             <a:r>
-              <a:rPr lang="en-US" sz="1600" b="1" dirty="0">
-                <a:solidFill>
-                  <a:srgbClr val="1F3B4D"/>
+              <a:rPr lang="en-US" sz="1400" b="1" dirty="0">
+                <a:solidFill>
+                  <a:srgbClr val="000000"/>
                 </a:solidFill>
                 <a:latin typeface="Times New Roman" pitchFamily="18" charset="0"/>
                 <a:cs typeface="Times New Roman" pitchFamily="18" charset="0"/>
@@ -5350,9 +5375,9 @@
               <a:t>Family understanding of illness: </a:t>
             </a:r>
             <a:r>
-              <a:rPr lang="en-US" sz="1600" dirty="0">
-                <a:solidFill>
-                  <a:srgbClr val="222222"/>
+              <a:rPr lang="en-US" sz="1400" dirty="0">
+                <a:solidFill>
+                  <a:srgbClr val="000000"/>
                 </a:solidFill>
                 <a:latin typeface="Times New Roman" pitchFamily="18" charset="0"/>
                 <a:cs typeface="Times New Roman" pitchFamily="18" charset="0"/>
@@ -5369,9 +5394,9 @@
               <a:buChar char="•"/>
             </a:pPr>
             <a:r>
-              <a:rPr lang="en-US" sz="1600" b="1" dirty="0">
-                <a:solidFill>
-                  <a:srgbClr val="1F3B4D"/>
+              <a:rPr lang="en-US" sz="1400" b="1" dirty="0">
+                <a:solidFill>
+                  <a:srgbClr val="000000"/>
                 </a:solidFill>
                 <a:latin typeface="Times New Roman" pitchFamily="18" charset="0"/>
                 <a:cs typeface="Times New Roman" pitchFamily="18" charset="0"/>
@@ -5379,9 +5404,9 @@
               <a:t>Family attitude: </a:t>
             </a:r>
             <a:r>
-              <a:rPr lang="en-US" sz="1600" dirty="0">
-                <a:solidFill>
-                  <a:srgbClr val="222222"/>
+              <a:rPr lang="en-US" sz="1400" dirty="0">
+                <a:solidFill>
+                  <a:srgbClr val="000000"/>
                 </a:solidFill>
                 <a:latin typeface="Times New Roman" pitchFamily="18" charset="0"/>
                 <a:cs typeface="Times New Roman" pitchFamily="18" charset="0"/>
@@ -5398,9 +5423,9 @@
               <a:buChar char="•"/>
             </a:pPr>
             <a:r>
-              <a:rPr lang="en-US" sz="1600" b="1" dirty="0">
-                <a:solidFill>
-                  <a:srgbClr val="1F3B4D"/>
+              <a:rPr lang="en-US" sz="1400" b="1" dirty="0">
+                <a:solidFill>
+                  <a:srgbClr val="000000"/>
                 </a:solidFill>
                 <a:latin typeface="Times New Roman" pitchFamily="18" charset="0"/>
                 <a:cs typeface="Times New Roman" pitchFamily="18" charset="0"/>
@@ -5408,9 +5433,9 @@
               <a:t>Family stressors: </a:t>
             </a:r>
             <a:r>
-              <a:rPr lang="en-US" sz="1600" dirty="0">
-                <a:solidFill>
-                  <a:srgbClr val="222222"/>
+              <a:rPr lang="en-US" sz="1400" dirty="0">
+                <a:solidFill>
+                  <a:srgbClr val="000000"/>
                 </a:solidFill>
                 <a:latin typeface="Times New Roman" pitchFamily="18" charset="0"/>
                 <a:cs typeface="Times New Roman" pitchFamily="18" charset="0"/>
@@ -5447,7 +5472,7 @@
       </p:grpSpPr>
       <p:sp>
         <p:nvSpPr>
-          <p:cNvPr id="10" name="TitleBar"/>
+          <p:cNvPr id="9" name="WhiteBG"/>
           <p:cNvSpPr>
             <a:spLocks noGrp="1"/>
           </p:cNvSpPr>
@@ -5456,43 +5481,25 @@
         <p:spPr>
           <a:xfrm>
             <a:off x="0" y="0"/>
-            <a:ext cx="12192000" cy="900000"/>
+            <a:ext cx="12192000" cy="6858000"/>
           </a:xfrm>
           <a:prstGeom prst="rect">
             <a:avLst/>
           </a:prstGeom>
           <a:solidFill>
-            <a:srgbClr val="3494BA"/>
+            <a:srgbClr val="FFFFFF"/>
           </a:solidFill>
         </p:spPr>
         <p:txBody>
-          <a:bodyPr wrap="square" anchor="ctr">
+          <a:bodyPr wrap="square" anchor="t">
             <a:normAutofit/>
           </a:bodyPr>
           <a:lstStyle/>
-          <a:p>
-            <a:pPr lvl="0" algn="l">
-              <a:spcAft>
-                <a:spcPts val="0"/>
-              </a:spcAft>
-              <a:buNone/>
-            </a:pPr>
-            <a:r>
-              <a:rPr lang="en-US" sz="2600" b="1" dirty="0">
-                <a:solidFill>
-                  <a:srgbClr val="FFFFFF"/>
-                </a:solidFill>
-                <a:latin typeface="Times New Roman" pitchFamily="18" charset="0"/>
-                <a:cs typeface="Times New Roman" pitchFamily="18" charset="0"/>
-              </a:rPr>
-              <a:t>  Personal History</a:t>
-            </a:r>
-          </a:p>
-        </p:txBody>
-      </p:sp>
-      <p:sp>
-        <p:nvSpPr>
-          <p:cNvPr id="11" name="Body"/>
+        </p:txBody>
+      </p:sp>
+      <p:sp>
+        <p:nvSpPr>
+          <p:cNvPr id="10" name="Heading"/>
           <p:cNvSpPr>
             <a:spLocks noGrp="1"/>
           </p:cNvSpPr>
@@ -5500,8 +5507,8 @@
         </p:nvSpPr>
         <p:spPr>
           <a:xfrm>
-            <a:off x="610000" y="1050000"/>
-            <a:ext cx="10972000" cy="5558000"/>
+            <a:off x="610000" y="300000"/>
+            <a:ext cx="10972000" cy="900000"/>
           </a:xfrm>
           <a:prstGeom prst="rect">
             <a:avLst/>
@@ -5514,6 +5521,49 @@
           </a:bodyPr>
           <a:lstStyle/>
           <a:p>
+            <a:pPr lvl="0" algn="l">
+              <a:spcAft>
+                <a:spcPts val="0"/>
+              </a:spcAft>
+              <a:buNone/>
+            </a:pPr>
+            <a:r>
+              <a:rPr lang="en-US" sz="2800" b="1" u="sng" dirty="0">
+                <a:solidFill>
+                  <a:srgbClr val="000000"/>
+                </a:solidFill>
+                <a:latin typeface="Times New Roman" pitchFamily="18" charset="0"/>
+                <a:cs typeface="Times New Roman" pitchFamily="18" charset="0"/>
+              </a:rPr>
+              <a:t>Personal History</a:t>
+            </a:r>
+          </a:p>
+        </p:txBody>
+      </p:sp>
+      <p:sp>
+        <p:nvSpPr>
+          <p:cNvPr id="11" name="Body"/>
+          <p:cNvSpPr>
+            <a:spLocks noGrp="1"/>
+          </p:cNvSpPr>
+          <p:nvPr/>
+        </p:nvSpPr>
+        <p:spPr>
+          <a:xfrm>
+            <a:off x="610000" y="1250000"/>
+            <a:ext cx="10972000" cy="5358000"/>
+          </a:xfrm>
+          <a:prstGeom prst="rect">
+            <a:avLst/>
+          </a:prstGeom>
+          <a:noFill/>
+        </p:spPr>
+        <p:txBody>
+          <a:bodyPr wrap="square" anchor="t">
+            <a:normAutofit/>
+          </a:bodyPr>
+          <a:lstStyle/>
+          <a:p>
             <a:pPr marL="285750" indent="-285750" lvl="0">
               <a:spcAft>
                 <a:spcPts val="600"/>
@@ -5522,9 +5572,9 @@
               <a:buChar char="•"/>
             </a:pPr>
             <a:r>
-              <a:rPr lang="en-US" sz="1600" b="1" dirty="0">
-                <a:solidFill>
-                  <a:srgbClr val="1F3B4D"/>
+              <a:rPr lang="en-US" sz="1400" b="1" dirty="0">
+                <a:solidFill>
+                  <a:srgbClr val="000000"/>
                 </a:solidFill>
                 <a:latin typeface="Times New Roman" pitchFamily="18" charset="0"/>
                 <a:cs typeface="Times New Roman" pitchFamily="18" charset="0"/>
@@ -5532,9 +5582,9 @@
               <a:t>Medical (personal): </a:t>
             </a:r>
             <a:r>
-              <a:rPr lang="en-US" sz="1600" dirty="0">
-                <a:solidFill>
-                  <a:srgbClr val="222222"/>
+              <a:rPr lang="en-US" sz="1400" dirty="0">
+                <a:solidFill>
+                  <a:srgbClr val="000000"/>
                 </a:solidFill>
                 <a:latin typeface="Times New Roman" pitchFamily="18" charset="0"/>
                 <a:cs typeface="Times New Roman" pitchFamily="18" charset="0"/>
@@ -5551,9 +5601,9 @@
               <a:buChar char="•"/>
             </a:pPr>
             <a:r>
-              <a:rPr lang="en-US" sz="1600" b="1" dirty="0">
-                <a:solidFill>
-                  <a:srgbClr val="1F3B4D"/>
+              <a:rPr lang="en-US" sz="1400" b="1" dirty="0">
+                <a:solidFill>
+                  <a:srgbClr val="000000"/>
                 </a:solidFill>
                 <a:latin typeface="Times New Roman" pitchFamily="18" charset="0"/>
                 <a:cs typeface="Times New Roman" pitchFamily="18" charset="0"/>
@@ -5561,9 +5611,9 @@
               <a:t>Childhood &amp; upbringing: </a:t>
             </a:r>
             <a:r>
-              <a:rPr lang="en-US" sz="1600" dirty="0">
-                <a:solidFill>
-                  <a:srgbClr val="222222"/>
+              <a:rPr lang="en-US" sz="1400" dirty="0">
+                <a:solidFill>
+                  <a:srgbClr val="000000"/>
                 </a:solidFill>
                 <a:latin typeface="Times New Roman" pitchFamily="18" charset="0"/>
                 <a:cs typeface="Times New Roman" pitchFamily="18" charset="0"/>
@@ -5580,9 +5630,9 @@
               <a:buChar char="•"/>
             </a:pPr>
             <a:r>
-              <a:rPr lang="en-US" sz="1600" b="1" dirty="0">
-                <a:solidFill>
-                  <a:srgbClr val="1F3B4D"/>
+              <a:rPr lang="en-US" sz="1400" b="1" dirty="0">
+                <a:solidFill>
+                  <a:srgbClr val="000000"/>
                 </a:solidFill>
                 <a:latin typeface="Times New Roman" pitchFamily="18" charset="0"/>
                 <a:cs typeface="Times New Roman" pitchFamily="18" charset="0"/>
@@ -5590,9 +5640,9 @@
               <a:t>Menstrual history: </a:t>
             </a:r>
             <a:r>
-              <a:rPr lang="en-US" sz="1600" dirty="0">
-                <a:solidFill>
-                  <a:srgbClr val="222222"/>
+              <a:rPr lang="en-US" sz="1400" dirty="0">
+                <a:solidFill>
+                  <a:srgbClr val="000000"/>
                 </a:solidFill>
                 <a:latin typeface="Times New Roman" pitchFamily="18" charset="0"/>
                 <a:cs typeface="Times New Roman" pitchFamily="18" charset="0"/>
@@ -5609,9 +5659,9 @@
               <a:buChar char="•"/>
             </a:pPr>
             <a:r>
-              <a:rPr lang="en-US" sz="1600" b="1" dirty="0">
-                <a:solidFill>
-                  <a:srgbClr val="1F3B4D"/>
+              <a:rPr lang="en-US" sz="1400" b="1" dirty="0">
+                <a:solidFill>
+                  <a:srgbClr val="000000"/>
                 </a:solidFill>
                 <a:latin typeface="Times New Roman" pitchFamily="18" charset="0"/>
                 <a:cs typeface="Times New Roman" pitchFamily="18" charset="0"/>
@@ -5619,9 +5669,9 @@
               <a:t>Sexual history: </a:t>
             </a:r>
             <a:r>
-              <a:rPr lang="en-US" sz="1600" dirty="0">
-                <a:solidFill>
-                  <a:srgbClr val="222222"/>
+              <a:rPr lang="en-US" sz="1400" dirty="0">
+                <a:solidFill>
+                  <a:srgbClr val="000000"/>
                 </a:solidFill>
                 <a:latin typeface="Times New Roman" pitchFamily="18" charset="0"/>
                 <a:cs typeface="Times New Roman" pitchFamily="18" charset="0"/>
@@ -5638,9 +5688,9 @@
               <a:buChar char="•"/>
             </a:pPr>
             <a:r>
-              <a:rPr lang="en-US" sz="1600" b="1" dirty="0">
-                <a:solidFill>
-                  <a:srgbClr val="1F3B4D"/>
+              <a:rPr lang="en-US" sz="1400" b="1" dirty="0">
+                <a:solidFill>
+                  <a:srgbClr val="000000"/>
                 </a:solidFill>
                 <a:latin typeface="Times New Roman" pitchFamily="18" charset="0"/>
                 <a:cs typeface="Times New Roman" pitchFamily="18" charset="0"/>
@@ -5648,9 +5698,9 @@
               <a:t>Marital history: </a:t>
             </a:r>
             <a:r>
-              <a:rPr lang="en-US" sz="1600" dirty="0">
-                <a:solidFill>
-                  <a:srgbClr val="222222"/>
+              <a:rPr lang="en-US" sz="1400" dirty="0">
+                <a:solidFill>
+                  <a:srgbClr val="000000"/>
                 </a:solidFill>
                 <a:latin typeface="Times New Roman" pitchFamily="18" charset="0"/>
                 <a:cs typeface="Times New Roman" pitchFamily="18" charset="0"/>
@@ -5667,9 +5717,9 @@
               <a:buChar char="•"/>
             </a:pPr>
             <a:r>
-              <a:rPr lang="en-US" sz="1600" b="1" dirty="0">
-                <a:solidFill>
-                  <a:srgbClr val="1F3B4D"/>
+              <a:rPr lang="en-US" sz="1400" b="1" dirty="0">
+                <a:solidFill>
+                  <a:srgbClr val="000000"/>
                 </a:solidFill>
                 <a:latin typeface="Times New Roman" pitchFamily="18" charset="0"/>
                 <a:cs typeface="Times New Roman" pitchFamily="18" charset="0"/>
@@ -5677,9 +5727,9 @@
               <a:t>Substance / forensic: </a:t>
             </a:r>
             <a:r>
-              <a:rPr lang="en-US" sz="1600" dirty="0">
-                <a:solidFill>
-                  <a:srgbClr val="222222"/>
+              <a:rPr lang="en-US" sz="1400" dirty="0">
+                <a:solidFill>
+                  <a:srgbClr val="000000"/>
                 </a:solidFill>
                 <a:latin typeface="Times New Roman" pitchFamily="18" charset="0"/>
                 <a:cs typeface="Times New Roman" pitchFamily="18" charset="0"/>
@@ -5716,7 +5766,7 @@
       </p:grpSpPr>
       <p:sp>
         <p:nvSpPr>
-          <p:cNvPr id="10" name="TitleBar"/>
+          <p:cNvPr id="9" name="WhiteBG"/>
           <p:cNvSpPr>
             <a:spLocks noGrp="1"/>
           </p:cNvSpPr>
@@ -5725,43 +5775,25 @@
         <p:spPr>
           <a:xfrm>
             <a:off x="0" y="0"/>
-            <a:ext cx="12192000" cy="900000"/>
+            <a:ext cx="12192000" cy="6858000"/>
           </a:xfrm>
           <a:prstGeom prst="rect">
             <a:avLst/>
           </a:prstGeom>
           <a:solidFill>
-            <a:srgbClr val="3494BA"/>
+            <a:srgbClr val="FFFFFF"/>
           </a:solidFill>
         </p:spPr>
         <p:txBody>
-          <a:bodyPr wrap="square" anchor="ctr">
+          <a:bodyPr wrap="square" anchor="t">
             <a:normAutofit/>
           </a:bodyPr>
           <a:lstStyle/>
-          <a:p>
-            <a:pPr lvl="0" algn="l">
-              <a:spcAft>
-                <a:spcPts val="0"/>
-              </a:spcAft>
-              <a:buNone/>
-            </a:pPr>
-            <a:r>
-              <a:rPr lang="en-US" sz="2600" b="1" dirty="0">
-                <a:solidFill>
-                  <a:srgbClr val="FFFFFF"/>
-                </a:solidFill>
-                <a:latin typeface="Times New Roman" pitchFamily="18" charset="0"/>
-                <a:cs typeface="Times New Roman" pitchFamily="18" charset="0"/>
-              </a:rPr>
-              <a:t>  Premorbid Personality</a:t>
-            </a:r>
-          </a:p>
-        </p:txBody>
-      </p:sp>
-      <p:sp>
-        <p:nvSpPr>
-          <p:cNvPr id="11" name="Body"/>
+        </p:txBody>
+      </p:sp>
+      <p:sp>
+        <p:nvSpPr>
+          <p:cNvPr id="10" name="Heading"/>
           <p:cNvSpPr>
             <a:spLocks noGrp="1"/>
           </p:cNvSpPr>
@@ -5769,8 +5801,8 @@
         </p:nvSpPr>
         <p:spPr>
           <a:xfrm>
-            <a:off x="610000" y="1050000"/>
-            <a:ext cx="10972000" cy="5558000"/>
+            <a:off x="610000" y="300000"/>
+            <a:ext cx="10972000" cy="900000"/>
           </a:xfrm>
           <a:prstGeom prst="rect">
             <a:avLst/>
@@ -5783,6 +5815,49 @@
           </a:bodyPr>
           <a:lstStyle/>
           <a:p>
+            <a:pPr lvl="0" algn="l">
+              <a:spcAft>
+                <a:spcPts val="0"/>
+              </a:spcAft>
+              <a:buNone/>
+            </a:pPr>
+            <a:r>
+              <a:rPr lang="en-US" sz="2800" b="1" u="sng" dirty="0">
+                <a:solidFill>
+                  <a:srgbClr val="000000"/>
+                </a:solidFill>
+                <a:latin typeface="Times New Roman" pitchFamily="18" charset="0"/>
+                <a:cs typeface="Times New Roman" pitchFamily="18" charset="0"/>
+              </a:rPr>
+              <a:t>Premorbid Personality</a:t>
+            </a:r>
+          </a:p>
+        </p:txBody>
+      </p:sp>
+      <p:sp>
+        <p:nvSpPr>
+          <p:cNvPr id="11" name="Body"/>
+          <p:cNvSpPr>
+            <a:spLocks noGrp="1"/>
+          </p:cNvSpPr>
+          <p:nvPr/>
+        </p:nvSpPr>
+        <p:spPr>
+          <a:xfrm>
+            <a:off x="610000" y="1250000"/>
+            <a:ext cx="10972000" cy="5358000"/>
+          </a:xfrm>
+          <a:prstGeom prst="rect">
+            <a:avLst/>
+          </a:prstGeom>
+          <a:noFill/>
+        </p:spPr>
+        <p:txBody>
+          <a:bodyPr wrap="square" anchor="t">
+            <a:normAutofit/>
+          </a:bodyPr>
+          <a:lstStyle/>
+          <a:p>
             <a:pPr marL="285750" indent="-285750" lvl="0">
               <a:spcAft>
                 <a:spcPts val="600"/>
@@ -5791,9 +5866,9 @@
               <a:buChar char="•"/>
             </a:pPr>
             <a:r>
-              <a:rPr lang="en-US" sz="1600" b="1" dirty="0">
-                <a:solidFill>
-                  <a:srgbClr val="1F3B4D"/>
+              <a:rPr lang="en-US" sz="1400" b="1" dirty="0">
+                <a:solidFill>
+                  <a:srgbClr val="000000"/>
                 </a:solidFill>
                 <a:latin typeface="Times New Roman" pitchFamily="18" charset="0"/>
                 <a:cs typeface="Times New Roman" pitchFamily="18" charset="0"/>
@@ -5801,9 +5876,9 @@
               <a:t>Social relationships: </a:t>
             </a:r>
             <a:r>
-              <a:rPr lang="en-US" sz="1600" dirty="0">
-                <a:solidFill>
-                  <a:srgbClr val="222222"/>
+              <a:rPr lang="en-US" sz="1400" dirty="0">
+                <a:solidFill>
+                  <a:srgbClr val="000000"/>
                 </a:solidFill>
                 <a:latin typeface="Times New Roman" pitchFamily="18" charset="0"/>
                 <a:cs typeface="Times New Roman" pitchFamily="18" charset="0"/>
@@ -5820,9 +5895,9 @@
               <a:buChar char="•"/>
             </a:pPr>
             <a:r>
-              <a:rPr lang="en-US" sz="1600" b="1" dirty="0">
-                <a:solidFill>
-                  <a:srgbClr val="1F3B4D"/>
+              <a:rPr lang="en-US" sz="1400" b="1" dirty="0">
+                <a:solidFill>
+                  <a:srgbClr val="000000"/>
                 </a:solidFill>
                 <a:latin typeface="Times New Roman" pitchFamily="18" charset="0"/>
                 <a:cs typeface="Times New Roman" pitchFamily="18" charset="0"/>
@@ -5830,9 +5905,9 @@
               <a:t>Work &amp; responsibility: </a:t>
             </a:r>
             <a:r>
-              <a:rPr lang="en-US" sz="1600" dirty="0">
-                <a:solidFill>
-                  <a:srgbClr val="222222"/>
+              <a:rPr lang="en-US" sz="1400" dirty="0">
+                <a:solidFill>
+                  <a:srgbClr val="000000"/>
                 </a:solidFill>
                 <a:latin typeface="Times New Roman" pitchFamily="18" charset="0"/>
                 <a:cs typeface="Times New Roman" pitchFamily="18" charset="0"/>
@@ -5849,9 +5924,9 @@
               <a:buChar char="•"/>
             </a:pPr>
             <a:r>
-              <a:rPr lang="en-US" sz="1600" b="1" dirty="0">
-                <a:solidFill>
-                  <a:srgbClr val="1F3B4D"/>
+              <a:rPr lang="en-US" sz="1400" b="1" dirty="0">
+                <a:solidFill>
+                  <a:srgbClr val="000000"/>
                 </a:solidFill>
                 <a:latin typeface="Times New Roman" pitchFamily="18" charset="0"/>
                 <a:cs typeface="Times New Roman" pitchFamily="18" charset="0"/>
@@ -5859,9 +5934,9 @@
               <a:t>Reaction to stress: </a:t>
             </a:r>
             <a:r>
-              <a:rPr lang="en-US" sz="1600" dirty="0">
-                <a:solidFill>
-                  <a:srgbClr val="222222"/>
+              <a:rPr lang="en-US" sz="1400" dirty="0">
+                <a:solidFill>
+                  <a:srgbClr val="000000"/>
                 </a:solidFill>
                 <a:latin typeface="Times New Roman" pitchFamily="18" charset="0"/>
                 <a:cs typeface="Times New Roman" pitchFamily="18" charset="0"/>
@@ -5878,9 +5953,9 @@
               <a:buChar char="•"/>
             </a:pPr>
             <a:r>
-              <a:rPr lang="en-US" sz="1600" b="1" dirty="0">
-                <a:solidFill>
-                  <a:srgbClr val="1F3B4D"/>
+              <a:rPr lang="en-US" sz="1400" b="1" dirty="0">
+                <a:solidFill>
+                  <a:srgbClr val="000000"/>
                 </a:solidFill>
                 <a:latin typeface="Times New Roman" pitchFamily="18" charset="0"/>
                 <a:cs typeface="Times New Roman" pitchFamily="18" charset="0"/>
@@ -5888,9 +5963,9 @@
               <a:t>Hobbies / interests: </a:t>
             </a:r>
             <a:r>
-              <a:rPr lang="en-US" sz="1600" dirty="0">
-                <a:solidFill>
-                  <a:srgbClr val="222222"/>
+              <a:rPr lang="en-US" sz="1400" dirty="0">
+                <a:solidFill>
+                  <a:srgbClr val="000000"/>
                 </a:solidFill>
                 <a:latin typeface="Times New Roman" pitchFamily="18" charset="0"/>
                 <a:cs typeface="Times New Roman" pitchFamily="18" charset="0"/>
@@ -5907,9 +5982,9 @@
               <a:buChar char="•"/>
             </a:pPr>
             <a:r>
-              <a:rPr lang="en-US" sz="1600" b="1" dirty="0">
-                <a:solidFill>
-                  <a:srgbClr val="1F3B4D"/>
+              <a:rPr lang="en-US" sz="1400" b="1" dirty="0">
+                <a:solidFill>
+                  <a:srgbClr val="000000"/>
                 </a:solidFill>
                 <a:latin typeface="Times New Roman" pitchFamily="18" charset="0"/>
                 <a:cs typeface="Times New Roman" pitchFamily="18" charset="0"/>
@@ -5917,9 +5992,9 @@
               <a:t>Premorbid mood: </a:t>
             </a:r>
             <a:r>
-              <a:rPr lang="en-US" sz="1600" dirty="0">
-                <a:solidFill>
-                  <a:srgbClr val="222222"/>
+              <a:rPr lang="en-US" sz="1400" dirty="0">
+                <a:solidFill>
+                  <a:srgbClr val="000000"/>
                 </a:solidFill>
                 <a:latin typeface="Times New Roman" pitchFamily="18" charset="0"/>
                 <a:cs typeface="Times New Roman" pitchFamily="18" charset="0"/>
@@ -5936,9 +6011,9 @@
               <a:buChar char="•"/>
             </a:pPr>
             <a:r>
-              <a:rPr lang="en-US" sz="1600" b="1" dirty="0">
-                <a:solidFill>
-                  <a:srgbClr val="1F3B4D"/>
+              <a:rPr lang="en-US" sz="1400" b="1" dirty="0">
+                <a:solidFill>
+                  <a:srgbClr val="000000"/>
                 </a:solidFill>
                 <a:latin typeface="Times New Roman" pitchFamily="18" charset="0"/>
                 <a:cs typeface="Times New Roman" pitchFamily="18" charset="0"/>
@@ -5946,9 +6021,9 @@
               <a:t>Interpersonal relations: </a:t>
             </a:r>
             <a:r>
-              <a:rPr lang="en-US" sz="1600" dirty="0">
-                <a:solidFill>
-                  <a:srgbClr val="222222"/>
+              <a:rPr lang="en-US" sz="1400" dirty="0">
+                <a:solidFill>
+                  <a:srgbClr val="000000"/>
                 </a:solidFill>
                 <a:latin typeface="Times New Roman" pitchFamily="18" charset="0"/>
                 <a:cs typeface="Times New Roman" pitchFamily="18" charset="0"/>
@@ -5965,9 +6040,9 @@
               <a:buChar char="•"/>
             </a:pPr>
             <a:r>
-              <a:rPr lang="en-US" sz="1600" b="1" dirty="0">
-                <a:solidFill>
-                  <a:srgbClr val="1F3B4D"/>
+              <a:rPr lang="en-US" sz="1400" b="1" dirty="0">
+                <a:solidFill>
+                  <a:srgbClr val="000000"/>
                 </a:solidFill>
                 <a:latin typeface="Times New Roman" pitchFamily="18" charset="0"/>
                 <a:cs typeface="Times New Roman" pitchFamily="18" charset="0"/>
@@ -5975,9 +6050,9 @@
               <a:t>Fantasy life: </a:t>
             </a:r>
             <a:r>
-              <a:rPr lang="en-US" sz="1600" dirty="0">
-                <a:solidFill>
-                  <a:srgbClr val="222222"/>
+              <a:rPr lang="en-US" sz="1400" dirty="0">
+                <a:solidFill>
+                  <a:srgbClr val="000000"/>
                 </a:solidFill>
                 <a:latin typeface="Times New Roman" pitchFamily="18" charset="0"/>
                 <a:cs typeface="Times New Roman" pitchFamily="18" charset="0"/>
@@ -5994,9 +6069,9 @@
               <a:buChar char="•"/>
             </a:pPr>
             <a:r>
-              <a:rPr lang="en-US" sz="1600" b="1" dirty="0">
-                <a:solidFill>
-                  <a:srgbClr val="1F3B4D"/>
+              <a:rPr lang="en-US" sz="1400" b="1" dirty="0">
+                <a:solidFill>
+                  <a:srgbClr val="000000"/>
                 </a:solidFill>
                 <a:latin typeface="Times New Roman" pitchFamily="18" charset="0"/>
                 <a:cs typeface="Times New Roman" pitchFamily="18" charset="0"/>
@@ -6004,9 +6079,9 @@
               <a:t>Attitude to self: </a:t>
             </a:r>
             <a:r>
-              <a:rPr lang="en-US" sz="1600" dirty="0">
-                <a:solidFill>
-                  <a:srgbClr val="222222"/>
+              <a:rPr lang="en-US" sz="1400" dirty="0">
+                <a:solidFill>
+                  <a:srgbClr val="000000"/>
                 </a:solidFill>
                 <a:latin typeface="Times New Roman" pitchFamily="18" charset="0"/>
                 <a:cs typeface="Times New Roman" pitchFamily="18" charset="0"/>
@@ -6023,9 +6098,9 @@
               <a:buChar char="•"/>
             </a:pPr>
             <a:r>
-              <a:rPr lang="en-US" sz="1600" b="1" dirty="0">
-                <a:solidFill>
-                  <a:srgbClr val="1F3B4D"/>
+              <a:rPr lang="en-US" sz="1400" b="1" dirty="0">
+                <a:solidFill>
+                  <a:srgbClr val="000000"/>
                 </a:solidFill>
                 <a:latin typeface="Times New Roman" pitchFamily="18" charset="0"/>
                 <a:cs typeface="Times New Roman" pitchFamily="18" charset="0"/>
@@ -6033,9 +6108,9 @@
               <a:t>Religiosity: </a:t>
             </a:r>
             <a:r>
-              <a:rPr lang="en-US" sz="1600" dirty="0">
-                <a:solidFill>
-                  <a:srgbClr val="222222"/>
+              <a:rPr lang="en-US" sz="1400" dirty="0">
+                <a:solidFill>
+                  <a:srgbClr val="000000"/>
                 </a:solidFill>
                 <a:latin typeface="Times New Roman" pitchFamily="18" charset="0"/>
                 <a:cs typeface="Times New Roman" pitchFamily="18" charset="0"/>
@@ -6072,7 +6147,7 @@
       </p:grpSpPr>
       <p:sp>
         <p:nvSpPr>
-          <p:cNvPr id="10" name="TitleBar"/>
+          <p:cNvPr id="9" name="WhiteBG"/>
           <p:cNvSpPr>
             <a:spLocks noGrp="1"/>
           </p:cNvSpPr>
@@ -6081,43 +6156,25 @@
         <p:spPr>
           <a:xfrm>
             <a:off x="0" y="0"/>
-            <a:ext cx="12192000" cy="900000"/>
+            <a:ext cx="12192000" cy="6858000"/>
           </a:xfrm>
           <a:prstGeom prst="rect">
             <a:avLst/>
           </a:prstGeom>
           <a:solidFill>
-            <a:srgbClr val="3494BA"/>
+            <a:srgbClr val="FFFFFF"/>
           </a:solidFill>
         </p:spPr>
         <p:txBody>
-          <a:bodyPr wrap="square" anchor="ctr">
+          <a:bodyPr wrap="square" anchor="t">
             <a:normAutofit/>
           </a:bodyPr>
           <a:lstStyle/>
-          <a:p>
-            <a:pPr lvl="0" algn="l">
-              <a:spcAft>
-                <a:spcPts val="0"/>
-              </a:spcAft>
-              <a:buNone/>
-            </a:pPr>
-            <a:r>
-              <a:rPr lang="en-US" sz="2600" b="1" dirty="0">
-                <a:solidFill>
-                  <a:srgbClr val="FFFFFF"/>
-                </a:solidFill>
-                <a:latin typeface="Times New Roman" pitchFamily="18" charset="0"/>
-                <a:cs typeface="Times New Roman" pitchFamily="18" charset="0"/>
-              </a:rPr>
-              <a:t>  Behavioural Observations</a:t>
-            </a:r>
-          </a:p>
-        </p:txBody>
-      </p:sp>
-      <p:sp>
-        <p:nvSpPr>
-          <p:cNvPr id="11" name="Body"/>
+        </p:txBody>
+      </p:sp>
+      <p:sp>
+        <p:nvSpPr>
+          <p:cNvPr id="10" name="Heading"/>
           <p:cNvSpPr>
             <a:spLocks noGrp="1"/>
           </p:cNvSpPr>
@@ -6125,8 +6182,8 @@
         </p:nvSpPr>
         <p:spPr>
           <a:xfrm>
-            <a:off x="610000" y="1050000"/>
-            <a:ext cx="10972000" cy="5558000"/>
+            <a:off x="610000" y="300000"/>
+            <a:ext cx="10972000" cy="900000"/>
           </a:xfrm>
           <a:prstGeom prst="rect">
             <a:avLst/>
@@ -6139,6 +6196,49 @@
           </a:bodyPr>
           <a:lstStyle/>
           <a:p>
+            <a:pPr lvl="0" algn="l">
+              <a:spcAft>
+                <a:spcPts val="0"/>
+              </a:spcAft>
+              <a:buNone/>
+            </a:pPr>
+            <a:r>
+              <a:rPr lang="en-US" sz="2800" b="1" u="sng" dirty="0">
+                <a:solidFill>
+                  <a:srgbClr val="000000"/>
+                </a:solidFill>
+                <a:latin typeface="Times New Roman" pitchFamily="18" charset="0"/>
+                <a:cs typeface="Times New Roman" pitchFamily="18" charset="0"/>
+              </a:rPr>
+              <a:t>Behavioural Observations</a:t>
+            </a:r>
+          </a:p>
+        </p:txBody>
+      </p:sp>
+      <p:sp>
+        <p:nvSpPr>
+          <p:cNvPr id="11" name="Body"/>
+          <p:cNvSpPr>
+            <a:spLocks noGrp="1"/>
+          </p:cNvSpPr>
+          <p:nvPr/>
+        </p:nvSpPr>
+        <p:spPr>
+          <a:xfrm>
+            <a:off x="610000" y="1250000"/>
+            <a:ext cx="10972000" cy="5358000"/>
+          </a:xfrm>
+          <a:prstGeom prst="rect">
+            <a:avLst/>
+          </a:prstGeom>
+          <a:noFill/>
+        </p:spPr>
+        <p:txBody>
+          <a:bodyPr wrap="square" anchor="t">
+            <a:normAutofit/>
+          </a:bodyPr>
+          <a:lstStyle/>
+          <a:p>
             <a:pPr lvl="0">
               <a:spcAft>
                 <a:spcPts val="600"/>
@@ -6148,7 +6248,7 @@
             <a:r>
               <a:rPr lang="en-US" sz="1400" dirty="0">
                 <a:solidFill>
-                  <a:srgbClr val="222222"/>
+                  <a:srgbClr val="000000"/>
                 </a:solidFill>
                 <a:latin typeface="Times New Roman" pitchFamily="18" charset="0"/>
                 <a:cs typeface="Times New Roman" pitchFamily="18" charset="0"/>
@@ -6185,7 +6285,7 @@
       </p:grpSpPr>
       <p:sp>
         <p:nvSpPr>
-          <p:cNvPr id="10" name="TitleBar"/>
+          <p:cNvPr id="9" name="WhiteBG"/>
           <p:cNvSpPr>
             <a:spLocks noGrp="1"/>
           </p:cNvSpPr>
@@ -6194,43 +6294,25 @@
         <p:spPr>
           <a:xfrm>
             <a:off x="0" y="0"/>
-            <a:ext cx="12192000" cy="900000"/>
+            <a:ext cx="12192000" cy="6858000"/>
           </a:xfrm>
           <a:prstGeom prst="rect">
             <a:avLst/>
           </a:prstGeom>
           <a:solidFill>
-            <a:srgbClr val="3494BA"/>
+            <a:srgbClr val="FFFFFF"/>
           </a:solidFill>
         </p:spPr>
         <p:txBody>
-          <a:bodyPr wrap="square" anchor="ctr">
+          <a:bodyPr wrap="square" anchor="t">
             <a:normAutofit/>
           </a:bodyPr>
           <a:lstStyle/>
-          <a:p>
-            <a:pPr lvl="0" algn="l">
-              <a:spcAft>
-                <a:spcPts val="0"/>
-              </a:spcAft>
-              <a:buNone/>
-            </a:pPr>
-            <a:r>
-              <a:rPr lang="en-US" sz="2600" b="1" dirty="0">
-                <a:solidFill>
-                  <a:srgbClr val="FFFFFF"/>
-                </a:solidFill>
-                <a:latin typeface="Times New Roman" pitchFamily="18" charset="0"/>
-                <a:cs typeface="Times New Roman" pitchFamily="18" charset="0"/>
-              </a:rPr>
-              <a:t>  Mental Status Examination (MSE)</a:t>
-            </a:r>
-          </a:p>
-        </p:txBody>
-      </p:sp>
-      <p:sp>
-        <p:nvSpPr>
-          <p:cNvPr id="11" name="Body"/>
+        </p:txBody>
+      </p:sp>
+      <p:sp>
+        <p:nvSpPr>
+          <p:cNvPr id="10" name="Heading"/>
           <p:cNvSpPr>
             <a:spLocks noGrp="1"/>
           </p:cNvSpPr>
@@ -6238,8 +6320,8 @@
         </p:nvSpPr>
         <p:spPr>
           <a:xfrm>
-            <a:off x="610000" y="1050000"/>
-            <a:ext cx="10972000" cy="5558000"/>
+            <a:off x="610000" y="300000"/>
+            <a:ext cx="10972000" cy="900000"/>
           </a:xfrm>
           <a:prstGeom prst="rect">
             <a:avLst/>
@@ -6252,6 +6334,49 @@
           </a:bodyPr>
           <a:lstStyle/>
           <a:p>
+            <a:pPr lvl="0" algn="l">
+              <a:spcAft>
+                <a:spcPts val="0"/>
+              </a:spcAft>
+              <a:buNone/>
+            </a:pPr>
+            <a:r>
+              <a:rPr lang="en-US" sz="2800" b="1" u="sng" dirty="0">
+                <a:solidFill>
+                  <a:srgbClr val="000000"/>
+                </a:solidFill>
+                <a:latin typeface="Times New Roman" pitchFamily="18" charset="0"/>
+                <a:cs typeface="Times New Roman" pitchFamily="18" charset="0"/>
+              </a:rPr>
+              <a:t>Mental Status Examination (MSE)</a:t>
+            </a:r>
+          </a:p>
+        </p:txBody>
+      </p:sp>
+      <p:sp>
+        <p:nvSpPr>
+          <p:cNvPr id="11" name="Body"/>
+          <p:cNvSpPr>
+            <a:spLocks noGrp="1"/>
+          </p:cNvSpPr>
+          <p:nvPr/>
+        </p:nvSpPr>
+        <p:spPr>
+          <a:xfrm>
+            <a:off x="610000" y="1250000"/>
+            <a:ext cx="10972000" cy="5358000"/>
+          </a:xfrm>
+          <a:prstGeom prst="rect">
+            <a:avLst/>
+          </a:prstGeom>
+          <a:noFill/>
+        </p:spPr>
+        <p:txBody>
+          <a:bodyPr wrap="square" anchor="t">
+            <a:normAutofit/>
+          </a:bodyPr>
+          <a:lstStyle/>
+          <a:p>
             <a:pPr marL="285750" indent="-285750" lvl="0">
               <a:spcAft>
                 <a:spcPts val="600"/>
@@ -6260,9 +6385,9 @@
               <a:buChar char="•"/>
             </a:pPr>
             <a:r>
-              <a:rPr lang="en-US" sz="1600" b="1" dirty="0">
-                <a:solidFill>
-                  <a:srgbClr val="1F3B4D"/>
+              <a:rPr lang="en-US" sz="1400" b="1" dirty="0">
+                <a:solidFill>
+                  <a:srgbClr val="000000"/>
                 </a:solidFill>
                 <a:latin typeface="Times New Roman" pitchFamily="18" charset="0"/>
                 <a:cs typeface="Times New Roman" pitchFamily="18" charset="0"/>
@@ -6270,9 +6395,9 @@
               <a:t>Appearance &amp; behaviour: </a:t>
             </a:r>
             <a:r>
-              <a:rPr lang="en-US" sz="1600" dirty="0">
-                <a:solidFill>
-                  <a:srgbClr val="222222"/>
+              <a:rPr lang="en-US" sz="1400" dirty="0">
+                <a:solidFill>
+                  <a:srgbClr val="000000"/>
                 </a:solidFill>
                 <a:latin typeface="Times New Roman" pitchFamily="18" charset="0"/>
                 <a:cs typeface="Times New Roman" pitchFamily="18" charset="0"/>
@@ -6289,9 +6414,9 @@
               <a:buChar char="•"/>
             </a:pPr>
             <a:r>
-              <a:rPr lang="en-US" sz="1600" b="1" dirty="0">
-                <a:solidFill>
-                  <a:srgbClr val="1F3B4D"/>
+              <a:rPr lang="en-US" sz="1400" b="1" dirty="0">
+                <a:solidFill>
+                  <a:srgbClr val="000000"/>
                 </a:solidFill>
                 <a:latin typeface="Times New Roman" pitchFamily="18" charset="0"/>
                 <a:cs typeface="Times New Roman" pitchFamily="18" charset="0"/>
@@ -6299,9 +6424,9 @@
               <a:t>Psychomotor activity: </a:t>
             </a:r>
             <a:r>
-              <a:rPr lang="en-US" sz="1600" dirty="0">
-                <a:solidFill>
-                  <a:srgbClr val="222222"/>
+              <a:rPr lang="en-US" sz="1400" dirty="0">
+                <a:solidFill>
+                  <a:srgbClr val="000000"/>
                 </a:solidFill>
                 <a:latin typeface="Times New Roman" pitchFamily="18" charset="0"/>
                 <a:cs typeface="Times New Roman" pitchFamily="18" charset="0"/>
@@ -6318,9 +6443,9 @@
               <a:buChar char="•"/>
             </a:pPr>
             <a:r>
-              <a:rPr lang="en-US" sz="1600" b="1" dirty="0">
-                <a:solidFill>
-                  <a:srgbClr val="1F3B4D"/>
+              <a:rPr lang="en-US" sz="1400" b="1" dirty="0">
+                <a:solidFill>
+                  <a:srgbClr val="000000"/>
                 </a:solidFill>
                 <a:latin typeface="Times New Roman" pitchFamily="18" charset="0"/>
                 <a:cs typeface="Times New Roman" pitchFamily="18" charset="0"/>
@@ -6328,9 +6453,9 @@
               <a:t>Speech: </a:t>
             </a:r>
             <a:r>
-              <a:rPr lang="en-US" sz="1600" dirty="0">
-                <a:solidFill>
-                  <a:srgbClr val="222222"/>
+              <a:rPr lang="en-US" sz="1400" dirty="0">
+                <a:solidFill>
+                  <a:srgbClr val="000000"/>
                 </a:solidFill>
                 <a:latin typeface="Times New Roman" pitchFamily="18" charset="0"/>
                 <a:cs typeface="Times New Roman" pitchFamily="18" charset="0"/>
@@ -6347,9 +6472,9 @@
               <a:buChar char="•"/>
             </a:pPr>
             <a:r>
-              <a:rPr lang="en-US" sz="1600" b="1" dirty="0">
-                <a:solidFill>
-                  <a:srgbClr val="1F3B4D"/>
+              <a:rPr lang="en-US" sz="1400" b="1" dirty="0">
+                <a:solidFill>
+                  <a:srgbClr val="000000"/>
                 </a:solidFill>
                 <a:latin typeface="Times New Roman" pitchFamily="18" charset="0"/>
                 <a:cs typeface="Times New Roman" pitchFamily="18" charset="0"/>
@@ -6357,9 +6482,9 @@
               <a:t>Thought — form: </a:t>
             </a:r>
             <a:r>
-              <a:rPr lang="en-US" sz="1600" dirty="0">
-                <a:solidFill>
-                  <a:srgbClr val="222222"/>
+              <a:rPr lang="en-US" sz="1400" dirty="0">
+                <a:solidFill>
+                  <a:srgbClr val="000000"/>
                 </a:solidFill>
                 <a:latin typeface="Times New Roman" pitchFamily="18" charset="0"/>
                 <a:cs typeface="Times New Roman" pitchFamily="18" charset="0"/>
@@ -6376,9 +6501,9 @@
               <a:buChar char="•"/>
             </a:pPr>
             <a:r>
-              <a:rPr lang="en-US" sz="1600" b="1" dirty="0">
-                <a:solidFill>
-                  <a:srgbClr val="1F3B4D"/>
+              <a:rPr lang="en-US" sz="1400" b="1" dirty="0">
+                <a:solidFill>
+                  <a:srgbClr val="000000"/>
                 </a:solidFill>
                 <a:latin typeface="Times New Roman" pitchFamily="18" charset="0"/>
                 <a:cs typeface="Times New Roman" pitchFamily="18" charset="0"/>
@@ -6386,9 +6511,9 @@
               <a:t>Thought — stream: </a:t>
             </a:r>
             <a:r>
-              <a:rPr lang="en-US" sz="1600" dirty="0">
-                <a:solidFill>
-                  <a:srgbClr val="222222"/>
+              <a:rPr lang="en-US" sz="1400" dirty="0">
+                <a:solidFill>
+                  <a:srgbClr val="000000"/>
                 </a:solidFill>
                 <a:latin typeface="Times New Roman" pitchFamily="18" charset="0"/>
                 <a:cs typeface="Times New Roman" pitchFamily="18" charset="0"/>
@@ -6405,9 +6530,9 @@
               <a:buChar char="•"/>
             </a:pPr>
             <a:r>
-              <a:rPr lang="en-US" sz="1600" b="1" dirty="0">
-                <a:solidFill>
-                  <a:srgbClr val="1F3B4D"/>
+              <a:rPr lang="en-US" sz="1400" b="1" dirty="0">
+                <a:solidFill>
+                  <a:srgbClr val="000000"/>
                 </a:solidFill>
                 <a:latin typeface="Times New Roman" pitchFamily="18" charset="0"/>
                 <a:cs typeface="Times New Roman" pitchFamily="18" charset="0"/>
@@ -6415,9 +6540,9 @@
               <a:t>Thought — content: </a:t>
             </a:r>
             <a:r>
-              <a:rPr lang="en-US" sz="1600" dirty="0">
-                <a:solidFill>
-                  <a:srgbClr val="222222"/>
+              <a:rPr lang="en-US" sz="1400" dirty="0">
+                <a:solidFill>
+                  <a:srgbClr val="000000"/>
                 </a:solidFill>
                 <a:latin typeface="Times New Roman" pitchFamily="18" charset="0"/>
                 <a:cs typeface="Times New Roman" pitchFamily="18" charset="0"/>
@@ -6434,9 +6559,9 @@
               <a:buChar char="•"/>
             </a:pPr>
             <a:r>
-              <a:rPr lang="en-US" sz="1600" b="1" dirty="0">
-                <a:solidFill>
-                  <a:srgbClr val="1F3B4D"/>
+              <a:rPr lang="en-US" sz="1400" b="1" dirty="0">
+                <a:solidFill>
+                  <a:srgbClr val="000000"/>
                 </a:solidFill>
                 <a:latin typeface="Times New Roman" pitchFamily="18" charset="0"/>
                 <a:cs typeface="Times New Roman" pitchFamily="18" charset="0"/>
@@ -6444,9 +6569,9 @@
               <a:t>Mood &amp; affect: </a:t>
             </a:r>
             <a:r>
-              <a:rPr lang="en-US" sz="1600" dirty="0">
-                <a:solidFill>
-                  <a:srgbClr val="222222"/>
+              <a:rPr lang="en-US" sz="1400" dirty="0">
+                <a:solidFill>
+                  <a:srgbClr val="000000"/>
                 </a:solidFill>
                 <a:latin typeface="Times New Roman" pitchFamily="18" charset="0"/>
                 <a:cs typeface="Times New Roman" pitchFamily="18" charset="0"/>
@@ -6463,9 +6588,9 @@
               <a:buChar char="•"/>
             </a:pPr>
             <a:r>
-              <a:rPr lang="en-US" sz="1600" b="1" dirty="0">
-                <a:solidFill>
-                  <a:srgbClr val="1F3B4D"/>
+              <a:rPr lang="en-US" sz="1400" b="1" dirty="0">
+                <a:solidFill>
+                  <a:srgbClr val="000000"/>
                 </a:solidFill>
                 <a:latin typeface="Times New Roman" pitchFamily="18" charset="0"/>
                 <a:cs typeface="Times New Roman" pitchFamily="18" charset="0"/>
@@ -6473,9 +6598,9 @@
               <a:t>Higher cognitive functions: </a:t>
             </a:r>
             <a:r>
-              <a:rPr lang="en-US" sz="1600" dirty="0">
-                <a:solidFill>
-                  <a:srgbClr val="222222"/>
+              <a:rPr lang="en-US" sz="1400" dirty="0">
+                <a:solidFill>
+                  <a:srgbClr val="000000"/>
                 </a:solidFill>
                 <a:latin typeface="Times New Roman" pitchFamily="18" charset="0"/>
                 <a:cs typeface="Times New Roman" pitchFamily="18" charset="0"/>
@@ -6492,9 +6617,9 @@
               <a:buChar char="•"/>
             </a:pPr>
             <a:r>
-              <a:rPr lang="en-US" sz="1600" b="1" dirty="0">
-                <a:solidFill>
-                  <a:srgbClr val="1F3B4D"/>
+              <a:rPr lang="en-US" sz="1400" b="1" dirty="0">
+                <a:solidFill>
+                  <a:srgbClr val="000000"/>
                 </a:solidFill>
                 <a:latin typeface="Times New Roman" pitchFamily="18" charset="0"/>
                 <a:cs typeface="Times New Roman" pitchFamily="18" charset="0"/>
@@ -6502,9 +6627,9 @@
               <a:t>Insight: </a:t>
             </a:r>
             <a:r>
-              <a:rPr lang="en-US" sz="1600" dirty="0">
-                <a:solidFill>
-                  <a:srgbClr val="222222"/>
+              <a:rPr lang="en-US" sz="1400" dirty="0">
+                <a:solidFill>
+                  <a:srgbClr val="000000"/>
                 </a:solidFill>
                 <a:latin typeface="Times New Roman" pitchFamily="18" charset="0"/>
                 <a:cs typeface="Times New Roman" pitchFamily="18" charset="0"/>
@@ -6541,7 +6666,7 @@
       </p:grpSpPr>
       <p:sp>
         <p:nvSpPr>
-          <p:cNvPr id="10" name="TitleBar"/>
+          <p:cNvPr id="9" name="WhiteBG"/>
           <p:cNvSpPr>
             <a:spLocks noGrp="1"/>
           </p:cNvSpPr>
@@ -6550,43 +6675,25 @@
         <p:spPr>
           <a:xfrm>
             <a:off x="0" y="0"/>
-            <a:ext cx="12192000" cy="900000"/>
+            <a:ext cx="12192000" cy="6858000"/>
           </a:xfrm>
           <a:prstGeom prst="rect">
             <a:avLst/>
           </a:prstGeom>
           <a:solidFill>
-            <a:srgbClr val="3494BA"/>
+            <a:srgbClr val="FFFFFF"/>
           </a:solidFill>
         </p:spPr>
         <p:txBody>
-          <a:bodyPr wrap="square" anchor="ctr">
+          <a:bodyPr wrap="square" anchor="t">
             <a:normAutofit/>
           </a:bodyPr>
           <a:lstStyle/>
-          <a:p>
-            <a:pPr lvl="0" algn="l">
-              <a:spcAft>
-                <a:spcPts val="0"/>
-              </a:spcAft>
-              <a:buNone/>
-            </a:pPr>
-            <a:r>
-              <a:rPr lang="en-US" sz="2600" b="1" dirty="0">
-                <a:solidFill>
-                  <a:srgbClr val="FFFFFF"/>
-                </a:solidFill>
-                <a:latin typeface="Times New Roman" pitchFamily="18" charset="0"/>
-                <a:cs typeface="Times New Roman" pitchFamily="18" charset="0"/>
-              </a:rPr>
-              <a:t>  Tests Administered &amp; Rationale</a:t>
-            </a:r>
-          </a:p>
-        </p:txBody>
-      </p:sp>
-      <p:sp>
-        <p:nvSpPr>
-          <p:cNvPr id="11" name="Body"/>
+        </p:txBody>
+      </p:sp>
+      <p:sp>
+        <p:nvSpPr>
+          <p:cNvPr id="10" name="Heading"/>
           <p:cNvSpPr>
             <a:spLocks noGrp="1"/>
           </p:cNvSpPr>
@@ -6594,8 +6701,8 @@
         </p:nvSpPr>
         <p:spPr>
           <a:xfrm>
-            <a:off x="610000" y="1050000"/>
-            <a:ext cx="10972000" cy="5558000"/>
+            <a:off x="610000" y="300000"/>
+            <a:ext cx="10972000" cy="900000"/>
           </a:xfrm>
           <a:prstGeom prst="rect">
             <a:avLst/>
@@ -6608,6 +6715,49 @@
           </a:bodyPr>
           <a:lstStyle/>
           <a:p>
+            <a:pPr lvl="0" algn="l">
+              <a:spcAft>
+                <a:spcPts val="0"/>
+              </a:spcAft>
+              <a:buNone/>
+            </a:pPr>
+            <a:r>
+              <a:rPr lang="en-US" sz="2800" b="1" u="sng" dirty="0">
+                <a:solidFill>
+                  <a:srgbClr val="000000"/>
+                </a:solidFill>
+                <a:latin typeface="Times New Roman" pitchFamily="18" charset="0"/>
+                <a:cs typeface="Times New Roman" pitchFamily="18" charset="0"/>
+              </a:rPr>
+              <a:t>Tests Administered &amp; Rationale</a:t>
+            </a:r>
+          </a:p>
+        </p:txBody>
+      </p:sp>
+      <p:sp>
+        <p:nvSpPr>
+          <p:cNvPr id="11" name="Body"/>
+          <p:cNvSpPr>
+            <a:spLocks noGrp="1"/>
+          </p:cNvSpPr>
+          <p:nvPr/>
+        </p:nvSpPr>
+        <p:spPr>
+          <a:xfrm>
+            <a:off x="610000" y="1250000"/>
+            <a:ext cx="10972000" cy="5358000"/>
+          </a:xfrm>
+          <a:prstGeom prst="rect">
+            <a:avLst/>
+          </a:prstGeom>
+          <a:noFill/>
+        </p:spPr>
+        <p:txBody>
+          <a:bodyPr wrap="square" anchor="t">
+            <a:normAutofit/>
+          </a:bodyPr>
+          <a:lstStyle/>
+          <a:p>
             <a:pPr marL="285750" indent="-285750" lvl="0">
               <a:spcAft>
                 <a:spcPts val="600"/>
@@ -6616,9 +6766,9 @@
               <a:buChar char="•"/>
             </a:pPr>
             <a:r>
-              <a:rPr lang="en-US" sz="1600" b="1" dirty="0">
-                <a:solidFill>
-                  <a:srgbClr val="1F3B4D"/>
+              <a:rPr lang="en-US" sz="1400" b="1" dirty="0">
+                <a:solidFill>
+                  <a:srgbClr val="000000"/>
                 </a:solidFill>
                 <a:latin typeface="Times New Roman" pitchFamily="18" charset="0"/>
                 <a:cs typeface="Times New Roman" pitchFamily="18" charset="0"/>
@@ -6626,9 +6776,9 @@
               <a:t>DES (Dissociative Experiences Scale): </a:t>
             </a:r>
             <a:r>
-              <a:rPr lang="en-US" sz="1600" dirty="0">
-                <a:solidFill>
-                  <a:srgbClr val="222222"/>
+              <a:rPr lang="en-US" sz="1400" dirty="0">
+                <a:solidFill>
+                  <a:srgbClr val="000000"/>
                 </a:solidFill>
                 <a:latin typeface="Times New Roman" pitchFamily="18" charset="0"/>
                 <a:cs typeface="Times New Roman" pitchFamily="18" charset="0"/>
@@ -6645,9 +6795,9 @@
               <a:buChar char="•"/>
             </a:pPr>
             <a:r>
-              <a:rPr lang="en-US" sz="1600" b="1" dirty="0">
-                <a:solidFill>
-                  <a:srgbClr val="1F3B4D"/>
+              <a:rPr lang="en-US" sz="1400" b="1" dirty="0">
+                <a:solidFill>
+                  <a:srgbClr val="000000"/>
                 </a:solidFill>
                 <a:latin typeface="Times New Roman" pitchFamily="18" charset="0"/>
                 <a:cs typeface="Times New Roman" pitchFamily="18" charset="0"/>
@@ -6655,9 +6805,9 @@
               <a:t>BAI (Beck Anxiety Inventory): </a:t>
             </a:r>
             <a:r>
-              <a:rPr lang="en-US" sz="1600" dirty="0">
-                <a:solidFill>
-                  <a:srgbClr val="222222"/>
+              <a:rPr lang="en-US" sz="1400" dirty="0">
+                <a:solidFill>
+                  <a:srgbClr val="000000"/>
                 </a:solidFill>
                 <a:latin typeface="Times New Roman" pitchFamily="18" charset="0"/>
                 <a:cs typeface="Times New Roman" pitchFamily="18" charset="0"/>
@@ -6674,9 +6824,9 @@
               <a:buChar char="•"/>
             </a:pPr>
             <a:r>
-              <a:rPr lang="en-US" sz="1600" b="1" dirty="0">
-                <a:solidFill>
-                  <a:srgbClr val="1F3B4D"/>
+              <a:rPr lang="en-US" sz="1400" b="1" dirty="0">
+                <a:solidFill>
+                  <a:srgbClr val="000000"/>
                 </a:solidFill>
                 <a:latin typeface="Times New Roman" pitchFamily="18" charset="0"/>
                 <a:cs typeface="Times New Roman" pitchFamily="18" charset="0"/>
@@ -6684,9 +6834,9 @@
               <a:t>BDRS (depression rating): </a:t>
             </a:r>
             <a:r>
-              <a:rPr lang="en-US" sz="1600" dirty="0">
-                <a:solidFill>
-                  <a:srgbClr val="222222"/>
+              <a:rPr lang="en-US" sz="1400" dirty="0">
+                <a:solidFill>
+                  <a:srgbClr val="000000"/>
                 </a:solidFill>
                 <a:latin typeface="Times New Roman" pitchFamily="18" charset="0"/>
                 <a:cs typeface="Times New Roman" pitchFamily="18" charset="0"/>
@@ -6703,9 +6853,9 @@
               <a:buChar char="•"/>
             </a:pPr>
             <a:r>
-              <a:rPr lang="en-US" sz="1600" b="1" dirty="0">
-                <a:solidFill>
-                  <a:srgbClr val="1F3B4D"/>
+              <a:rPr lang="en-US" sz="1400" b="1" dirty="0">
+                <a:solidFill>
+                  <a:srgbClr val="000000"/>
                 </a:solidFill>
                 <a:latin typeface="Times New Roman" pitchFamily="18" charset="0"/>
                 <a:cs typeface="Times New Roman" pitchFamily="18" charset="0"/>
@@ -6713,9 +6863,9 @@
               <a:t>BPRS (Brief Psychiatric Rating Scale): </a:t>
             </a:r>
             <a:r>
-              <a:rPr lang="en-US" sz="1600" dirty="0">
-                <a:solidFill>
-                  <a:srgbClr val="222222"/>
+              <a:rPr lang="en-US" sz="1400" dirty="0">
+                <a:solidFill>
+                  <a:srgbClr val="000000"/>
                 </a:solidFill>
                 <a:latin typeface="Times New Roman" pitchFamily="18" charset="0"/>
                 <a:cs typeface="Times New Roman" pitchFamily="18" charset="0"/>
@@ -6732,9 +6882,9 @@
               <a:buChar char="•"/>
             </a:pPr>
             <a:r>
-              <a:rPr lang="en-US" sz="1600" b="1" dirty="0">
-                <a:solidFill>
-                  <a:srgbClr val="1F3B4D"/>
+              <a:rPr lang="en-US" sz="1400" b="1" dirty="0">
+                <a:solidFill>
+                  <a:srgbClr val="000000"/>
                 </a:solidFill>
                 <a:latin typeface="Times New Roman" pitchFamily="18" charset="0"/>
                 <a:cs typeface="Times New Roman" pitchFamily="18" charset="0"/>
@@ -6742,9 +6892,9 @@
               <a:t>TAT (Thematic Apperception Test): </a:t>
             </a:r>
             <a:r>
-              <a:rPr lang="en-US" sz="1600" dirty="0">
-                <a:solidFill>
-                  <a:srgbClr val="222222"/>
+              <a:rPr lang="en-US" sz="1400" dirty="0">
+                <a:solidFill>
+                  <a:srgbClr val="000000"/>
                 </a:solidFill>
                 <a:latin typeface="Times New Roman" pitchFamily="18" charset="0"/>
                 <a:cs typeface="Times New Roman" pitchFamily="18" charset="0"/>
@@ -6781,7 +6931,7 @@
       </p:grpSpPr>
       <p:sp>
         <p:nvSpPr>
-          <p:cNvPr id="10" name="TitleBar"/>
+          <p:cNvPr id="9" name="WhiteBG"/>
           <p:cNvSpPr>
             <a:spLocks noGrp="1"/>
           </p:cNvSpPr>
@@ -6790,43 +6940,25 @@
         <p:spPr>
           <a:xfrm>
             <a:off x="0" y="0"/>
-            <a:ext cx="12192000" cy="900000"/>
+            <a:ext cx="12192000" cy="6858000"/>
           </a:xfrm>
           <a:prstGeom prst="rect">
             <a:avLst/>
           </a:prstGeom>
           <a:solidFill>
-            <a:srgbClr val="3494BA"/>
+            <a:srgbClr val="FFFFFF"/>
           </a:solidFill>
         </p:spPr>
         <p:txBody>
-          <a:bodyPr wrap="square" anchor="ctr">
+          <a:bodyPr wrap="square" anchor="t">
             <a:normAutofit/>
           </a:bodyPr>
           <a:lstStyle/>
-          <a:p>
-            <a:pPr lvl="0" algn="l">
-              <a:spcAft>
-                <a:spcPts val="0"/>
-              </a:spcAft>
-              <a:buNone/>
-            </a:pPr>
-            <a:r>
-              <a:rPr lang="en-US" sz="2600" b="1" dirty="0">
-                <a:solidFill>
-                  <a:srgbClr val="FFFFFF"/>
-                </a:solidFill>
-                <a:latin typeface="Times New Roman" pitchFamily="18" charset="0"/>
-                <a:cs typeface="Times New Roman" pitchFamily="18" charset="0"/>
-              </a:rPr>
-              <a:t>  Test Findings &amp; Interpretation</a:t>
-            </a:r>
-          </a:p>
-        </p:txBody>
-      </p:sp>
-      <p:sp>
-        <p:nvSpPr>
-          <p:cNvPr id="11" name="Body"/>
+        </p:txBody>
+      </p:sp>
+      <p:sp>
+        <p:nvSpPr>
+          <p:cNvPr id="10" name="Heading"/>
           <p:cNvSpPr>
             <a:spLocks noGrp="1"/>
           </p:cNvSpPr>
@@ -6834,8 +6966,8 @@
         </p:nvSpPr>
         <p:spPr>
           <a:xfrm>
-            <a:off x="610000" y="1050000"/>
-            <a:ext cx="10972000" cy="5558000"/>
+            <a:off x="610000" y="300000"/>
+            <a:ext cx="10972000" cy="900000"/>
           </a:xfrm>
           <a:prstGeom prst="rect">
             <a:avLst/>
@@ -6848,6 +6980,49 @@
           </a:bodyPr>
           <a:lstStyle/>
           <a:p>
+            <a:pPr lvl="0" algn="l">
+              <a:spcAft>
+                <a:spcPts val="0"/>
+              </a:spcAft>
+              <a:buNone/>
+            </a:pPr>
+            <a:r>
+              <a:rPr lang="en-US" sz="2800" b="1" u="sng" dirty="0">
+                <a:solidFill>
+                  <a:srgbClr val="000000"/>
+                </a:solidFill>
+                <a:latin typeface="Times New Roman" pitchFamily="18" charset="0"/>
+                <a:cs typeface="Times New Roman" pitchFamily="18" charset="0"/>
+              </a:rPr>
+              <a:t>Test Findings &amp; Interpretation</a:t>
+            </a:r>
+          </a:p>
+        </p:txBody>
+      </p:sp>
+      <p:sp>
+        <p:nvSpPr>
+          <p:cNvPr id="11" name="Body"/>
+          <p:cNvSpPr>
+            <a:spLocks noGrp="1"/>
+          </p:cNvSpPr>
+          <p:nvPr/>
+        </p:nvSpPr>
+        <p:spPr>
+          <a:xfrm>
+            <a:off x="610000" y="1250000"/>
+            <a:ext cx="10972000" cy="5358000"/>
+          </a:xfrm>
+          <a:prstGeom prst="rect">
+            <a:avLst/>
+          </a:prstGeom>
+          <a:noFill/>
+        </p:spPr>
+        <p:txBody>
+          <a:bodyPr wrap="square" anchor="t">
+            <a:normAutofit/>
+          </a:bodyPr>
+          <a:lstStyle/>
+          <a:p>
             <a:pPr lvl="0">
               <a:spcAft>
                 <a:spcPts val="600"/>
@@ -6855,9 +7030,9 @@
               <a:buNone/>
             </a:pPr>
             <a:r>
-              <a:rPr lang="en-US" sz="1500" b="1" dirty="0">
-                <a:solidFill>
-                  <a:srgbClr val="1F3B4D"/>
+              <a:rPr lang="en-US" sz="1400" b="1" dirty="0">
+                <a:solidFill>
+                  <a:srgbClr val="000000"/>
                 </a:solidFill>
                 <a:latin typeface="Times New Roman" pitchFamily="18" charset="0"/>
                 <a:cs typeface="Times New Roman" pitchFamily="18" charset="0"/>
@@ -6865,9 +7040,9 @@
               <a:t>BAI = 36: </a:t>
             </a:r>
             <a:r>
-              <a:rPr lang="en-US" sz="1500" dirty="0">
-                <a:solidFill>
-                  <a:srgbClr val="222222"/>
+              <a:rPr lang="en-US" sz="1400" dirty="0">
+                <a:solidFill>
+                  <a:srgbClr val="000000"/>
                 </a:solidFill>
                 <a:latin typeface="Times New Roman" pitchFamily="18" charset="0"/>
                 <a:cs typeface="Times New Roman" pitchFamily="18" charset="0"/>
@@ -6883,9 +7058,9 @@
               <a:buNone/>
             </a:pPr>
             <a:r>
-              <a:rPr lang="en-US" sz="1500" b="1" dirty="0">
-                <a:solidFill>
-                  <a:srgbClr val="1F3B4D"/>
+              <a:rPr lang="en-US" sz="1400" b="1" dirty="0">
+                <a:solidFill>
+                  <a:srgbClr val="000000"/>
                 </a:solidFill>
                 <a:latin typeface="Times New Roman" pitchFamily="18" charset="0"/>
                 <a:cs typeface="Times New Roman" pitchFamily="18" charset="0"/>
@@ -6893,9 +7068,9 @@
               <a:t>BDRS = 20: </a:t>
             </a:r>
             <a:r>
-              <a:rPr lang="en-US" sz="1500" dirty="0">
-                <a:solidFill>
-                  <a:srgbClr val="222222"/>
+              <a:rPr lang="en-US" sz="1400" dirty="0">
+                <a:solidFill>
+                  <a:srgbClr val="000000"/>
                 </a:solidFill>
                 <a:latin typeface="Times New Roman" pitchFamily="18" charset="0"/>
                 <a:cs typeface="Times New Roman" pitchFamily="18" charset="0"/>
@@ -6911,9 +7086,9 @@
               <a:buNone/>
             </a:pPr>
             <a:r>
-              <a:rPr lang="en-US" sz="1500" b="1" dirty="0">
-                <a:solidFill>
-                  <a:srgbClr val="1F3B4D"/>
+              <a:rPr lang="en-US" sz="1400" b="1" dirty="0">
+                <a:solidFill>
+                  <a:srgbClr val="000000"/>
                 </a:solidFill>
                 <a:latin typeface="Times New Roman" pitchFamily="18" charset="0"/>
                 <a:cs typeface="Times New Roman" pitchFamily="18" charset="0"/>
@@ -6921,9 +7096,9 @@
               <a:t>BPRS = 22: </a:t>
             </a:r>
             <a:r>
-              <a:rPr lang="en-US" sz="1500" dirty="0">
-                <a:solidFill>
-                  <a:srgbClr val="222222"/>
+              <a:rPr lang="en-US" sz="1400" dirty="0">
+                <a:solidFill>
+                  <a:srgbClr val="000000"/>
                 </a:solidFill>
                 <a:latin typeface="Times New Roman" pitchFamily="18" charset="0"/>
                 <a:cs typeface="Times New Roman" pitchFamily="18" charset="0"/>
@@ -6939,9 +7114,9 @@
               <a:buNone/>
             </a:pPr>
             <a:r>
-              <a:rPr lang="en-US" sz="1500" b="1" dirty="0">
-                <a:solidFill>
-                  <a:srgbClr val="1F3B4D"/>
+              <a:rPr lang="en-US" sz="1400" b="1" dirty="0">
+                <a:solidFill>
+                  <a:srgbClr val="000000"/>
                 </a:solidFill>
                 <a:latin typeface="Times New Roman" pitchFamily="18" charset="0"/>
                 <a:cs typeface="Times New Roman" pitchFamily="18" charset="0"/>
@@ -6949,9 +7124,9 @@
               <a:t>DES = 125: </a:t>
             </a:r>
             <a:r>
-              <a:rPr lang="en-US" sz="1500" dirty="0">
-                <a:solidFill>
-                  <a:srgbClr val="222222"/>
+              <a:rPr lang="en-US" sz="1400" dirty="0">
+                <a:solidFill>
+                  <a:srgbClr val="000000"/>
                 </a:solidFill>
                 <a:latin typeface="Times New Roman" pitchFamily="18" charset="0"/>
                 <a:cs typeface="Times New Roman" pitchFamily="18" charset="0"/>
@@ -6967,9 +7142,9 @@
               <a:buNone/>
             </a:pPr>
             <a:r>
-              <a:rPr lang="en-US" sz="1300" dirty="0">
-                <a:solidFill>
-                  <a:srgbClr val="222222"/>
+              <a:rPr lang="en-US" sz="1400" dirty="0">
+                <a:solidFill>
+                  <a:srgbClr val="000000"/>
                 </a:solidFill>
                 <a:latin typeface="Times New Roman" pitchFamily="18" charset="0"/>
                 <a:cs typeface="Times New Roman" pitchFamily="18" charset="0"/>
@@ -7006,7 +7181,7 @@
       </p:grpSpPr>
       <p:sp>
         <p:nvSpPr>
-          <p:cNvPr id="10" name="TitleBar"/>
+          <p:cNvPr id="9" name="WhiteBG"/>
           <p:cNvSpPr>
             <a:spLocks noGrp="1"/>
           </p:cNvSpPr>
@@ -7015,43 +7190,25 @@
         <p:spPr>
           <a:xfrm>
             <a:off x="0" y="0"/>
-            <a:ext cx="12192000" cy="900000"/>
+            <a:ext cx="12192000" cy="6858000"/>
           </a:xfrm>
           <a:prstGeom prst="rect">
             <a:avLst/>
           </a:prstGeom>
           <a:solidFill>
-            <a:srgbClr val="3494BA"/>
+            <a:srgbClr val="FFFFFF"/>
           </a:solidFill>
         </p:spPr>
         <p:txBody>
-          <a:bodyPr wrap="square" anchor="ctr">
+          <a:bodyPr wrap="square" anchor="t">
             <a:normAutofit/>
           </a:bodyPr>
           <a:lstStyle/>
-          <a:p>
-            <a:pPr lvl="0" algn="l">
-              <a:spcAft>
-                <a:spcPts val="0"/>
-              </a:spcAft>
-              <a:buNone/>
-            </a:pPr>
-            <a:r>
-              <a:rPr lang="en-US" sz="2600" b="1" dirty="0">
-                <a:solidFill>
-                  <a:srgbClr val="FFFFFF"/>
-                </a:solidFill>
-                <a:latin typeface="Times New Roman" pitchFamily="18" charset="0"/>
-                <a:cs typeface="Times New Roman" pitchFamily="18" charset="0"/>
-              </a:rPr>
-              <a:t>  TAT — Overall Impression</a:t>
-            </a:r>
-          </a:p>
-        </p:txBody>
-      </p:sp>
-      <p:sp>
-        <p:nvSpPr>
-          <p:cNvPr id="11" name="Body"/>
+        </p:txBody>
+      </p:sp>
+      <p:sp>
+        <p:nvSpPr>
+          <p:cNvPr id="10" name="Heading"/>
           <p:cNvSpPr>
             <a:spLocks noGrp="1"/>
           </p:cNvSpPr>
@@ -7059,8 +7216,8 @@
         </p:nvSpPr>
         <p:spPr>
           <a:xfrm>
-            <a:off x="610000" y="1050000"/>
-            <a:ext cx="10972000" cy="5558000"/>
+            <a:off x="610000" y="300000"/>
+            <a:ext cx="10972000" cy="900000"/>
           </a:xfrm>
           <a:prstGeom prst="rect">
             <a:avLst/>
@@ -7073,6 +7230,49 @@
           </a:bodyPr>
           <a:lstStyle/>
           <a:p>
+            <a:pPr lvl="0" algn="l">
+              <a:spcAft>
+                <a:spcPts val="0"/>
+              </a:spcAft>
+              <a:buNone/>
+            </a:pPr>
+            <a:r>
+              <a:rPr lang="en-US" sz="2800" b="1" u="sng" dirty="0">
+                <a:solidFill>
+                  <a:srgbClr val="000000"/>
+                </a:solidFill>
+                <a:latin typeface="Times New Roman" pitchFamily="18" charset="0"/>
+                <a:cs typeface="Times New Roman" pitchFamily="18" charset="0"/>
+              </a:rPr>
+              <a:t>TAT — Overall Impression</a:t>
+            </a:r>
+          </a:p>
+        </p:txBody>
+      </p:sp>
+      <p:sp>
+        <p:nvSpPr>
+          <p:cNvPr id="11" name="Body"/>
+          <p:cNvSpPr>
+            <a:spLocks noGrp="1"/>
+          </p:cNvSpPr>
+          <p:nvPr/>
+        </p:nvSpPr>
+        <p:spPr>
+          <a:xfrm>
+            <a:off x="610000" y="1250000"/>
+            <a:ext cx="10972000" cy="5358000"/>
+          </a:xfrm>
+          <a:prstGeom prst="rect">
+            <a:avLst/>
+          </a:prstGeom>
+          <a:noFill/>
+        </p:spPr>
+        <p:txBody>
+          <a:bodyPr wrap="square" anchor="t">
+            <a:normAutofit/>
+          </a:bodyPr>
+          <a:lstStyle/>
+          <a:p>
             <a:pPr lvl="0">
               <a:spcAft>
                 <a:spcPts val="600"/>
@@ -7082,7 +7282,7 @@
             <a:r>
               <a:rPr lang="en-US" sz="1400" dirty="0">
                 <a:solidFill>
-                  <a:srgbClr val="222222"/>
+                  <a:srgbClr val="000000"/>
                 </a:solidFill>
                 <a:latin typeface="Times New Roman" pitchFamily="18" charset="0"/>
                 <a:cs typeface="Times New Roman" pitchFamily="18" charset="0"/>
@@ -7100,7 +7300,7 @@
             <a:r>
               <a:rPr lang="en-US" sz="1400" dirty="0">
                 <a:solidFill>
-                  <a:srgbClr val="222222"/>
+                  <a:srgbClr val="000000"/>
                 </a:solidFill>
                 <a:latin typeface="Times New Roman" pitchFamily="18" charset="0"/>
                 <a:cs typeface="Times New Roman" pitchFamily="18" charset="0"/>
@@ -7137,7 +7337,7 @@
       </p:grpSpPr>
       <p:sp>
         <p:nvSpPr>
-          <p:cNvPr id="10" name="TitleBar"/>
+          <p:cNvPr id="9" name="WhiteBG"/>
           <p:cNvSpPr>
             <a:spLocks noGrp="1"/>
           </p:cNvSpPr>
@@ -7146,43 +7346,25 @@
         <p:spPr>
           <a:xfrm>
             <a:off x="0" y="0"/>
-            <a:ext cx="12192000" cy="900000"/>
+            <a:ext cx="12192000" cy="6858000"/>
           </a:xfrm>
           <a:prstGeom prst="rect">
             <a:avLst/>
           </a:prstGeom>
           <a:solidFill>
-            <a:srgbClr val="3494BA"/>
+            <a:srgbClr val="FFFFFF"/>
           </a:solidFill>
         </p:spPr>
         <p:txBody>
-          <a:bodyPr wrap="square" anchor="ctr">
+          <a:bodyPr wrap="square" anchor="t">
             <a:normAutofit/>
           </a:bodyPr>
           <a:lstStyle/>
-          <a:p>
-            <a:pPr lvl="0" algn="l">
-              <a:spcAft>
-                <a:spcPts val="0"/>
-              </a:spcAft>
-              <a:buNone/>
-            </a:pPr>
-            <a:r>
-              <a:rPr lang="en-US" sz="2600" b="1" dirty="0">
-                <a:solidFill>
-                  <a:srgbClr val="FFFFFF"/>
-                </a:solidFill>
-                <a:latin typeface="Times New Roman" pitchFamily="18" charset="0"/>
-                <a:cs typeface="Times New Roman" pitchFamily="18" charset="0"/>
-              </a:rPr>
-              <a:t>  TAT — Thematic Analysis (1/2)</a:t>
-            </a:r>
-          </a:p>
-        </p:txBody>
-      </p:sp>
-      <p:sp>
-        <p:nvSpPr>
-          <p:cNvPr id="11" name="Body"/>
+        </p:txBody>
+      </p:sp>
+      <p:sp>
+        <p:nvSpPr>
+          <p:cNvPr id="10" name="Heading"/>
           <p:cNvSpPr>
             <a:spLocks noGrp="1"/>
           </p:cNvSpPr>
@@ -7190,8 +7372,8 @@
         </p:nvSpPr>
         <p:spPr>
           <a:xfrm>
-            <a:off x="610000" y="1050000"/>
-            <a:ext cx="10972000" cy="5558000"/>
+            <a:off x="610000" y="300000"/>
+            <a:ext cx="10972000" cy="900000"/>
           </a:xfrm>
           <a:prstGeom prst="rect">
             <a:avLst/>
@@ -7204,6 +7386,49 @@
           </a:bodyPr>
           <a:lstStyle/>
           <a:p>
+            <a:pPr lvl="0" algn="l">
+              <a:spcAft>
+                <a:spcPts val="0"/>
+              </a:spcAft>
+              <a:buNone/>
+            </a:pPr>
+            <a:r>
+              <a:rPr lang="en-US" sz="2800" b="1" u="sng" dirty="0">
+                <a:solidFill>
+                  <a:srgbClr val="000000"/>
+                </a:solidFill>
+                <a:latin typeface="Times New Roman" pitchFamily="18" charset="0"/>
+                <a:cs typeface="Times New Roman" pitchFamily="18" charset="0"/>
+              </a:rPr>
+              <a:t>TAT — Thematic Analysis (1/2)</a:t>
+            </a:r>
+          </a:p>
+        </p:txBody>
+      </p:sp>
+      <p:sp>
+        <p:nvSpPr>
+          <p:cNvPr id="11" name="Body"/>
+          <p:cNvSpPr>
+            <a:spLocks noGrp="1"/>
+          </p:cNvSpPr>
+          <p:nvPr/>
+        </p:nvSpPr>
+        <p:spPr>
+          <a:xfrm>
+            <a:off x="610000" y="1250000"/>
+            <a:ext cx="10972000" cy="5358000"/>
+          </a:xfrm>
+          <a:prstGeom prst="rect">
+            <a:avLst/>
+          </a:prstGeom>
+          <a:noFill/>
+        </p:spPr>
+        <p:txBody>
+          <a:bodyPr wrap="square" anchor="t">
+            <a:normAutofit/>
+          </a:bodyPr>
+          <a:lstStyle/>
+          <a:p>
             <a:pPr marL="285750" indent="-285750" lvl="0">
               <a:spcAft>
                 <a:spcPts val="600"/>
@@ -7212,9 +7437,9 @@
               <a:buChar char="•"/>
             </a:pPr>
             <a:r>
-              <a:rPr lang="en-US" sz="1600" b="1" dirty="0">
-                <a:solidFill>
-                  <a:srgbClr val="1F3B4D"/>
+              <a:rPr lang="en-US" sz="1400" b="1" dirty="0">
+                <a:solidFill>
+                  <a:srgbClr val="000000"/>
                 </a:solidFill>
                 <a:latin typeface="Times New Roman" pitchFamily="18" charset="0"/>
                 <a:cs typeface="Times New Roman" pitchFamily="18" charset="0"/>
@@ -7222,9 +7447,9 @@
               <a:t>Main theme: </a:t>
             </a:r>
             <a:r>
-              <a:rPr lang="en-US" sz="1600" dirty="0">
-                <a:solidFill>
-                  <a:srgbClr val="222222"/>
+              <a:rPr lang="en-US" sz="1400" dirty="0">
+                <a:solidFill>
+                  <a:srgbClr val="000000"/>
                 </a:solidFill>
                 <a:latin typeface="Times New Roman" pitchFamily="18" charset="0"/>
                 <a:cs typeface="Times New Roman" pitchFamily="18" charset="0"/>
@@ -7241,9 +7466,9 @@
               <a:buChar char="•"/>
             </a:pPr>
             <a:r>
-              <a:rPr lang="en-US" sz="1600" b="1" dirty="0">
-                <a:solidFill>
-                  <a:srgbClr val="1F3B4D"/>
+              <a:rPr lang="en-US" sz="1400" b="1" dirty="0">
+                <a:solidFill>
+                  <a:srgbClr val="000000"/>
                 </a:solidFill>
                 <a:latin typeface="Times New Roman" pitchFamily="18" charset="0"/>
                 <a:cs typeface="Times New Roman" pitchFamily="18" charset="0"/>
@@ -7251,9 +7476,9 @@
               <a:t>Main hero: </a:t>
             </a:r>
             <a:r>
-              <a:rPr lang="en-US" sz="1600" dirty="0">
-                <a:solidFill>
-                  <a:srgbClr val="222222"/>
+              <a:rPr lang="en-US" sz="1400" dirty="0">
+                <a:solidFill>
+                  <a:srgbClr val="000000"/>
                 </a:solidFill>
                 <a:latin typeface="Times New Roman" pitchFamily="18" charset="0"/>
                 <a:cs typeface="Times New Roman" pitchFamily="18" charset="0"/>
@@ -7270,9 +7495,9 @@
               <a:buChar char="•"/>
             </a:pPr>
             <a:r>
-              <a:rPr lang="en-US" sz="1600" b="1" dirty="0">
-                <a:solidFill>
-                  <a:srgbClr val="1F3B4D"/>
+              <a:rPr lang="en-US" sz="1400" b="1" dirty="0">
+                <a:solidFill>
+                  <a:srgbClr val="000000"/>
                 </a:solidFill>
                 <a:latin typeface="Times New Roman" pitchFamily="18" charset="0"/>
                 <a:cs typeface="Times New Roman" pitchFamily="18" charset="0"/>
@@ -7280,9 +7505,9 @@
               <a:t>Needs &amp; drives: </a:t>
             </a:r>
             <a:r>
-              <a:rPr lang="en-US" sz="1600" dirty="0">
-                <a:solidFill>
-                  <a:srgbClr val="222222"/>
+              <a:rPr lang="en-US" sz="1400" dirty="0">
+                <a:solidFill>
+                  <a:srgbClr val="000000"/>
                 </a:solidFill>
                 <a:latin typeface="Times New Roman" pitchFamily="18" charset="0"/>
                 <a:cs typeface="Times New Roman" pitchFamily="18" charset="0"/>
@@ -7299,9 +7524,9 @@
               <a:buChar char="•"/>
             </a:pPr>
             <a:r>
-              <a:rPr lang="en-US" sz="1600" b="1" dirty="0">
-                <a:solidFill>
-                  <a:srgbClr val="1F3B4D"/>
+              <a:rPr lang="en-US" sz="1400" b="1" dirty="0">
+                <a:solidFill>
+                  <a:srgbClr val="000000"/>
                 </a:solidFill>
                 <a:latin typeface="Times New Roman" pitchFamily="18" charset="0"/>
                 <a:cs typeface="Times New Roman" pitchFamily="18" charset="0"/>
@@ -7309,9 +7534,9 @@
               <a:t>Conception of environment: </a:t>
             </a:r>
             <a:r>
-              <a:rPr lang="en-US" sz="1600" dirty="0">
-                <a:solidFill>
-                  <a:srgbClr val="222222"/>
+              <a:rPr lang="en-US" sz="1400" dirty="0">
+                <a:solidFill>
+                  <a:srgbClr val="000000"/>
                 </a:solidFill>
                 <a:latin typeface="Times New Roman" pitchFamily="18" charset="0"/>
                 <a:cs typeface="Times New Roman" pitchFamily="18" charset="0"/>
@@ -7348,7 +7573,7 @@
       </p:grpSpPr>
       <p:sp>
         <p:nvSpPr>
-          <p:cNvPr id="10" name="TitleBar"/>
+          <p:cNvPr id="9" name="WhiteBG"/>
           <p:cNvSpPr>
             <a:spLocks noGrp="1"/>
           </p:cNvSpPr>
@@ -7357,43 +7582,25 @@
         <p:spPr>
           <a:xfrm>
             <a:off x="0" y="0"/>
-            <a:ext cx="12192000" cy="900000"/>
+            <a:ext cx="12192000" cy="6858000"/>
           </a:xfrm>
           <a:prstGeom prst="rect">
             <a:avLst/>
           </a:prstGeom>
           <a:solidFill>
-            <a:srgbClr val="3494BA"/>
+            <a:srgbClr val="FFFFFF"/>
           </a:solidFill>
         </p:spPr>
         <p:txBody>
-          <a:bodyPr wrap="square" anchor="ctr">
+          <a:bodyPr wrap="square" anchor="t">
             <a:normAutofit/>
           </a:bodyPr>
           <a:lstStyle/>
-          <a:p>
-            <a:pPr lvl="0" algn="l">
-              <a:spcAft>
-                <a:spcPts val="0"/>
-              </a:spcAft>
-              <a:buNone/>
-            </a:pPr>
-            <a:r>
-              <a:rPr lang="en-US" sz="2600" b="1" dirty="0">
-                <a:solidFill>
-                  <a:srgbClr val="FFFFFF"/>
-                </a:solidFill>
-                <a:latin typeface="Times New Roman" pitchFamily="18" charset="0"/>
-                <a:cs typeface="Times New Roman" pitchFamily="18" charset="0"/>
-              </a:rPr>
-              <a:t>  TAT — Thematic Analysis (2/2)</a:t>
-            </a:r>
-          </a:p>
-        </p:txBody>
-      </p:sp>
-      <p:sp>
-        <p:nvSpPr>
-          <p:cNvPr id="11" name="Body"/>
+        </p:txBody>
+      </p:sp>
+      <p:sp>
+        <p:nvSpPr>
+          <p:cNvPr id="10" name="Heading"/>
           <p:cNvSpPr>
             <a:spLocks noGrp="1"/>
           </p:cNvSpPr>
@@ -7401,8 +7608,8 @@
         </p:nvSpPr>
         <p:spPr>
           <a:xfrm>
-            <a:off x="610000" y="1050000"/>
-            <a:ext cx="10972000" cy="5558000"/>
+            <a:off x="610000" y="300000"/>
+            <a:ext cx="10972000" cy="900000"/>
           </a:xfrm>
           <a:prstGeom prst="rect">
             <a:avLst/>
@@ -7415,6 +7622,49 @@
           </a:bodyPr>
           <a:lstStyle/>
           <a:p>
+            <a:pPr lvl="0" algn="l">
+              <a:spcAft>
+                <a:spcPts val="0"/>
+              </a:spcAft>
+              <a:buNone/>
+            </a:pPr>
+            <a:r>
+              <a:rPr lang="en-US" sz="2800" b="1" u="sng" dirty="0">
+                <a:solidFill>
+                  <a:srgbClr val="000000"/>
+                </a:solidFill>
+                <a:latin typeface="Times New Roman" pitchFamily="18" charset="0"/>
+                <a:cs typeface="Times New Roman" pitchFamily="18" charset="0"/>
+              </a:rPr>
+              <a:t>TAT — Thematic Analysis (2/2)</a:t>
+            </a:r>
+          </a:p>
+        </p:txBody>
+      </p:sp>
+      <p:sp>
+        <p:nvSpPr>
+          <p:cNvPr id="11" name="Body"/>
+          <p:cNvSpPr>
+            <a:spLocks noGrp="1"/>
+          </p:cNvSpPr>
+          <p:nvPr/>
+        </p:nvSpPr>
+        <p:spPr>
+          <a:xfrm>
+            <a:off x="610000" y="1250000"/>
+            <a:ext cx="10972000" cy="5358000"/>
+          </a:xfrm>
+          <a:prstGeom prst="rect">
+            <a:avLst/>
+          </a:prstGeom>
+          <a:noFill/>
+        </p:spPr>
+        <p:txBody>
+          <a:bodyPr wrap="square" anchor="t">
+            <a:normAutofit/>
+          </a:bodyPr>
+          <a:lstStyle/>
+          <a:p>
             <a:pPr marL="285750" indent="-285750" lvl="0">
               <a:spcAft>
                 <a:spcPts val="600"/>
@@ -7423,9 +7673,9 @@
               <a:buChar char="•"/>
             </a:pPr>
             <a:r>
-              <a:rPr lang="en-US" sz="1600" b="1" dirty="0">
-                <a:solidFill>
-                  <a:srgbClr val="1F3B4D"/>
+              <a:rPr lang="en-US" sz="1400" b="1" dirty="0">
+                <a:solidFill>
+                  <a:srgbClr val="000000"/>
                 </a:solidFill>
                 <a:latin typeface="Times New Roman" pitchFamily="18" charset="0"/>
                 <a:cs typeface="Times New Roman" pitchFamily="18" charset="0"/>
@@ -7433,9 +7683,9 @@
               <a:t>Significant conflicts: </a:t>
             </a:r>
             <a:r>
-              <a:rPr lang="en-US" sz="1600" dirty="0">
-                <a:solidFill>
-                  <a:srgbClr val="222222"/>
+              <a:rPr lang="en-US" sz="1400" dirty="0">
+                <a:solidFill>
+                  <a:srgbClr val="000000"/>
                 </a:solidFill>
                 <a:latin typeface="Times New Roman" pitchFamily="18" charset="0"/>
                 <a:cs typeface="Times New Roman" pitchFamily="18" charset="0"/>
@@ -7452,9 +7702,9 @@
               <a:buChar char="•"/>
             </a:pPr>
             <a:r>
-              <a:rPr lang="en-US" sz="1600" b="1" dirty="0">
-                <a:solidFill>
-                  <a:srgbClr val="1F3B4D"/>
+              <a:rPr lang="en-US" sz="1400" b="1" dirty="0">
+                <a:solidFill>
+                  <a:srgbClr val="000000"/>
                 </a:solidFill>
                 <a:latin typeface="Times New Roman" pitchFamily="18" charset="0"/>
                 <a:cs typeface="Times New Roman" pitchFamily="18" charset="0"/>
@@ -7462,9 +7712,9 @@
               <a:t>Nature of anxieties: </a:t>
             </a:r>
             <a:r>
-              <a:rPr lang="en-US" sz="1600" dirty="0">
-                <a:solidFill>
-                  <a:srgbClr val="222222"/>
+              <a:rPr lang="en-US" sz="1400" dirty="0">
+                <a:solidFill>
+                  <a:srgbClr val="000000"/>
                 </a:solidFill>
                 <a:latin typeface="Times New Roman" pitchFamily="18" charset="0"/>
                 <a:cs typeface="Times New Roman" pitchFamily="18" charset="0"/>
@@ -7481,9 +7731,9 @@
               <a:buChar char="•"/>
             </a:pPr>
             <a:r>
-              <a:rPr lang="en-US" sz="1600" b="1" dirty="0">
-                <a:solidFill>
-                  <a:srgbClr val="1F3B4D"/>
+              <a:rPr lang="en-US" sz="1400" b="1" dirty="0">
+                <a:solidFill>
+                  <a:srgbClr val="000000"/>
                 </a:solidFill>
                 <a:latin typeface="Times New Roman" pitchFamily="18" charset="0"/>
                 <a:cs typeface="Times New Roman" pitchFamily="18" charset="0"/>
@@ -7491,9 +7741,9 @@
               <a:t>Main defences: </a:t>
             </a:r>
             <a:r>
-              <a:rPr lang="en-US" sz="1600" dirty="0">
-                <a:solidFill>
-                  <a:srgbClr val="222222"/>
+              <a:rPr lang="en-US" sz="1400" dirty="0">
+                <a:solidFill>
+                  <a:srgbClr val="000000"/>
                 </a:solidFill>
                 <a:latin typeface="Times New Roman" pitchFamily="18" charset="0"/>
                 <a:cs typeface="Times New Roman" pitchFamily="18" charset="0"/>
@@ -7530,7 +7780,7 @@
       </p:grpSpPr>
       <p:sp>
         <p:nvSpPr>
-          <p:cNvPr id="10" name="TitleBar"/>
+          <p:cNvPr id="9" name="WhiteBG"/>
           <p:cNvSpPr>
             <a:spLocks noGrp="1"/>
           </p:cNvSpPr>
@@ -7539,43 +7789,25 @@
         <p:spPr>
           <a:xfrm>
             <a:off x="0" y="0"/>
-            <a:ext cx="12192000" cy="900000"/>
+            <a:ext cx="12192000" cy="6858000"/>
           </a:xfrm>
           <a:prstGeom prst="rect">
             <a:avLst/>
           </a:prstGeom>
           <a:solidFill>
-            <a:srgbClr val="3494BA"/>
+            <a:srgbClr val="FFFFFF"/>
           </a:solidFill>
         </p:spPr>
         <p:txBody>
-          <a:bodyPr wrap="square" anchor="ctr">
+          <a:bodyPr wrap="square" anchor="t">
             <a:normAutofit/>
           </a:bodyPr>
           <a:lstStyle/>
-          <a:p>
-            <a:pPr lvl="0" algn="l">
-              <a:spcAft>
-                <a:spcPts val="0"/>
-              </a:spcAft>
-              <a:buNone/>
-            </a:pPr>
-            <a:r>
-              <a:rPr lang="en-US" sz="2600" b="1" dirty="0">
-                <a:solidFill>
-                  <a:srgbClr val="FFFFFF"/>
-                </a:solidFill>
-                <a:latin typeface="Times New Roman" pitchFamily="18" charset="0"/>
-                <a:cs typeface="Times New Roman" pitchFamily="18" charset="0"/>
-              </a:rPr>
-              <a:t>  Socio-Demographic Details</a:t>
-            </a:r>
-          </a:p>
-        </p:txBody>
-      </p:sp>
-      <p:sp>
-        <p:nvSpPr>
-          <p:cNvPr id="11" name="Body"/>
+        </p:txBody>
+      </p:sp>
+      <p:sp>
+        <p:nvSpPr>
+          <p:cNvPr id="10" name="Heading"/>
           <p:cNvSpPr>
             <a:spLocks noGrp="1"/>
           </p:cNvSpPr>
@@ -7583,8 +7815,8 @@
         </p:nvSpPr>
         <p:spPr>
           <a:xfrm>
-            <a:off x="610000" y="1050000"/>
-            <a:ext cx="10972000" cy="5558000"/>
+            <a:off x="610000" y="300000"/>
+            <a:ext cx="10972000" cy="900000"/>
           </a:xfrm>
           <a:prstGeom prst="rect">
             <a:avLst/>
@@ -7597,6 +7829,49 @@
           </a:bodyPr>
           <a:lstStyle/>
           <a:p>
+            <a:pPr lvl="0" algn="l">
+              <a:spcAft>
+                <a:spcPts val="0"/>
+              </a:spcAft>
+              <a:buNone/>
+            </a:pPr>
+            <a:r>
+              <a:rPr lang="en-US" sz="2800" b="1" u="sng" dirty="0">
+                <a:solidFill>
+                  <a:srgbClr val="000000"/>
+                </a:solidFill>
+                <a:latin typeface="Times New Roman" pitchFamily="18" charset="0"/>
+                <a:cs typeface="Times New Roman" pitchFamily="18" charset="0"/>
+              </a:rPr>
+              <a:t>Socio-Demographic Details</a:t>
+            </a:r>
+          </a:p>
+        </p:txBody>
+      </p:sp>
+      <p:sp>
+        <p:nvSpPr>
+          <p:cNvPr id="11" name="Body"/>
+          <p:cNvSpPr>
+            <a:spLocks noGrp="1"/>
+          </p:cNvSpPr>
+          <p:nvPr/>
+        </p:nvSpPr>
+        <p:spPr>
+          <a:xfrm>
+            <a:off x="610000" y="1250000"/>
+            <a:ext cx="10972000" cy="5358000"/>
+          </a:xfrm>
+          <a:prstGeom prst="rect">
+            <a:avLst/>
+          </a:prstGeom>
+          <a:noFill/>
+        </p:spPr>
+        <p:txBody>
+          <a:bodyPr wrap="square" anchor="t">
+            <a:normAutofit/>
+          </a:bodyPr>
+          <a:lstStyle/>
+          <a:p>
             <a:pPr lvl="0">
               <a:spcAft>
                 <a:spcPts val="600"/>
@@ -7604,9 +7879,9 @@
               <a:buNone/>
             </a:pPr>
             <a:r>
-              <a:rPr lang="en-US" sz="1500" b="1" dirty="0">
-                <a:solidFill>
-                  <a:srgbClr val="1F3B4D"/>
+              <a:rPr lang="en-US" sz="1400" b="1" dirty="0">
+                <a:solidFill>
+                  <a:srgbClr val="000000"/>
                 </a:solidFill>
                 <a:latin typeface="Times New Roman" pitchFamily="18" charset="0"/>
                 <a:cs typeface="Times New Roman" pitchFamily="18" charset="0"/>
@@ -7614,9 +7889,9 @@
               <a:t>Name: </a:t>
             </a:r>
             <a:r>
-              <a:rPr lang="en-US" sz="1500" dirty="0">
-                <a:solidFill>
-                  <a:srgbClr val="222222"/>
+              <a:rPr lang="en-US" sz="1400" dirty="0">
+                <a:solidFill>
+                  <a:srgbClr val="000000"/>
                 </a:solidFill>
                 <a:latin typeface="Times New Roman" pitchFamily="18" charset="0"/>
                 <a:cs typeface="Times New Roman" pitchFamily="18" charset="0"/>
@@ -7632,9 +7907,9 @@
               <a:buNone/>
             </a:pPr>
             <a:r>
-              <a:rPr lang="en-US" sz="1500" b="1" dirty="0">
-                <a:solidFill>
-                  <a:srgbClr val="1F3B4D"/>
+              <a:rPr lang="en-US" sz="1400" b="1" dirty="0">
+                <a:solidFill>
+                  <a:srgbClr val="000000"/>
                 </a:solidFill>
                 <a:latin typeface="Times New Roman" pitchFamily="18" charset="0"/>
                 <a:cs typeface="Times New Roman" pitchFamily="18" charset="0"/>
@@ -7642,9 +7917,9 @@
               <a:t>Age: </a:t>
             </a:r>
             <a:r>
-              <a:rPr lang="en-US" sz="1500" dirty="0">
-                <a:solidFill>
-                  <a:srgbClr val="222222"/>
+              <a:rPr lang="en-US" sz="1400" dirty="0">
+                <a:solidFill>
+                  <a:srgbClr val="000000"/>
                 </a:solidFill>
                 <a:latin typeface="Times New Roman" pitchFamily="18" charset="0"/>
                 <a:cs typeface="Times New Roman" pitchFamily="18" charset="0"/>
@@ -7660,9 +7935,9 @@
               <a:buNone/>
             </a:pPr>
             <a:r>
-              <a:rPr lang="en-US" sz="1500" b="1" dirty="0">
-                <a:solidFill>
-                  <a:srgbClr val="1F3B4D"/>
+              <a:rPr lang="en-US" sz="1400" b="1" dirty="0">
+                <a:solidFill>
+                  <a:srgbClr val="000000"/>
                 </a:solidFill>
                 <a:latin typeface="Times New Roman" pitchFamily="18" charset="0"/>
                 <a:cs typeface="Times New Roman" pitchFamily="18" charset="0"/>
@@ -7670,9 +7945,9 @@
               <a:t>Gender: </a:t>
             </a:r>
             <a:r>
-              <a:rPr lang="en-US" sz="1500" dirty="0">
-                <a:solidFill>
-                  <a:srgbClr val="222222"/>
+              <a:rPr lang="en-US" sz="1400" dirty="0">
+                <a:solidFill>
+                  <a:srgbClr val="000000"/>
                 </a:solidFill>
                 <a:latin typeface="Times New Roman" pitchFamily="18" charset="0"/>
                 <a:cs typeface="Times New Roman" pitchFamily="18" charset="0"/>
@@ -7688,9 +7963,9 @@
               <a:buNone/>
             </a:pPr>
             <a:r>
-              <a:rPr lang="en-US" sz="1500" b="1" dirty="0">
-                <a:solidFill>
-                  <a:srgbClr val="1F3B4D"/>
+              <a:rPr lang="en-US" sz="1400" b="1" dirty="0">
+                <a:solidFill>
+                  <a:srgbClr val="000000"/>
                 </a:solidFill>
                 <a:latin typeface="Times New Roman" pitchFamily="18" charset="0"/>
                 <a:cs typeface="Times New Roman" pitchFamily="18" charset="0"/>
@@ -7698,9 +7973,9 @@
               <a:t>Guardian's Name: </a:t>
             </a:r>
             <a:r>
-              <a:rPr lang="en-US" sz="1500" dirty="0">
-                <a:solidFill>
-                  <a:srgbClr val="222222"/>
+              <a:rPr lang="en-US" sz="1400" dirty="0">
+                <a:solidFill>
+                  <a:srgbClr val="000000"/>
                 </a:solidFill>
                 <a:latin typeface="Times New Roman" pitchFamily="18" charset="0"/>
                 <a:cs typeface="Times New Roman" pitchFamily="18" charset="0"/>
@@ -7716,9 +7991,9 @@
               <a:buNone/>
             </a:pPr>
             <a:r>
-              <a:rPr lang="en-US" sz="1500" b="1" dirty="0">
-                <a:solidFill>
-                  <a:srgbClr val="1F3B4D"/>
+              <a:rPr lang="en-US" sz="1400" b="1" dirty="0">
+                <a:solidFill>
+                  <a:srgbClr val="000000"/>
                 </a:solidFill>
                 <a:latin typeface="Times New Roman" pitchFamily="18" charset="0"/>
                 <a:cs typeface="Times New Roman" pitchFamily="18" charset="0"/>
@@ -7726,9 +8001,9 @@
               <a:t>Marital Status: </a:t>
             </a:r>
             <a:r>
-              <a:rPr lang="en-US" sz="1500" dirty="0">
-                <a:solidFill>
-                  <a:srgbClr val="222222"/>
+              <a:rPr lang="en-US" sz="1400" dirty="0">
+                <a:solidFill>
+                  <a:srgbClr val="000000"/>
                 </a:solidFill>
                 <a:latin typeface="Times New Roman" pitchFamily="18" charset="0"/>
                 <a:cs typeface="Times New Roman" pitchFamily="18" charset="0"/>
@@ -7744,9 +8019,9 @@
               <a:buNone/>
             </a:pPr>
             <a:r>
-              <a:rPr lang="en-US" sz="1500" b="1" dirty="0">
-                <a:solidFill>
-                  <a:srgbClr val="1F3B4D"/>
+              <a:rPr lang="en-US" sz="1400" b="1" dirty="0">
+                <a:solidFill>
+                  <a:srgbClr val="000000"/>
                 </a:solidFill>
                 <a:latin typeface="Times New Roman" pitchFamily="18" charset="0"/>
                 <a:cs typeface="Times New Roman" pitchFamily="18" charset="0"/>
@@ -7754,9 +8029,9 @@
               <a:t>Religion: </a:t>
             </a:r>
             <a:r>
-              <a:rPr lang="en-US" sz="1500" dirty="0">
-                <a:solidFill>
-                  <a:srgbClr val="222222"/>
+              <a:rPr lang="en-US" sz="1400" dirty="0">
+                <a:solidFill>
+                  <a:srgbClr val="000000"/>
                 </a:solidFill>
                 <a:latin typeface="Times New Roman" pitchFamily="18" charset="0"/>
                 <a:cs typeface="Times New Roman" pitchFamily="18" charset="0"/>
@@ -7772,9 +8047,9 @@
               <a:buNone/>
             </a:pPr>
             <a:r>
-              <a:rPr lang="en-US" sz="1500" b="1" dirty="0">
-                <a:solidFill>
-                  <a:srgbClr val="1F3B4D"/>
+              <a:rPr lang="en-US" sz="1400" b="1" dirty="0">
+                <a:solidFill>
+                  <a:srgbClr val="000000"/>
                 </a:solidFill>
                 <a:latin typeface="Times New Roman" pitchFamily="18" charset="0"/>
                 <a:cs typeface="Times New Roman" pitchFamily="18" charset="0"/>
@@ -7782,9 +8057,9 @@
               <a:t>Education: </a:t>
             </a:r>
             <a:r>
-              <a:rPr lang="en-US" sz="1500" dirty="0">
-                <a:solidFill>
-                  <a:srgbClr val="222222"/>
+              <a:rPr lang="en-US" sz="1400" dirty="0">
+                <a:solidFill>
+                  <a:srgbClr val="000000"/>
                 </a:solidFill>
                 <a:latin typeface="Times New Roman" pitchFamily="18" charset="0"/>
                 <a:cs typeface="Times New Roman" pitchFamily="18" charset="0"/>
@@ -7800,9 +8075,9 @@
               <a:buNone/>
             </a:pPr>
             <a:r>
-              <a:rPr lang="en-US" sz="1500" b="1" dirty="0">
-                <a:solidFill>
-                  <a:srgbClr val="1F3B4D"/>
+              <a:rPr lang="en-US" sz="1400" b="1" dirty="0">
+                <a:solidFill>
+                  <a:srgbClr val="000000"/>
                 </a:solidFill>
                 <a:latin typeface="Times New Roman" pitchFamily="18" charset="0"/>
                 <a:cs typeface="Times New Roman" pitchFamily="18" charset="0"/>
@@ -7810,9 +8085,9 @@
               <a:t>Occupation: </a:t>
             </a:r>
             <a:r>
-              <a:rPr lang="en-US" sz="1500" dirty="0">
-                <a:solidFill>
-                  <a:srgbClr val="222222"/>
+              <a:rPr lang="en-US" sz="1400" dirty="0">
+                <a:solidFill>
+                  <a:srgbClr val="000000"/>
                 </a:solidFill>
                 <a:latin typeface="Times New Roman" pitchFamily="18" charset="0"/>
                 <a:cs typeface="Times New Roman" pitchFamily="18" charset="0"/>
@@ -7828,9 +8103,9 @@
               <a:buNone/>
             </a:pPr>
             <a:r>
-              <a:rPr lang="en-US" sz="1500" b="1" dirty="0">
-                <a:solidFill>
-                  <a:srgbClr val="1F3B4D"/>
+              <a:rPr lang="en-US" sz="1400" b="1" dirty="0">
+                <a:solidFill>
+                  <a:srgbClr val="000000"/>
                 </a:solidFill>
                 <a:latin typeface="Times New Roman" pitchFamily="18" charset="0"/>
                 <a:cs typeface="Times New Roman" pitchFamily="18" charset="0"/>
@@ -7838,9 +8113,9 @@
               <a:t>Socio-economic Strata: </a:t>
             </a:r>
             <a:r>
-              <a:rPr lang="en-US" sz="1500" dirty="0">
-                <a:solidFill>
-                  <a:srgbClr val="222222"/>
+              <a:rPr lang="en-US" sz="1400" dirty="0">
+                <a:solidFill>
+                  <a:srgbClr val="000000"/>
                 </a:solidFill>
                 <a:latin typeface="Times New Roman" pitchFamily="18" charset="0"/>
                 <a:cs typeface="Times New Roman" pitchFamily="18" charset="0"/>
@@ -7856,9 +8131,9 @@
               <a:buNone/>
             </a:pPr>
             <a:r>
-              <a:rPr lang="en-US" sz="1500" b="1" dirty="0">
-                <a:solidFill>
-                  <a:srgbClr val="1F3B4D"/>
+              <a:rPr lang="en-US" sz="1400" b="1" dirty="0">
+                <a:solidFill>
+                  <a:srgbClr val="000000"/>
                 </a:solidFill>
                 <a:latin typeface="Times New Roman" pitchFamily="18" charset="0"/>
                 <a:cs typeface="Times New Roman" pitchFamily="18" charset="0"/>
@@ -7866,9 +8141,9 @@
               <a:t>Residence: </a:t>
             </a:r>
             <a:r>
-              <a:rPr lang="en-US" sz="1500" dirty="0">
-                <a:solidFill>
-                  <a:srgbClr val="222222"/>
+              <a:rPr lang="en-US" sz="1400" dirty="0">
+                <a:solidFill>
+                  <a:srgbClr val="000000"/>
                 </a:solidFill>
                 <a:latin typeface="Times New Roman" pitchFamily="18" charset="0"/>
                 <a:cs typeface="Times New Roman" pitchFamily="18" charset="0"/>
@@ -7884,9 +8159,9 @@
               <a:buNone/>
             </a:pPr>
             <a:r>
-              <a:rPr lang="en-US" sz="1500" b="1" dirty="0">
-                <a:solidFill>
-                  <a:srgbClr val="1F3B4D"/>
+              <a:rPr lang="en-US" sz="1400" b="1" dirty="0">
+                <a:solidFill>
+                  <a:srgbClr val="000000"/>
                 </a:solidFill>
                 <a:latin typeface="Times New Roman" pitchFamily="18" charset="0"/>
                 <a:cs typeface="Times New Roman" pitchFamily="18" charset="0"/>
@@ -7894,9 +8169,9 @@
               <a:t>Language (Mother tongue): </a:t>
             </a:r>
             <a:r>
-              <a:rPr lang="en-US" sz="1500" dirty="0">
-                <a:solidFill>
-                  <a:srgbClr val="222222"/>
+              <a:rPr lang="en-US" sz="1400" dirty="0">
+                <a:solidFill>
+                  <a:srgbClr val="000000"/>
                 </a:solidFill>
                 <a:latin typeface="Times New Roman" pitchFamily="18" charset="0"/>
                 <a:cs typeface="Times New Roman" pitchFamily="18" charset="0"/>
@@ -7933,7 +8208,7 @@
       </p:grpSpPr>
       <p:sp>
         <p:nvSpPr>
-          <p:cNvPr id="10" name="TitleBar"/>
+          <p:cNvPr id="9" name="WhiteBG"/>
           <p:cNvSpPr>
             <a:spLocks noGrp="1"/>
           </p:cNvSpPr>
@@ -7942,43 +8217,25 @@
         <p:spPr>
           <a:xfrm>
             <a:off x="0" y="0"/>
-            <a:ext cx="12192000" cy="900000"/>
+            <a:ext cx="12192000" cy="6858000"/>
           </a:xfrm>
           <a:prstGeom prst="rect">
             <a:avLst/>
           </a:prstGeom>
           <a:solidFill>
-            <a:srgbClr val="3494BA"/>
+            <a:srgbClr val="FFFFFF"/>
           </a:solidFill>
         </p:spPr>
         <p:txBody>
-          <a:bodyPr wrap="square" anchor="ctr">
+          <a:bodyPr wrap="square" anchor="t">
             <a:normAutofit/>
           </a:bodyPr>
           <a:lstStyle/>
-          <a:p>
-            <a:pPr lvl="0" algn="l">
-              <a:spcAft>
-                <a:spcPts val="0"/>
-              </a:spcAft>
-              <a:buNone/>
-            </a:pPr>
-            <a:r>
-              <a:rPr lang="en-US" sz="2600" b="1" dirty="0">
-                <a:solidFill>
-                  <a:srgbClr val="FFFFFF"/>
-                </a:solidFill>
-                <a:latin typeface="Times New Roman" pitchFamily="18" charset="0"/>
-                <a:cs typeface="Times New Roman" pitchFamily="18" charset="0"/>
-              </a:rPr>
-              <a:t>  Diagnostic Formulation</a:t>
-            </a:r>
-          </a:p>
-        </p:txBody>
-      </p:sp>
-      <p:sp>
-        <p:nvSpPr>
-          <p:cNvPr id="11" name="Body"/>
+        </p:txBody>
+      </p:sp>
+      <p:sp>
+        <p:nvSpPr>
+          <p:cNvPr id="10" name="Heading"/>
           <p:cNvSpPr>
             <a:spLocks noGrp="1"/>
           </p:cNvSpPr>
@@ -7986,8 +8243,8 @@
         </p:nvSpPr>
         <p:spPr>
           <a:xfrm>
-            <a:off x="610000" y="1050000"/>
-            <a:ext cx="10972000" cy="5558000"/>
+            <a:off x="610000" y="300000"/>
+            <a:ext cx="10972000" cy="900000"/>
           </a:xfrm>
           <a:prstGeom prst="rect">
             <a:avLst/>
@@ -8000,6 +8257,49 @@
           </a:bodyPr>
           <a:lstStyle/>
           <a:p>
+            <a:pPr lvl="0" algn="l">
+              <a:spcAft>
+                <a:spcPts val="0"/>
+              </a:spcAft>
+              <a:buNone/>
+            </a:pPr>
+            <a:r>
+              <a:rPr lang="en-US" sz="2800" b="1" u="sng" dirty="0">
+                <a:solidFill>
+                  <a:srgbClr val="000000"/>
+                </a:solidFill>
+                <a:latin typeface="Times New Roman" pitchFamily="18" charset="0"/>
+                <a:cs typeface="Times New Roman" pitchFamily="18" charset="0"/>
+              </a:rPr>
+              <a:t>Diagnostic Formulation</a:t>
+            </a:r>
+          </a:p>
+        </p:txBody>
+      </p:sp>
+      <p:sp>
+        <p:nvSpPr>
+          <p:cNvPr id="11" name="Body"/>
+          <p:cNvSpPr>
+            <a:spLocks noGrp="1"/>
+          </p:cNvSpPr>
+          <p:nvPr/>
+        </p:nvSpPr>
+        <p:spPr>
+          <a:xfrm>
+            <a:off x="610000" y="1250000"/>
+            <a:ext cx="10972000" cy="5358000"/>
+          </a:xfrm>
+          <a:prstGeom prst="rect">
+            <a:avLst/>
+          </a:prstGeom>
+          <a:noFill/>
+        </p:spPr>
+        <p:txBody>
+          <a:bodyPr wrap="square" anchor="t">
+            <a:normAutofit/>
+          </a:bodyPr>
+          <a:lstStyle/>
+          <a:p>
             <a:pPr lvl="0">
               <a:spcAft>
                 <a:spcPts val="600"/>
@@ -8009,7 +8309,7 @@
             <a:r>
               <a:rPr lang="en-US" sz="1400" dirty="0">
                 <a:solidFill>
-                  <a:srgbClr val="222222"/>
+                  <a:srgbClr val="000000"/>
                 </a:solidFill>
                 <a:latin typeface="Times New Roman" pitchFamily="18" charset="0"/>
                 <a:cs typeface="Times New Roman" pitchFamily="18" charset="0"/>
@@ -8027,7 +8327,7 @@
             <a:r>
               <a:rPr lang="en-US" sz="1400" dirty="0">
                 <a:solidFill>
-                  <a:srgbClr val="222222"/>
+                  <a:srgbClr val="000000"/>
                 </a:solidFill>
                 <a:latin typeface="Times New Roman" pitchFamily="18" charset="0"/>
                 <a:cs typeface="Times New Roman" pitchFamily="18" charset="0"/>
@@ -8064,7 +8364,7 @@
       </p:grpSpPr>
       <p:sp>
         <p:nvSpPr>
-          <p:cNvPr id="10" name="TitleBar"/>
+          <p:cNvPr id="9" name="WhiteBG"/>
           <p:cNvSpPr>
             <a:spLocks noGrp="1"/>
           </p:cNvSpPr>
@@ -8073,43 +8373,25 @@
         <p:spPr>
           <a:xfrm>
             <a:off x="0" y="0"/>
-            <a:ext cx="12192000" cy="900000"/>
+            <a:ext cx="12192000" cy="6858000"/>
           </a:xfrm>
           <a:prstGeom prst="rect">
             <a:avLst/>
           </a:prstGeom>
           <a:solidFill>
-            <a:srgbClr val="3494BA"/>
+            <a:srgbClr val="FFFFFF"/>
           </a:solidFill>
         </p:spPr>
         <p:txBody>
-          <a:bodyPr wrap="square" anchor="ctr">
+          <a:bodyPr wrap="square" anchor="t">
             <a:normAutofit/>
           </a:bodyPr>
           <a:lstStyle/>
-          <a:p>
-            <a:pPr lvl="0" algn="l">
-              <a:spcAft>
-                <a:spcPts val="0"/>
-              </a:spcAft>
-              <a:buNone/>
-            </a:pPr>
-            <a:r>
-              <a:rPr lang="en-US" sz="2600" b="1" dirty="0">
-                <a:solidFill>
-                  <a:srgbClr val="FFFFFF"/>
-                </a:solidFill>
-                <a:latin typeface="Times New Roman" pitchFamily="18" charset="0"/>
-                <a:cs typeface="Times New Roman" pitchFamily="18" charset="0"/>
-              </a:rPr>
-              <a:t>  Provisional Diagnosis &amp; Points in Favour</a:t>
-            </a:r>
-          </a:p>
-        </p:txBody>
-      </p:sp>
-      <p:sp>
-        <p:nvSpPr>
-          <p:cNvPr id="11" name="Body"/>
+        </p:txBody>
+      </p:sp>
+      <p:sp>
+        <p:nvSpPr>
+          <p:cNvPr id="10" name="Heading"/>
           <p:cNvSpPr>
             <a:spLocks noGrp="1"/>
           </p:cNvSpPr>
@@ -8117,8 +8399,8 @@
         </p:nvSpPr>
         <p:spPr>
           <a:xfrm>
-            <a:off x="610000" y="1050000"/>
-            <a:ext cx="10972000" cy="5558000"/>
+            <a:off x="610000" y="300000"/>
+            <a:ext cx="10972000" cy="900000"/>
           </a:xfrm>
           <a:prstGeom prst="rect">
             <a:avLst/>
@@ -8131,6 +8413,49 @@
           </a:bodyPr>
           <a:lstStyle/>
           <a:p>
+            <a:pPr lvl="0" algn="l">
+              <a:spcAft>
+                <a:spcPts val="0"/>
+              </a:spcAft>
+              <a:buNone/>
+            </a:pPr>
+            <a:r>
+              <a:rPr lang="en-US" sz="2800" b="1" u="sng" dirty="0">
+                <a:solidFill>
+                  <a:srgbClr val="000000"/>
+                </a:solidFill>
+                <a:latin typeface="Times New Roman" pitchFamily="18" charset="0"/>
+                <a:cs typeface="Times New Roman" pitchFamily="18" charset="0"/>
+              </a:rPr>
+              <a:t>Provisional Diagnosis &amp; Points in Favour</a:t>
+            </a:r>
+          </a:p>
+        </p:txBody>
+      </p:sp>
+      <p:sp>
+        <p:nvSpPr>
+          <p:cNvPr id="11" name="Body"/>
+          <p:cNvSpPr>
+            <a:spLocks noGrp="1"/>
+          </p:cNvSpPr>
+          <p:nvPr/>
+        </p:nvSpPr>
+        <p:spPr>
+          <a:xfrm>
+            <a:off x="610000" y="1250000"/>
+            <a:ext cx="10972000" cy="5358000"/>
+          </a:xfrm>
+          <a:prstGeom prst="rect">
+            <a:avLst/>
+          </a:prstGeom>
+          <a:noFill/>
+        </p:spPr>
+        <p:txBody>
+          <a:bodyPr wrap="square" anchor="t">
+            <a:normAutofit/>
+          </a:bodyPr>
+          <a:lstStyle/>
+          <a:p>
             <a:pPr lvl="0">
               <a:spcAft>
                 <a:spcPts val="300"/>
@@ -8138,9 +8463,9 @@
               <a:buNone/>
             </a:pPr>
             <a:r>
-              <a:rPr lang="en-US" sz="1800" b="1" dirty="0">
-                <a:solidFill>
-                  <a:srgbClr val="3494BA"/>
+              <a:rPr lang="en-US" sz="2000" b="1" dirty="0">
+                <a:solidFill>
+                  <a:srgbClr val="000000"/>
                 </a:solidFill>
                 <a:latin typeface="Times New Roman" pitchFamily="18" charset="0"/>
                 <a:cs typeface="Times New Roman" pitchFamily="18" charset="0"/>
@@ -8156,9 +8481,9 @@
               <a:buNone/>
             </a:pPr>
             <a:r>
-              <a:rPr lang="en-US" sz="1700" b="1" dirty="0">
-                <a:solidFill>
-                  <a:srgbClr val="1F3B4D"/>
+              <a:rPr lang="en-US" sz="2000" b="1" dirty="0">
+                <a:solidFill>
+                  <a:srgbClr val="000000"/>
                 </a:solidFill>
                 <a:latin typeface="Times New Roman" pitchFamily="18" charset="0"/>
                 <a:cs typeface="Times New Roman" pitchFamily="18" charset="0"/>
@@ -8176,7 +8501,7 @@
             <a:r>
               <a:rPr lang="en-US" sz="1400" dirty="0">
                 <a:solidFill>
-                  <a:srgbClr val="222222"/>
+                  <a:srgbClr val="000000"/>
                 </a:solidFill>
                 <a:latin typeface="Times New Roman" pitchFamily="18" charset="0"/>
                 <a:cs typeface="Times New Roman" pitchFamily="18" charset="0"/>
@@ -8192,9 +8517,9 @@
               <a:buNone/>
             </a:pPr>
             <a:r>
-              <a:rPr lang="en-US" sz="1800" b="1" dirty="0">
-                <a:solidFill>
-                  <a:srgbClr val="3494BA"/>
+              <a:rPr lang="en-US" sz="2000" b="1" dirty="0">
+                <a:solidFill>
+                  <a:srgbClr val="000000"/>
                 </a:solidFill>
                 <a:latin typeface="Times New Roman" pitchFamily="18" charset="0"/>
                 <a:cs typeface="Times New Roman" pitchFamily="18" charset="0"/>
@@ -8211,9 +8536,9 @@
               <a:buChar char="•"/>
             </a:pPr>
             <a:r>
-              <a:rPr lang="en-US" sz="1600" dirty="0">
-                <a:solidFill>
-                  <a:srgbClr val="222222"/>
+              <a:rPr lang="en-US" sz="1400" dirty="0">
+                <a:solidFill>
+                  <a:srgbClr val="000000"/>
                 </a:solidFill>
                 <a:latin typeface="Times New Roman" pitchFamily="18" charset="0"/>
                 <a:cs typeface="Times New Roman" pitchFamily="18" charset="0"/>
@@ -8230,9 +8555,9 @@
               <a:buChar char="•"/>
             </a:pPr>
             <a:r>
-              <a:rPr lang="en-US" sz="1600" dirty="0">
-                <a:solidFill>
-                  <a:srgbClr val="222222"/>
+              <a:rPr lang="en-US" sz="1400" dirty="0">
+                <a:solidFill>
+                  <a:srgbClr val="000000"/>
                 </a:solidFill>
                 <a:latin typeface="Times New Roman" pitchFamily="18" charset="0"/>
                 <a:cs typeface="Times New Roman" pitchFamily="18" charset="0"/>
@@ -8249,9 +8574,9 @@
               <a:buChar char="•"/>
             </a:pPr>
             <a:r>
-              <a:rPr lang="en-US" sz="1600" dirty="0">
-                <a:solidFill>
-                  <a:srgbClr val="222222"/>
+              <a:rPr lang="en-US" sz="1400" dirty="0">
+                <a:solidFill>
+                  <a:srgbClr val="000000"/>
                 </a:solidFill>
                 <a:latin typeface="Times New Roman" pitchFamily="18" charset="0"/>
                 <a:cs typeface="Times New Roman" pitchFamily="18" charset="0"/>
@@ -8268,9 +8593,9 @@
               <a:buChar char="•"/>
             </a:pPr>
             <a:r>
-              <a:rPr lang="en-US" sz="1600" dirty="0">
-                <a:solidFill>
-                  <a:srgbClr val="222222"/>
+              <a:rPr lang="en-US" sz="1400" dirty="0">
+                <a:solidFill>
+                  <a:srgbClr val="000000"/>
                 </a:solidFill>
                 <a:latin typeface="Times New Roman" pitchFamily="18" charset="0"/>
                 <a:cs typeface="Times New Roman" pitchFamily="18" charset="0"/>
@@ -8307,7 +8632,7 @@
       </p:grpSpPr>
       <p:sp>
         <p:nvSpPr>
-          <p:cNvPr id="10" name="TitleBar"/>
+          <p:cNvPr id="9" name="WhiteBG"/>
           <p:cNvSpPr>
             <a:spLocks noGrp="1"/>
           </p:cNvSpPr>
@@ -8316,43 +8641,25 @@
         <p:spPr>
           <a:xfrm>
             <a:off x="0" y="0"/>
-            <a:ext cx="12192000" cy="900000"/>
+            <a:ext cx="12192000" cy="6858000"/>
           </a:xfrm>
           <a:prstGeom prst="rect">
             <a:avLst/>
           </a:prstGeom>
           <a:solidFill>
-            <a:srgbClr val="3494BA"/>
+            <a:srgbClr val="FFFFFF"/>
           </a:solidFill>
         </p:spPr>
         <p:txBody>
-          <a:bodyPr wrap="square" anchor="ctr">
+          <a:bodyPr wrap="square" anchor="t">
             <a:normAutofit/>
           </a:bodyPr>
           <a:lstStyle/>
-          <a:p>
-            <a:pPr lvl="0" algn="l">
-              <a:spcAft>
-                <a:spcPts val="0"/>
-              </a:spcAft>
-              <a:buNone/>
-            </a:pPr>
-            <a:r>
-              <a:rPr lang="en-US" sz="2600" b="1" dirty="0">
-                <a:solidFill>
-                  <a:srgbClr val="FFFFFF"/>
-                </a:solidFill>
-                <a:latin typeface="Times New Roman" pitchFamily="18" charset="0"/>
-                <a:cs typeface="Times New Roman" pitchFamily="18" charset="0"/>
-              </a:rPr>
-              <a:t>  Differential Diagnoses Considered</a:t>
-            </a:r>
-          </a:p>
-        </p:txBody>
-      </p:sp>
-      <p:sp>
-        <p:nvSpPr>
-          <p:cNvPr id="11" name="Body"/>
+        </p:txBody>
+      </p:sp>
+      <p:sp>
+        <p:nvSpPr>
+          <p:cNvPr id="10" name="Heading"/>
           <p:cNvSpPr>
             <a:spLocks noGrp="1"/>
           </p:cNvSpPr>
@@ -8360,8 +8667,8 @@
         </p:nvSpPr>
         <p:spPr>
           <a:xfrm>
-            <a:off x="610000" y="1050000"/>
-            <a:ext cx="10972000" cy="5558000"/>
+            <a:off x="610000" y="300000"/>
+            <a:ext cx="10972000" cy="900000"/>
           </a:xfrm>
           <a:prstGeom prst="rect">
             <a:avLst/>
@@ -8374,6 +8681,49 @@
           </a:bodyPr>
           <a:lstStyle/>
           <a:p>
+            <a:pPr lvl="0" algn="l">
+              <a:spcAft>
+                <a:spcPts val="0"/>
+              </a:spcAft>
+              <a:buNone/>
+            </a:pPr>
+            <a:r>
+              <a:rPr lang="en-US" sz="2800" b="1" u="sng" dirty="0">
+                <a:solidFill>
+                  <a:srgbClr val="000000"/>
+                </a:solidFill>
+                <a:latin typeface="Times New Roman" pitchFamily="18" charset="0"/>
+                <a:cs typeface="Times New Roman" pitchFamily="18" charset="0"/>
+              </a:rPr>
+              <a:t>Differential Diagnoses Considered</a:t>
+            </a:r>
+          </a:p>
+        </p:txBody>
+      </p:sp>
+      <p:sp>
+        <p:nvSpPr>
+          <p:cNvPr id="11" name="Body"/>
+          <p:cNvSpPr>
+            <a:spLocks noGrp="1"/>
+          </p:cNvSpPr>
+          <p:nvPr/>
+        </p:nvSpPr>
+        <p:spPr>
+          <a:xfrm>
+            <a:off x="610000" y="1250000"/>
+            <a:ext cx="10972000" cy="5358000"/>
+          </a:xfrm>
+          <a:prstGeom prst="rect">
+            <a:avLst/>
+          </a:prstGeom>
+          <a:noFill/>
+        </p:spPr>
+        <p:txBody>
+          <a:bodyPr wrap="square" anchor="t">
+            <a:normAutofit/>
+          </a:bodyPr>
+          <a:lstStyle/>
+          <a:p>
             <a:pPr marL="285750" indent="-285750" lvl="0">
               <a:spcAft>
                 <a:spcPts val="600"/>
@@ -8382,9 +8732,9 @@
               <a:buChar char="•"/>
             </a:pPr>
             <a:r>
-              <a:rPr lang="en-US" sz="1600" b="1" dirty="0">
-                <a:solidFill>
-                  <a:srgbClr val="1F3B4D"/>
+              <a:rPr lang="en-US" sz="1400" b="1" dirty="0">
+                <a:solidFill>
+                  <a:srgbClr val="000000"/>
                 </a:solidFill>
                 <a:latin typeface="Times New Roman" pitchFamily="18" charset="0"/>
                 <a:cs typeface="Times New Roman" pitchFamily="18" charset="0"/>
@@ -8392,9 +8742,9 @@
               <a:t>Primary psychotic disorder: </a:t>
             </a:r>
             <a:r>
-              <a:rPr lang="en-US" sz="1600" dirty="0">
-                <a:solidFill>
-                  <a:srgbClr val="222222"/>
+              <a:rPr lang="en-US" sz="1400" dirty="0">
+                <a:solidFill>
+                  <a:srgbClr val="000000"/>
                 </a:solidFill>
                 <a:latin typeface="Times New Roman" pitchFamily="18" charset="0"/>
                 <a:cs typeface="Times New Roman" pitchFamily="18" charset="0"/>
@@ -8411,9 +8761,9 @@
               <a:buChar char="•"/>
             </a:pPr>
             <a:r>
-              <a:rPr lang="en-US" sz="1600" b="1" dirty="0">
-                <a:solidFill>
-                  <a:srgbClr val="1F3B4D"/>
+              <a:rPr lang="en-US" sz="1400" b="1" dirty="0">
+                <a:solidFill>
+                  <a:srgbClr val="000000"/>
                 </a:solidFill>
                 <a:latin typeface="Times New Roman" pitchFamily="18" charset="0"/>
                 <a:cs typeface="Times New Roman" pitchFamily="18" charset="0"/>
@@ -8421,9 +8771,9 @@
               <a:t>Organic / neurological disorder: </a:t>
             </a:r>
             <a:r>
-              <a:rPr lang="en-US" sz="1600" dirty="0">
-                <a:solidFill>
-                  <a:srgbClr val="222222"/>
+              <a:rPr lang="en-US" sz="1400" dirty="0">
+                <a:solidFill>
+                  <a:srgbClr val="000000"/>
                 </a:solidFill>
                 <a:latin typeface="Times New Roman" pitchFamily="18" charset="0"/>
                 <a:cs typeface="Times New Roman" pitchFamily="18" charset="0"/>
@@ -8440,9 +8790,9 @@
               <a:buChar char="•"/>
             </a:pPr>
             <a:r>
-              <a:rPr lang="en-US" sz="1600" b="1" dirty="0">
-                <a:solidFill>
-                  <a:srgbClr val="1F3B4D"/>
+              <a:rPr lang="en-US" sz="1400" b="1" dirty="0">
+                <a:solidFill>
+                  <a:srgbClr val="000000"/>
                 </a:solidFill>
                 <a:latin typeface="Times New Roman" pitchFamily="18" charset="0"/>
                 <a:cs typeface="Times New Roman" pitchFamily="18" charset="0"/>
@@ -8450,9 +8800,9 @@
               <a:t>Substance-related disorder: </a:t>
             </a:r>
             <a:r>
-              <a:rPr lang="en-US" sz="1600" dirty="0">
-                <a:solidFill>
-                  <a:srgbClr val="222222"/>
+              <a:rPr lang="en-US" sz="1400" dirty="0">
+                <a:solidFill>
+                  <a:srgbClr val="000000"/>
                 </a:solidFill>
                 <a:latin typeface="Times New Roman" pitchFamily="18" charset="0"/>
                 <a:cs typeface="Times New Roman" pitchFamily="18" charset="0"/>
@@ -8469,9 +8819,9 @@
               <a:buChar char="•"/>
             </a:pPr>
             <a:r>
-              <a:rPr lang="en-US" sz="1600" b="1" dirty="0">
-                <a:solidFill>
-                  <a:srgbClr val="1F3B4D"/>
+              <a:rPr lang="en-US" sz="1400" b="1" dirty="0">
+                <a:solidFill>
+                  <a:srgbClr val="000000"/>
                 </a:solidFill>
                 <a:latin typeface="Times New Roman" pitchFamily="18" charset="0"/>
                 <a:cs typeface="Times New Roman" pitchFamily="18" charset="0"/>
@@ -8479,9 +8829,9 @@
               <a:t>Primary mood disorder: </a:t>
             </a:r>
             <a:r>
-              <a:rPr lang="en-US" sz="1600" dirty="0">
-                <a:solidFill>
-                  <a:srgbClr val="222222"/>
+              <a:rPr lang="en-US" sz="1400" dirty="0">
+                <a:solidFill>
+                  <a:srgbClr val="000000"/>
                 </a:solidFill>
                 <a:latin typeface="Times New Roman" pitchFamily="18" charset="0"/>
                 <a:cs typeface="Times New Roman" pitchFamily="18" charset="0"/>
@@ -8518,7 +8868,7 @@
       </p:grpSpPr>
       <p:sp>
         <p:nvSpPr>
-          <p:cNvPr id="10" name="TitleBar"/>
+          <p:cNvPr id="9" name="WhiteBG"/>
           <p:cNvSpPr>
             <a:spLocks noGrp="1"/>
           </p:cNvSpPr>
@@ -8527,43 +8877,25 @@
         <p:spPr>
           <a:xfrm>
             <a:off x="0" y="0"/>
-            <a:ext cx="12192000" cy="900000"/>
+            <a:ext cx="12192000" cy="6858000"/>
           </a:xfrm>
           <a:prstGeom prst="rect">
             <a:avLst/>
           </a:prstGeom>
           <a:solidFill>
-            <a:srgbClr val="3494BA"/>
+            <a:srgbClr val="FFFFFF"/>
           </a:solidFill>
         </p:spPr>
         <p:txBody>
-          <a:bodyPr wrap="square" anchor="ctr">
+          <a:bodyPr wrap="square" anchor="t">
             <a:normAutofit/>
           </a:bodyPr>
           <a:lstStyle/>
-          <a:p>
-            <a:pPr lvl="0" algn="l">
-              <a:spcAft>
-                <a:spcPts val="0"/>
-              </a:spcAft>
-              <a:buNone/>
-            </a:pPr>
-            <a:r>
-              <a:rPr lang="en-US" sz="2600" b="1" dirty="0">
-                <a:solidFill>
-                  <a:srgbClr val="FFFFFF"/>
-                </a:solidFill>
-                <a:latin typeface="Times New Roman" pitchFamily="18" charset="0"/>
-                <a:cs typeface="Times New Roman" pitchFamily="18" charset="0"/>
-              </a:rPr>
-              <a:t>  Case Conceptualisation (4-P Model)</a:t>
-            </a:r>
-          </a:p>
-        </p:txBody>
-      </p:sp>
-      <p:sp>
-        <p:nvSpPr>
-          <p:cNvPr id="11" name="Body"/>
+        </p:txBody>
+      </p:sp>
+      <p:sp>
+        <p:nvSpPr>
+          <p:cNvPr id="10" name="Heading"/>
           <p:cNvSpPr>
             <a:spLocks noGrp="1"/>
           </p:cNvSpPr>
@@ -8571,8 +8903,8 @@
         </p:nvSpPr>
         <p:spPr>
           <a:xfrm>
-            <a:off x="610000" y="1050000"/>
-            <a:ext cx="10972000" cy="5558000"/>
+            <a:off x="610000" y="300000"/>
+            <a:ext cx="10972000" cy="900000"/>
           </a:xfrm>
           <a:prstGeom prst="rect">
             <a:avLst/>
@@ -8585,6 +8917,49 @@
           </a:bodyPr>
           <a:lstStyle/>
           <a:p>
+            <a:pPr lvl="0" algn="l">
+              <a:spcAft>
+                <a:spcPts val="0"/>
+              </a:spcAft>
+              <a:buNone/>
+            </a:pPr>
+            <a:r>
+              <a:rPr lang="en-US" sz="2800" b="1" u="sng" dirty="0">
+                <a:solidFill>
+                  <a:srgbClr val="000000"/>
+                </a:solidFill>
+                <a:latin typeface="Times New Roman" pitchFamily="18" charset="0"/>
+                <a:cs typeface="Times New Roman" pitchFamily="18" charset="0"/>
+              </a:rPr>
+              <a:t>Case Conceptualisation (4-P Model)</a:t>
+            </a:r>
+          </a:p>
+        </p:txBody>
+      </p:sp>
+      <p:sp>
+        <p:nvSpPr>
+          <p:cNvPr id="11" name="Body"/>
+          <p:cNvSpPr>
+            <a:spLocks noGrp="1"/>
+          </p:cNvSpPr>
+          <p:nvPr/>
+        </p:nvSpPr>
+        <p:spPr>
+          <a:xfrm>
+            <a:off x="610000" y="1250000"/>
+            <a:ext cx="10972000" cy="5358000"/>
+          </a:xfrm>
+          <a:prstGeom prst="rect">
+            <a:avLst/>
+          </a:prstGeom>
+          <a:noFill/>
+        </p:spPr>
+        <p:txBody>
+          <a:bodyPr wrap="square" anchor="t">
+            <a:normAutofit/>
+          </a:bodyPr>
+          <a:lstStyle/>
+          <a:p>
             <a:pPr marL="285750" indent="-285750" lvl="0">
               <a:spcAft>
                 <a:spcPts val="600"/>
@@ -8593,9 +8968,9 @@
               <a:buChar char="•"/>
             </a:pPr>
             <a:r>
-              <a:rPr lang="en-US" sz="1600" b="1" dirty="0">
-                <a:solidFill>
-                  <a:srgbClr val="1F3B4D"/>
+              <a:rPr lang="en-US" sz="1400" b="1" dirty="0">
+                <a:solidFill>
+                  <a:srgbClr val="000000"/>
                 </a:solidFill>
                 <a:latin typeface="Times New Roman" pitchFamily="18" charset="0"/>
                 <a:cs typeface="Times New Roman" pitchFamily="18" charset="0"/>
@@ -8603,9 +8978,9 @@
               <a:t>Predisposing: </a:t>
             </a:r>
             <a:r>
-              <a:rPr lang="en-US" sz="1600" dirty="0">
-                <a:solidFill>
-                  <a:srgbClr val="222222"/>
+              <a:rPr lang="en-US" sz="1400" dirty="0">
+                <a:solidFill>
+                  <a:srgbClr val="000000"/>
                 </a:solidFill>
                 <a:latin typeface="Times New Roman" pitchFamily="18" charset="0"/>
                 <a:cs typeface="Times New Roman" pitchFamily="18" charset="0"/>
@@ -8622,9 +8997,9 @@
               <a:buChar char="•"/>
             </a:pPr>
             <a:r>
-              <a:rPr lang="en-US" sz="1600" b="1" dirty="0">
-                <a:solidFill>
-                  <a:srgbClr val="1F3B4D"/>
+              <a:rPr lang="en-US" sz="1400" b="1" dirty="0">
+                <a:solidFill>
+                  <a:srgbClr val="000000"/>
                 </a:solidFill>
                 <a:latin typeface="Times New Roman" pitchFamily="18" charset="0"/>
                 <a:cs typeface="Times New Roman" pitchFamily="18" charset="0"/>
@@ -8632,9 +9007,9 @@
               <a:t>Precipitating: </a:t>
             </a:r>
             <a:r>
-              <a:rPr lang="en-US" sz="1600" dirty="0">
-                <a:solidFill>
-                  <a:srgbClr val="222222"/>
+              <a:rPr lang="en-US" sz="1400" dirty="0">
+                <a:solidFill>
+                  <a:srgbClr val="000000"/>
                 </a:solidFill>
                 <a:latin typeface="Times New Roman" pitchFamily="18" charset="0"/>
                 <a:cs typeface="Times New Roman" pitchFamily="18" charset="0"/>
@@ -8651,9 +9026,9 @@
               <a:buChar char="•"/>
             </a:pPr>
             <a:r>
-              <a:rPr lang="en-US" sz="1600" b="1" dirty="0">
-                <a:solidFill>
-                  <a:srgbClr val="1F3B4D"/>
+              <a:rPr lang="en-US" sz="1400" b="1" dirty="0">
+                <a:solidFill>
+                  <a:srgbClr val="000000"/>
                 </a:solidFill>
                 <a:latin typeface="Times New Roman" pitchFamily="18" charset="0"/>
                 <a:cs typeface="Times New Roman" pitchFamily="18" charset="0"/>
@@ -8661,9 +9036,9 @@
               <a:t>Perpetuating: </a:t>
             </a:r>
             <a:r>
-              <a:rPr lang="en-US" sz="1600" dirty="0">
-                <a:solidFill>
-                  <a:srgbClr val="222222"/>
+              <a:rPr lang="en-US" sz="1400" dirty="0">
+                <a:solidFill>
+                  <a:srgbClr val="000000"/>
                 </a:solidFill>
                 <a:latin typeface="Times New Roman" pitchFamily="18" charset="0"/>
                 <a:cs typeface="Times New Roman" pitchFamily="18" charset="0"/>
@@ -8680,9 +9055,9 @@
               <a:buChar char="•"/>
             </a:pPr>
             <a:r>
-              <a:rPr lang="en-US" sz="1600" b="1" dirty="0">
-                <a:solidFill>
-                  <a:srgbClr val="1F3B4D"/>
+              <a:rPr lang="en-US" sz="1400" b="1" dirty="0">
+                <a:solidFill>
+                  <a:srgbClr val="000000"/>
                 </a:solidFill>
                 <a:latin typeface="Times New Roman" pitchFamily="18" charset="0"/>
                 <a:cs typeface="Times New Roman" pitchFamily="18" charset="0"/>
@@ -8690,9 +9065,9 @@
               <a:t>Protective: </a:t>
             </a:r>
             <a:r>
-              <a:rPr lang="en-US" sz="1600" dirty="0">
-                <a:solidFill>
-                  <a:srgbClr val="222222"/>
+              <a:rPr lang="en-US" sz="1400" dirty="0">
+                <a:solidFill>
+                  <a:srgbClr val="000000"/>
                 </a:solidFill>
                 <a:latin typeface="Times New Roman" pitchFamily="18" charset="0"/>
                 <a:cs typeface="Times New Roman" pitchFamily="18" charset="0"/>
@@ -8729,7 +9104,7 @@
       </p:grpSpPr>
       <p:sp>
         <p:nvSpPr>
-          <p:cNvPr id="10" name="TitleBar"/>
+          <p:cNvPr id="9" name="WhiteBG"/>
           <p:cNvSpPr>
             <a:spLocks noGrp="1"/>
           </p:cNvSpPr>
@@ -8738,43 +9113,25 @@
         <p:spPr>
           <a:xfrm>
             <a:off x="0" y="0"/>
-            <a:ext cx="12192000" cy="900000"/>
+            <a:ext cx="12192000" cy="6858000"/>
           </a:xfrm>
           <a:prstGeom prst="rect">
             <a:avLst/>
           </a:prstGeom>
           <a:solidFill>
-            <a:srgbClr val="3494BA"/>
+            <a:srgbClr val="FFFFFF"/>
           </a:solidFill>
         </p:spPr>
         <p:txBody>
-          <a:bodyPr wrap="square" anchor="ctr">
+          <a:bodyPr wrap="square" anchor="t">
             <a:normAutofit/>
           </a:bodyPr>
           <a:lstStyle/>
-          <a:p>
-            <a:pPr lvl="0" algn="l">
-              <a:spcAft>
-                <a:spcPts val="0"/>
-              </a:spcAft>
-              <a:buNone/>
-            </a:pPr>
-            <a:r>
-              <a:rPr lang="en-US" sz="2600" b="1" dirty="0">
-                <a:solidFill>
-                  <a:srgbClr val="FFFFFF"/>
-                </a:solidFill>
-                <a:latin typeface="Times New Roman" pitchFamily="18" charset="0"/>
-                <a:cs typeface="Times New Roman" pitchFamily="18" charset="0"/>
-              </a:rPr>
-              <a:t>  Working Mechanism (Formulation Summary)</a:t>
-            </a:r>
-          </a:p>
-        </p:txBody>
-      </p:sp>
-      <p:sp>
-        <p:nvSpPr>
-          <p:cNvPr id="11" name="Body"/>
+        </p:txBody>
+      </p:sp>
+      <p:sp>
+        <p:nvSpPr>
+          <p:cNvPr id="10" name="Heading"/>
           <p:cNvSpPr>
             <a:spLocks noGrp="1"/>
           </p:cNvSpPr>
@@ -8782,8 +9139,8 @@
         </p:nvSpPr>
         <p:spPr>
           <a:xfrm>
-            <a:off x="610000" y="1050000"/>
-            <a:ext cx="10972000" cy="5558000"/>
+            <a:off x="610000" y="300000"/>
+            <a:ext cx="10972000" cy="900000"/>
           </a:xfrm>
           <a:prstGeom prst="rect">
             <a:avLst/>
@@ -8796,6 +9153,49 @@
           </a:bodyPr>
           <a:lstStyle/>
           <a:p>
+            <a:pPr lvl="0" algn="l">
+              <a:spcAft>
+                <a:spcPts val="0"/>
+              </a:spcAft>
+              <a:buNone/>
+            </a:pPr>
+            <a:r>
+              <a:rPr lang="en-US" sz="2800" b="1" u="sng" dirty="0">
+                <a:solidFill>
+                  <a:srgbClr val="000000"/>
+                </a:solidFill>
+                <a:latin typeface="Times New Roman" pitchFamily="18" charset="0"/>
+                <a:cs typeface="Times New Roman" pitchFamily="18" charset="0"/>
+              </a:rPr>
+              <a:t>Working Mechanism (Formulation Summary)</a:t>
+            </a:r>
+          </a:p>
+        </p:txBody>
+      </p:sp>
+      <p:sp>
+        <p:nvSpPr>
+          <p:cNvPr id="11" name="Body"/>
+          <p:cNvSpPr>
+            <a:spLocks noGrp="1"/>
+          </p:cNvSpPr>
+          <p:nvPr/>
+        </p:nvSpPr>
+        <p:spPr>
+          <a:xfrm>
+            <a:off x="610000" y="1250000"/>
+            <a:ext cx="10972000" cy="5358000"/>
+          </a:xfrm>
+          <a:prstGeom prst="rect">
+            <a:avLst/>
+          </a:prstGeom>
+          <a:noFill/>
+        </p:spPr>
+        <p:txBody>
+          <a:bodyPr wrap="square" anchor="t">
+            <a:normAutofit/>
+          </a:bodyPr>
+          <a:lstStyle/>
+          <a:p>
             <a:pPr lvl="0">
               <a:spcAft>
                 <a:spcPts val="600"/>
@@ -8803,9 +9203,9 @@
               <a:buNone/>
             </a:pPr>
             <a:r>
-              <a:rPr lang="en-US" sz="1500" dirty="0">
-                <a:solidFill>
-                  <a:srgbClr val="222222"/>
+              <a:rPr lang="en-US" sz="1400" dirty="0">
+                <a:solidFill>
+                  <a:srgbClr val="000000"/>
                 </a:solidFill>
                 <a:latin typeface="Times New Roman" pitchFamily="18" charset="0"/>
                 <a:cs typeface="Times New Roman" pitchFamily="18" charset="0"/>
@@ -8821,9 +9221,9 @@
               <a:buNone/>
             </a:pPr>
             <a:r>
-              <a:rPr lang="en-US" sz="1500" dirty="0">
-                <a:solidFill>
-                  <a:srgbClr val="222222"/>
+              <a:rPr lang="en-US" sz="1400" dirty="0">
+                <a:solidFill>
+                  <a:srgbClr val="000000"/>
                 </a:solidFill>
                 <a:latin typeface="Times New Roman" pitchFamily="18" charset="0"/>
                 <a:cs typeface="Times New Roman" pitchFamily="18" charset="0"/>
@@ -8839,9 +9239,9 @@
               <a:buNone/>
             </a:pPr>
             <a:r>
-              <a:rPr lang="en-US" sz="1500" dirty="0">
-                <a:solidFill>
-                  <a:srgbClr val="222222"/>
+              <a:rPr lang="en-US" sz="1400" dirty="0">
+                <a:solidFill>
+                  <a:srgbClr val="000000"/>
                 </a:solidFill>
                 <a:latin typeface="Times New Roman" pitchFamily="18" charset="0"/>
                 <a:cs typeface="Times New Roman" pitchFamily="18" charset="0"/>
@@ -8878,7 +9278,7 @@
       </p:grpSpPr>
       <p:sp>
         <p:nvSpPr>
-          <p:cNvPr id="10" name="TitleBar"/>
+          <p:cNvPr id="9" name="WhiteBG"/>
           <p:cNvSpPr>
             <a:spLocks noGrp="1"/>
           </p:cNvSpPr>
@@ -8887,43 +9287,25 @@
         <p:spPr>
           <a:xfrm>
             <a:off x="0" y="0"/>
-            <a:ext cx="12192000" cy="900000"/>
+            <a:ext cx="12192000" cy="6858000"/>
           </a:xfrm>
           <a:prstGeom prst="rect">
             <a:avLst/>
           </a:prstGeom>
           <a:solidFill>
-            <a:srgbClr val="3494BA"/>
+            <a:srgbClr val="FFFFFF"/>
           </a:solidFill>
         </p:spPr>
         <p:txBody>
-          <a:bodyPr wrap="square" anchor="ctr">
+          <a:bodyPr wrap="square" anchor="t">
             <a:normAutofit/>
           </a:bodyPr>
           <a:lstStyle/>
-          <a:p>
-            <a:pPr lvl="0" algn="l">
-              <a:spcAft>
-                <a:spcPts val="0"/>
-              </a:spcAft>
-              <a:buNone/>
-            </a:pPr>
-            <a:r>
-              <a:rPr lang="en-US" sz="2600" b="1" dirty="0">
-                <a:solidFill>
-                  <a:srgbClr val="FFFFFF"/>
-                </a:solidFill>
-                <a:latin typeface="Times New Roman" pitchFamily="18" charset="0"/>
-                <a:cs typeface="Times New Roman" pitchFamily="18" charset="0"/>
-              </a:rPr>
-              <a:t>  Rationale for Therapy</a:t>
-            </a:r>
-          </a:p>
-        </p:txBody>
-      </p:sp>
-      <p:sp>
-        <p:nvSpPr>
-          <p:cNvPr id="11" name="Body"/>
+        </p:txBody>
+      </p:sp>
+      <p:sp>
+        <p:nvSpPr>
+          <p:cNvPr id="10" name="Heading"/>
           <p:cNvSpPr>
             <a:spLocks noGrp="1"/>
           </p:cNvSpPr>
@@ -8931,8 +9313,8 @@
         </p:nvSpPr>
         <p:spPr>
           <a:xfrm>
-            <a:off x="610000" y="1050000"/>
-            <a:ext cx="10972000" cy="5558000"/>
+            <a:off x="610000" y="300000"/>
+            <a:ext cx="10972000" cy="900000"/>
           </a:xfrm>
           <a:prstGeom prst="rect">
             <a:avLst/>
@@ -8945,6 +9327,49 @@
           </a:bodyPr>
           <a:lstStyle/>
           <a:p>
+            <a:pPr lvl="0" algn="l">
+              <a:spcAft>
+                <a:spcPts val="0"/>
+              </a:spcAft>
+              <a:buNone/>
+            </a:pPr>
+            <a:r>
+              <a:rPr lang="en-US" sz="2800" b="1" u="sng" dirty="0">
+                <a:solidFill>
+                  <a:srgbClr val="000000"/>
+                </a:solidFill>
+                <a:latin typeface="Times New Roman" pitchFamily="18" charset="0"/>
+                <a:cs typeface="Times New Roman" pitchFamily="18" charset="0"/>
+              </a:rPr>
+              <a:t>Rationale for Therapy</a:t>
+            </a:r>
+          </a:p>
+        </p:txBody>
+      </p:sp>
+      <p:sp>
+        <p:nvSpPr>
+          <p:cNvPr id="11" name="Body"/>
+          <p:cNvSpPr>
+            <a:spLocks noGrp="1"/>
+          </p:cNvSpPr>
+          <p:nvPr/>
+        </p:nvSpPr>
+        <p:spPr>
+          <a:xfrm>
+            <a:off x="610000" y="1250000"/>
+            <a:ext cx="10972000" cy="5358000"/>
+          </a:xfrm>
+          <a:prstGeom prst="rect">
+            <a:avLst/>
+          </a:prstGeom>
+          <a:noFill/>
+        </p:spPr>
+        <p:txBody>
+          <a:bodyPr wrap="square" anchor="t">
+            <a:normAutofit/>
+          </a:bodyPr>
+          <a:lstStyle/>
+          <a:p>
             <a:pPr lvl="0">
               <a:spcAft>
                 <a:spcPts val="300"/>
@@ -8952,9 +9377,9 @@
               <a:buNone/>
             </a:pPr>
             <a:r>
-              <a:rPr lang="en-US" sz="1800" b="1" dirty="0">
-                <a:solidFill>
-                  <a:srgbClr val="3494BA"/>
+              <a:rPr lang="en-US" sz="2000" b="1" dirty="0">
+                <a:solidFill>
+                  <a:srgbClr val="000000"/>
                 </a:solidFill>
                 <a:latin typeface="Times New Roman" pitchFamily="18" charset="0"/>
                 <a:cs typeface="Times New Roman" pitchFamily="18" charset="0"/>
@@ -8970,9 +9395,9 @@
               <a:buNone/>
             </a:pPr>
             <a:r>
-              <a:rPr lang="en-US" sz="1300" dirty="0">
-                <a:solidFill>
-                  <a:srgbClr val="222222"/>
+              <a:rPr lang="en-US" sz="1400" dirty="0">
+                <a:solidFill>
+                  <a:srgbClr val="000000"/>
                 </a:solidFill>
                 <a:latin typeface="Times New Roman" pitchFamily="18" charset="0"/>
                 <a:cs typeface="Times New Roman" pitchFamily="18" charset="0"/>
@@ -8989,9 +9414,9 @@
               <a:buChar char="•"/>
             </a:pPr>
             <a:r>
-              <a:rPr lang="en-US" sz="1600" b="1" dirty="0">
-                <a:solidFill>
-                  <a:srgbClr val="1F3B4D"/>
+              <a:rPr lang="en-US" sz="1400" b="1" dirty="0">
+                <a:solidFill>
+                  <a:srgbClr val="000000"/>
                 </a:solidFill>
                 <a:latin typeface="Times New Roman" pitchFamily="18" charset="0"/>
                 <a:cs typeface="Times New Roman" pitchFamily="18" charset="0"/>
@@ -8999,9 +9424,9 @@
               <a:t>Why appropriate here: </a:t>
             </a:r>
             <a:r>
-              <a:rPr lang="en-US" sz="1600" dirty="0">
-                <a:solidFill>
-                  <a:srgbClr val="222222"/>
+              <a:rPr lang="en-US" sz="1400" dirty="0">
+                <a:solidFill>
+                  <a:srgbClr val="000000"/>
                 </a:solidFill>
                 <a:latin typeface="Times New Roman" pitchFamily="18" charset="0"/>
                 <a:cs typeface="Times New Roman" pitchFamily="18" charset="0"/>
@@ -9017,9 +9442,9 @@
               <a:buNone/>
             </a:pPr>
             <a:r>
-              <a:rPr lang="en-US" sz="1300" dirty="0">
-                <a:solidFill>
-                  <a:srgbClr val="222222"/>
+              <a:rPr lang="en-US" sz="1400" dirty="0">
+                <a:solidFill>
+                  <a:srgbClr val="000000"/>
                 </a:solidFill>
                 <a:latin typeface="Times New Roman" pitchFamily="18" charset="0"/>
                 <a:cs typeface="Times New Roman" pitchFamily="18" charset="0"/>
@@ -9056,7 +9481,7 @@
       </p:grpSpPr>
       <p:sp>
         <p:nvSpPr>
-          <p:cNvPr id="10" name="TitleBar"/>
+          <p:cNvPr id="9" name="WhiteBG"/>
           <p:cNvSpPr>
             <a:spLocks noGrp="1"/>
           </p:cNvSpPr>
@@ -9065,43 +9490,25 @@
         <p:spPr>
           <a:xfrm>
             <a:off x="0" y="0"/>
-            <a:ext cx="12192000" cy="900000"/>
+            <a:ext cx="12192000" cy="6858000"/>
           </a:xfrm>
           <a:prstGeom prst="rect">
             <a:avLst/>
           </a:prstGeom>
           <a:solidFill>
-            <a:srgbClr val="3494BA"/>
+            <a:srgbClr val="FFFFFF"/>
           </a:solidFill>
         </p:spPr>
         <p:txBody>
-          <a:bodyPr wrap="square" anchor="ctr">
+          <a:bodyPr wrap="square" anchor="t">
             <a:normAutofit/>
           </a:bodyPr>
           <a:lstStyle/>
-          <a:p>
-            <a:pPr lvl="0" algn="l">
-              <a:spcAft>
-                <a:spcPts val="0"/>
-              </a:spcAft>
-              <a:buNone/>
-            </a:pPr>
-            <a:r>
-              <a:rPr lang="en-US" sz="2600" b="1" dirty="0">
-                <a:solidFill>
-                  <a:srgbClr val="FFFFFF"/>
-                </a:solidFill>
-                <a:latin typeface="Times New Roman" pitchFamily="18" charset="0"/>
-                <a:cs typeface="Times New Roman" pitchFamily="18" charset="0"/>
-              </a:rPr>
-              <a:t>  Goals of Therapy</a:t>
-            </a:r>
-          </a:p>
-        </p:txBody>
-      </p:sp>
-      <p:sp>
-        <p:nvSpPr>
-          <p:cNvPr id="11" name="Body"/>
+        </p:txBody>
+      </p:sp>
+      <p:sp>
+        <p:nvSpPr>
+          <p:cNvPr id="10" name="Heading"/>
           <p:cNvSpPr>
             <a:spLocks noGrp="1"/>
           </p:cNvSpPr>
@@ -9109,8 +9516,8 @@
         </p:nvSpPr>
         <p:spPr>
           <a:xfrm>
-            <a:off x="610000" y="1050000"/>
-            <a:ext cx="10972000" cy="5558000"/>
+            <a:off x="610000" y="300000"/>
+            <a:ext cx="10972000" cy="900000"/>
           </a:xfrm>
           <a:prstGeom prst="rect">
             <a:avLst/>
@@ -9123,6 +9530,49 @@
           </a:bodyPr>
           <a:lstStyle/>
           <a:p>
+            <a:pPr lvl="0" algn="l">
+              <a:spcAft>
+                <a:spcPts val="0"/>
+              </a:spcAft>
+              <a:buNone/>
+            </a:pPr>
+            <a:r>
+              <a:rPr lang="en-US" sz="2800" b="1" u="sng" dirty="0">
+                <a:solidFill>
+                  <a:srgbClr val="000000"/>
+                </a:solidFill>
+                <a:latin typeface="Times New Roman" pitchFamily="18" charset="0"/>
+                <a:cs typeface="Times New Roman" pitchFamily="18" charset="0"/>
+              </a:rPr>
+              <a:t>Goals of Therapy</a:t>
+            </a:r>
+          </a:p>
+        </p:txBody>
+      </p:sp>
+      <p:sp>
+        <p:nvSpPr>
+          <p:cNvPr id="11" name="Body"/>
+          <p:cNvSpPr>
+            <a:spLocks noGrp="1"/>
+          </p:cNvSpPr>
+          <p:nvPr/>
+        </p:nvSpPr>
+        <p:spPr>
+          <a:xfrm>
+            <a:off x="610000" y="1250000"/>
+            <a:ext cx="10972000" cy="5358000"/>
+          </a:xfrm>
+          <a:prstGeom prst="rect">
+            <a:avLst/>
+          </a:prstGeom>
+          <a:noFill/>
+        </p:spPr>
+        <p:txBody>
+          <a:bodyPr wrap="square" anchor="t">
+            <a:normAutofit/>
+          </a:bodyPr>
+          <a:lstStyle/>
+          <a:p>
             <a:pPr lvl="0">
               <a:spcAft>
                 <a:spcPts val="300"/>
@@ -9130,9 +9580,9 @@
               <a:buNone/>
             </a:pPr>
             <a:r>
-              <a:rPr lang="en-US" sz="1800" b="1" dirty="0">
-                <a:solidFill>
-                  <a:srgbClr val="3494BA"/>
+              <a:rPr lang="en-US" sz="2000" b="1" dirty="0">
+                <a:solidFill>
+                  <a:srgbClr val="000000"/>
                 </a:solidFill>
                 <a:latin typeface="Times New Roman" pitchFamily="18" charset="0"/>
                 <a:cs typeface="Times New Roman" pitchFamily="18" charset="0"/>
@@ -9149,9 +9599,9 @@
               <a:buChar char="•"/>
             </a:pPr>
             <a:r>
-              <a:rPr lang="en-US" sz="1600" dirty="0">
-                <a:solidFill>
-                  <a:srgbClr val="222222"/>
+              <a:rPr lang="en-US" sz="1400" dirty="0">
+                <a:solidFill>
+                  <a:srgbClr val="000000"/>
                 </a:solidFill>
                 <a:latin typeface="Times New Roman" pitchFamily="18" charset="0"/>
                 <a:cs typeface="Times New Roman" pitchFamily="18" charset="0"/>
@@ -9168,9 +9618,9 @@
               <a:buChar char="•"/>
             </a:pPr>
             <a:r>
-              <a:rPr lang="en-US" sz="1600" dirty="0">
-                <a:solidFill>
-                  <a:srgbClr val="222222"/>
+              <a:rPr lang="en-US" sz="1400" dirty="0">
+                <a:solidFill>
+                  <a:srgbClr val="000000"/>
                 </a:solidFill>
                 <a:latin typeface="Times New Roman" pitchFamily="18" charset="0"/>
                 <a:cs typeface="Times New Roman" pitchFamily="18" charset="0"/>
@@ -9187,9 +9637,9 @@
               <a:buChar char="•"/>
             </a:pPr>
             <a:r>
-              <a:rPr lang="en-US" sz="1600" dirty="0">
-                <a:solidFill>
-                  <a:srgbClr val="222222"/>
+              <a:rPr lang="en-US" sz="1400" dirty="0">
+                <a:solidFill>
+                  <a:srgbClr val="000000"/>
                 </a:solidFill>
                 <a:latin typeface="Times New Roman" pitchFamily="18" charset="0"/>
                 <a:cs typeface="Times New Roman" pitchFamily="18" charset="0"/>
@@ -9206,9 +9656,9 @@
               <a:buChar char="•"/>
             </a:pPr>
             <a:r>
-              <a:rPr lang="en-US" sz="1600" dirty="0">
-                <a:solidFill>
-                  <a:srgbClr val="222222"/>
+              <a:rPr lang="en-US" sz="1400" dirty="0">
+                <a:solidFill>
+                  <a:srgbClr val="000000"/>
                 </a:solidFill>
                 <a:latin typeface="Times New Roman" pitchFamily="18" charset="0"/>
                 <a:cs typeface="Times New Roman" pitchFamily="18" charset="0"/>
@@ -9224,9 +9674,9 @@
               <a:buNone/>
             </a:pPr>
             <a:r>
-              <a:rPr lang="en-US" sz="1800" b="1" dirty="0">
-                <a:solidFill>
-                  <a:srgbClr val="3494BA"/>
+              <a:rPr lang="en-US" sz="2000" b="1" dirty="0">
+                <a:solidFill>
+                  <a:srgbClr val="000000"/>
                 </a:solidFill>
                 <a:latin typeface="Times New Roman" pitchFamily="18" charset="0"/>
                 <a:cs typeface="Times New Roman" pitchFamily="18" charset="0"/>
@@ -9243,9 +9693,9 @@
               <a:buChar char="•"/>
             </a:pPr>
             <a:r>
-              <a:rPr lang="en-US" sz="1600" dirty="0">
-                <a:solidFill>
-                  <a:srgbClr val="222222"/>
+              <a:rPr lang="en-US" sz="1400" dirty="0">
+                <a:solidFill>
+                  <a:srgbClr val="000000"/>
                 </a:solidFill>
                 <a:latin typeface="Times New Roman" pitchFamily="18" charset="0"/>
                 <a:cs typeface="Times New Roman" pitchFamily="18" charset="0"/>
@@ -9262,9 +9712,9 @@
               <a:buChar char="•"/>
             </a:pPr>
             <a:r>
-              <a:rPr lang="en-US" sz="1600" dirty="0">
-                <a:solidFill>
-                  <a:srgbClr val="222222"/>
+              <a:rPr lang="en-US" sz="1400" dirty="0">
+                <a:solidFill>
+                  <a:srgbClr val="000000"/>
                 </a:solidFill>
                 <a:latin typeface="Times New Roman" pitchFamily="18" charset="0"/>
                 <a:cs typeface="Times New Roman" pitchFamily="18" charset="0"/>
@@ -9281,9 +9731,9 @@
               <a:buChar char="•"/>
             </a:pPr>
             <a:r>
-              <a:rPr lang="en-US" sz="1600" dirty="0">
-                <a:solidFill>
-                  <a:srgbClr val="222222"/>
+              <a:rPr lang="en-US" sz="1400" dirty="0">
+                <a:solidFill>
+                  <a:srgbClr val="000000"/>
                 </a:solidFill>
                 <a:latin typeface="Times New Roman" pitchFamily="18" charset="0"/>
                 <a:cs typeface="Times New Roman" pitchFamily="18" charset="0"/>
@@ -9300,9 +9750,9 @@
               <a:buChar char="•"/>
             </a:pPr>
             <a:r>
-              <a:rPr lang="en-US" sz="1600" dirty="0">
-                <a:solidFill>
-                  <a:srgbClr val="222222"/>
+              <a:rPr lang="en-US" sz="1400" dirty="0">
+                <a:solidFill>
+                  <a:srgbClr val="000000"/>
                 </a:solidFill>
                 <a:latin typeface="Times New Roman" pitchFamily="18" charset="0"/>
                 <a:cs typeface="Times New Roman" pitchFamily="18" charset="0"/>
@@ -9339,7 +9789,7 @@
       </p:grpSpPr>
       <p:sp>
         <p:nvSpPr>
-          <p:cNvPr id="10" name="TitleBar"/>
+          <p:cNvPr id="9" name="WhiteBG"/>
           <p:cNvSpPr>
             <a:spLocks noGrp="1"/>
           </p:cNvSpPr>
@@ -9348,43 +9798,25 @@
         <p:spPr>
           <a:xfrm>
             <a:off x="0" y="0"/>
-            <a:ext cx="12192000" cy="900000"/>
+            <a:ext cx="12192000" cy="6858000"/>
           </a:xfrm>
           <a:prstGeom prst="rect">
             <a:avLst/>
           </a:prstGeom>
           <a:solidFill>
-            <a:srgbClr val="3494BA"/>
+            <a:srgbClr val="FFFFFF"/>
           </a:solidFill>
         </p:spPr>
         <p:txBody>
-          <a:bodyPr wrap="square" anchor="ctr">
+          <a:bodyPr wrap="square" anchor="t">
             <a:normAutofit/>
           </a:bodyPr>
           <a:lstStyle/>
-          <a:p>
-            <a:pPr lvl="0" algn="l">
-              <a:spcAft>
-                <a:spcPts val="0"/>
-              </a:spcAft>
-              <a:buNone/>
-            </a:pPr>
-            <a:r>
-              <a:rPr lang="en-US" sz="2600" b="1" dirty="0">
-                <a:solidFill>
-                  <a:srgbClr val="FFFFFF"/>
-                </a:solidFill>
-                <a:latin typeface="Times New Roman" pitchFamily="18" charset="0"/>
-                <a:cs typeface="Times New Roman" pitchFamily="18" charset="0"/>
-              </a:rPr>
-              <a:t>  Therapy Planning — Overview</a:t>
-            </a:r>
-          </a:p>
-        </p:txBody>
-      </p:sp>
-      <p:sp>
-        <p:nvSpPr>
-          <p:cNvPr id="11" name="Body"/>
+        </p:txBody>
+      </p:sp>
+      <p:sp>
+        <p:nvSpPr>
+          <p:cNvPr id="10" name="Heading"/>
           <p:cNvSpPr>
             <a:spLocks noGrp="1"/>
           </p:cNvSpPr>
@@ -9392,8 +9824,8 @@
         </p:nvSpPr>
         <p:spPr>
           <a:xfrm>
-            <a:off x="610000" y="1050000"/>
-            <a:ext cx="10972000" cy="5558000"/>
+            <a:off x="610000" y="300000"/>
+            <a:ext cx="10972000" cy="900000"/>
           </a:xfrm>
           <a:prstGeom prst="rect">
             <a:avLst/>
@@ -9406,6 +9838,49 @@
           </a:bodyPr>
           <a:lstStyle/>
           <a:p>
+            <a:pPr lvl="0" algn="l">
+              <a:spcAft>
+                <a:spcPts val="0"/>
+              </a:spcAft>
+              <a:buNone/>
+            </a:pPr>
+            <a:r>
+              <a:rPr lang="en-US" sz="2800" b="1" u="sng" dirty="0">
+                <a:solidFill>
+                  <a:srgbClr val="000000"/>
+                </a:solidFill>
+                <a:latin typeface="Times New Roman" pitchFamily="18" charset="0"/>
+                <a:cs typeface="Times New Roman" pitchFamily="18" charset="0"/>
+              </a:rPr>
+              <a:t>Therapy Planning — Overview</a:t>
+            </a:r>
+          </a:p>
+        </p:txBody>
+      </p:sp>
+      <p:sp>
+        <p:nvSpPr>
+          <p:cNvPr id="11" name="Body"/>
+          <p:cNvSpPr>
+            <a:spLocks noGrp="1"/>
+          </p:cNvSpPr>
+          <p:nvPr/>
+        </p:nvSpPr>
+        <p:spPr>
+          <a:xfrm>
+            <a:off x="610000" y="1250000"/>
+            <a:ext cx="10972000" cy="5358000"/>
+          </a:xfrm>
+          <a:prstGeom prst="rect">
+            <a:avLst/>
+          </a:prstGeom>
+          <a:noFill/>
+        </p:spPr>
+        <p:txBody>
+          <a:bodyPr wrap="square" anchor="t">
+            <a:normAutofit/>
+          </a:bodyPr>
+          <a:lstStyle/>
+          <a:p>
             <a:pPr marL="285750" indent="-285750" lvl="0">
               <a:spcAft>
                 <a:spcPts val="600"/>
@@ -9414,9 +9889,9 @@
               <a:buChar char="•"/>
             </a:pPr>
             <a:r>
-              <a:rPr lang="en-US" sz="1600" b="1" dirty="0">
-                <a:solidFill>
-                  <a:srgbClr val="1F3B4D"/>
+              <a:rPr lang="en-US" sz="1400" b="1" dirty="0">
+                <a:solidFill>
+                  <a:srgbClr val="000000"/>
                 </a:solidFill>
                 <a:latin typeface="Times New Roman" pitchFamily="18" charset="0"/>
                 <a:cs typeface="Times New Roman" pitchFamily="18" charset="0"/>
@@ -9424,9 +9899,9 @@
               <a:t>1. Engagement &amp; psychoeducation: </a:t>
             </a:r>
             <a:r>
-              <a:rPr lang="en-US" sz="1600" dirty="0">
-                <a:solidFill>
-                  <a:srgbClr val="222222"/>
+              <a:rPr lang="en-US" sz="1400" dirty="0">
+                <a:solidFill>
+                  <a:srgbClr val="000000"/>
                 </a:solidFill>
                 <a:latin typeface="Times New Roman" pitchFamily="18" charset="0"/>
                 <a:cs typeface="Times New Roman" pitchFamily="18" charset="0"/>
@@ -9443,9 +9918,9 @@
               <a:buChar char="•"/>
             </a:pPr>
             <a:r>
-              <a:rPr lang="en-US" sz="1600" b="1" dirty="0">
-                <a:solidFill>
-                  <a:srgbClr val="1F3B4D"/>
+              <a:rPr lang="en-US" sz="1400" b="1" dirty="0">
+                <a:solidFill>
+                  <a:srgbClr val="000000"/>
                 </a:solidFill>
                 <a:latin typeface="Times New Roman" pitchFamily="18" charset="0"/>
                 <a:cs typeface="Times New Roman" pitchFamily="18" charset="0"/>
@@ -9453,9 +9928,9 @@
               <a:t>2. Arousal reduction &amp; stabilisation: </a:t>
             </a:r>
             <a:r>
-              <a:rPr lang="en-US" sz="1600" dirty="0">
-                <a:solidFill>
-                  <a:srgbClr val="222222"/>
+              <a:rPr lang="en-US" sz="1400" dirty="0">
+                <a:solidFill>
+                  <a:srgbClr val="000000"/>
                 </a:solidFill>
                 <a:latin typeface="Times New Roman" pitchFamily="18" charset="0"/>
                 <a:cs typeface="Times New Roman" pitchFamily="18" charset="0"/>
@@ -9472,9 +9947,9 @@
               <a:buChar char="•"/>
             </a:pPr>
             <a:r>
-              <a:rPr lang="en-US" sz="1600" b="1" dirty="0">
-                <a:solidFill>
-                  <a:srgbClr val="1F3B4D"/>
+              <a:rPr lang="en-US" sz="1400" b="1" dirty="0">
+                <a:solidFill>
+                  <a:srgbClr val="000000"/>
                 </a:solidFill>
                 <a:latin typeface="Times New Roman" pitchFamily="18" charset="0"/>
                 <a:cs typeface="Times New Roman" pitchFamily="18" charset="0"/>
@@ -9482,9 +9957,9 @@
               <a:t>3. Self-monitoring: </a:t>
             </a:r>
             <a:r>
-              <a:rPr lang="en-US" sz="1600" dirty="0">
-                <a:solidFill>
-                  <a:srgbClr val="222222"/>
+              <a:rPr lang="en-US" sz="1400" dirty="0">
+                <a:solidFill>
+                  <a:srgbClr val="000000"/>
                 </a:solidFill>
                 <a:latin typeface="Times New Roman" pitchFamily="18" charset="0"/>
                 <a:cs typeface="Times New Roman" pitchFamily="18" charset="0"/>
@@ -9501,9 +9976,9 @@
               <a:buChar char="•"/>
             </a:pPr>
             <a:r>
-              <a:rPr lang="en-US" sz="1600" b="1" dirty="0">
-                <a:solidFill>
-                  <a:srgbClr val="1F3B4D"/>
+              <a:rPr lang="en-US" sz="1400" b="1" dirty="0">
+                <a:solidFill>
+                  <a:srgbClr val="000000"/>
                 </a:solidFill>
                 <a:latin typeface="Times New Roman" pitchFamily="18" charset="0"/>
                 <a:cs typeface="Times New Roman" pitchFamily="18" charset="0"/>
@@ -9511,9 +9986,9 @@
               <a:t>4. Cognitive work: </a:t>
             </a:r>
             <a:r>
-              <a:rPr lang="en-US" sz="1600" dirty="0">
-                <a:solidFill>
-                  <a:srgbClr val="222222"/>
+              <a:rPr lang="en-US" sz="1400" dirty="0">
+                <a:solidFill>
+                  <a:srgbClr val="000000"/>
                 </a:solidFill>
                 <a:latin typeface="Times New Roman" pitchFamily="18" charset="0"/>
                 <a:cs typeface="Times New Roman" pitchFamily="18" charset="0"/>
@@ -9530,9 +10005,9 @@
               <a:buChar char="•"/>
             </a:pPr>
             <a:r>
-              <a:rPr lang="en-US" sz="1600" b="1" dirty="0">
-                <a:solidFill>
-                  <a:srgbClr val="1F3B4D"/>
+              <a:rPr lang="en-US" sz="1400" b="1" dirty="0">
+                <a:solidFill>
+                  <a:srgbClr val="000000"/>
                 </a:solidFill>
                 <a:latin typeface="Times New Roman" pitchFamily="18" charset="0"/>
                 <a:cs typeface="Times New Roman" pitchFamily="18" charset="0"/>
@@ -9540,9 +10015,9 @@
               <a:t>5. Affect regulation &amp; assertiveness: </a:t>
             </a:r>
             <a:r>
-              <a:rPr lang="en-US" sz="1600" dirty="0">
-                <a:solidFill>
-                  <a:srgbClr val="222222"/>
+              <a:rPr lang="en-US" sz="1400" dirty="0">
+                <a:solidFill>
+                  <a:srgbClr val="000000"/>
                 </a:solidFill>
                 <a:latin typeface="Times New Roman" pitchFamily="18" charset="0"/>
                 <a:cs typeface="Times New Roman" pitchFamily="18" charset="0"/>
@@ -9559,9 +10034,9 @@
               <a:buChar char="•"/>
             </a:pPr>
             <a:r>
-              <a:rPr lang="en-US" sz="1600" b="1" dirty="0">
-                <a:solidFill>
-                  <a:srgbClr val="1F3B4D"/>
+              <a:rPr lang="en-US" sz="1400" b="1" dirty="0">
+                <a:solidFill>
+                  <a:srgbClr val="000000"/>
                 </a:solidFill>
                 <a:latin typeface="Times New Roman" pitchFamily="18" charset="0"/>
                 <a:cs typeface="Times New Roman" pitchFamily="18" charset="0"/>
@@ -9569,9 +10044,9 @@
               <a:t>6. Systemic / family sessions: </a:t>
             </a:r>
             <a:r>
-              <a:rPr lang="en-US" sz="1600" dirty="0">
-                <a:solidFill>
-                  <a:srgbClr val="222222"/>
+              <a:rPr lang="en-US" sz="1400" dirty="0">
+                <a:solidFill>
+                  <a:srgbClr val="000000"/>
                 </a:solidFill>
                 <a:latin typeface="Times New Roman" pitchFamily="18" charset="0"/>
                 <a:cs typeface="Times New Roman" pitchFamily="18" charset="0"/>
@@ -9588,9 +10063,9 @@
               <a:buChar char="•"/>
             </a:pPr>
             <a:r>
-              <a:rPr lang="en-US" sz="1600" b="1" dirty="0">
-                <a:solidFill>
-                  <a:srgbClr val="1F3B4D"/>
+              <a:rPr lang="en-US" sz="1400" b="1" dirty="0">
+                <a:solidFill>
+                  <a:srgbClr val="000000"/>
                 </a:solidFill>
                 <a:latin typeface="Times New Roman" pitchFamily="18" charset="0"/>
                 <a:cs typeface="Times New Roman" pitchFamily="18" charset="0"/>
@@ -9598,9 +10073,9 @@
               <a:t>7. Graded exposure: </a:t>
             </a:r>
             <a:r>
-              <a:rPr lang="en-US" sz="1600" dirty="0">
-                <a:solidFill>
-                  <a:srgbClr val="222222"/>
+              <a:rPr lang="en-US" sz="1400" dirty="0">
+                <a:solidFill>
+                  <a:srgbClr val="000000"/>
                 </a:solidFill>
                 <a:latin typeface="Times New Roman" pitchFamily="18" charset="0"/>
                 <a:cs typeface="Times New Roman" pitchFamily="18" charset="0"/>
@@ -9617,9 +10092,9 @@
               <a:buChar char="•"/>
             </a:pPr>
             <a:r>
-              <a:rPr lang="en-US" sz="1600" b="1" dirty="0">
-                <a:solidFill>
-                  <a:srgbClr val="1F3B4D"/>
+              <a:rPr lang="en-US" sz="1400" b="1" dirty="0">
+                <a:solidFill>
+                  <a:srgbClr val="000000"/>
                 </a:solidFill>
                 <a:latin typeface="Times New Roman" pitchFamily="18" charset="0"/>
                 <a:cs typeface="Times New Roman" pitchFamily="18" charset="0"/>
@@ -9627,9 +10102,9 @@
               <a:t>8. Relapse prevention: </a:t>
             </a:r>
             <a:r>
-              <a:rPr lang="en-US" sz="1600" dirty="0">
-                <a:solidFill>
-                  <a:srgbClr val="222222"/>
+              <a:rPr lang="en-US" sz="1400" dirty="0">
+                <a:solidFill>
+                  <a:srgbClr val="000000"/>
                 </a:solidFill>
                 <a:latin typeface="Times New Roman" pitchFamily="18" charset="0"/>
                 <a:cs typeface="Times New Roman" pitchFamily="18" charset="0"/>
@@ -9666,7 +10141,7 @@
       </p:grpSpPr>
       <p:sp>
         <p:nvSpPr>
-          <p:cNvPr id="10" name="TitleBar"/>
+          <p:cNvPr id="9" name="WhiteBG"/>
           <p:cNvSpPr>
             <a:spLocks noGrp="1"/>
           </p:cNvSpPr>
@@ -9675,43 +10150,25 @@
         <p:spPr>
           <a:xfrm>
             <a:off x="0" y="0"/>
-            <a:ext cx="12192000" cy="900000"/>
+            <a:ext cx="12192000" cy="6858000"/>
           </a:xfrm>
           <a:prstGeom prst="rect">
             <a:avLst/>
           </a:prstGeom>
           <a:solidFill>
-            <a:srgbClr val="3494BA"/>
+            <a:srgbClr val="FFFFFF"/>
           </a:solidFill>
         </p:spPr>
         <p:txBody>
-          <a:bodyPr wrap="square" anchor="ctr">
+          <a:bodyPr wrap="square" anchor="t">
             <a:normAutofit/>
           </a:bodyPr>
           <a:lstStyle/>
-          <a:p>
-            <a:pPr lvl="0" algn="l">
-              <a:spcAft>
-                <a:spcPts val="0"/>
-              </a:spcAft>
-              <a:buNone/>
-            </a:pPr>
-            <a:r>
-              <a:rPr lang="en-US" sz="2600" b="1" dirty="0">
-                <a:solidFill>
-                  <a:srgbClr val="FFFFFF"/>
-                </a:solidFill>
-                <a:latin typeface="Times New Roman" pitchFamily="18" charset="0"/>
-                <a:cs typeface="Times New Roman" pitchFamily="18" charset="0"/>
-              </a:rPr>
-              <a:t>  Sessions Done — Session 1</a:t>
-            </a:r>
-          </a:p>
-        </p:txBody>
-      </p:sp>
-      <p:sp>
-        <p:nvSpPr>
-          <p:cNvPr id="11" name="Body"/>
+        </p:txBody>
+      </p:sp>
+      <p:sp>
+        <p:nvSpPr>
+          <p:cNvPr id="10" name="Heading"/>
           <p:cNvSpPr>
             <a:spLocks noGrp="1"/>
           </p:cNvSpPr>
@@ -9719,8 +10176,8 @@
         </p:nvSpPr>
         <p:spPr>
           <a:xfrm>
-            <a:off x="610000" y="1050000"/>
-            <a:ext cx="10972000" cy="5558000"/>
+            <a:off x="610000" y="300000"/>
+            <a:ext cx="10972000" cy="900000"/>
           </a:xfrm>
           <a:prstGeom prst="rect">
             <a:avLst/>
@@ -9733,6 +10190,49 @@
           </a:bodyPr>
           <a:lstStyle/>
           <a:p>
+            <a:pPr lvl="0" algn="l">
+              <a:spcAft>
+                <a:spcPts val="0"/>
+              </a:spcAft>
+              <a:buNone/>
+            </a:pPr>
+            <a:r>
+              <a:rPr lang="en-US" sz="2800" b="1" u="sng" dirty="0">
+                <a:solidFill>
+                  <a:srgbClr val="000000"/>
+                </a:solidFill>
+                <a:latin typeface="Times New Roman" pitchFamily="18" charset="0"/>
+                <a:cs typeface="Times New Roman" pitchFamily="18" charset="0"/>
+              </a:rPr>
+              <a:t>Sessions Done — Session 1</a:t>
+            </a:r>
+          </a:p>
+        </p:txBody>
+      </p:sp>
+      <p:sp>
+        <p:nvSpPr>
+          <p:cNvPr id="11" name="Body"/>
+          <p:cNvSpPr>
+            <a:spLocks noGrp="1"/>
+          </p:cNvSpPr>
+          <p:nvPr/>
+        </p:nvSpPr>
+        <p:spPr>
+          <a:xfrm>
+            <a:off x="610000" y="1250000"/>
+            <a:ext cx="10972000" cy="5358000"/>
+          </a:xfrm>
+          <a:prstGeom prst="rect">
+            <a:avLst/>
+          </a:prstGeom>
+          <a:noFill/>
+        </p:spPr>
+        <p:txBody>
+          <a:bodyPr wrap="square" anchor="t">
+            <a:normAutofit/>
+          </a:bodyPr>
+          <a:lstStyle/>
+          <a:p>
             <a:pPr lvl="0">
               <a:spcAft>
                 <a:spcPts val="300"/>
@@ -9740,9 +10240,9 @@
               <a:buNone/>
             </a:pPr>
             <a:r>
-              <a:rPr lang="en-US" sz="1800" b="1" dirty="0">
-                <a:solidFill>
-                  <a:srgbClr val="3494BA"/>
+              <a:rPr lang="en-US" sz="2000" b="1" dirty="0">
+                <a:solidFill>
+                  <a:srgbClr val="000000"/>
                 </a:solidFill>
                 <a:latin typeface="Times New Roman" pitchFamily="18" charset="0"/>
                 <a:cs typeface="Times New Roman" pitchFamily="18" charset="0"/>
@@ -9759,9 +10259,9 @@
               <a:buChar char="•"/>
             </a:pPr>
             <a:r>
-              <a:rPr lang="en-US" sz="1600" b="1" dirty="0">
-                <a:solidFill>
-                  <a:srgbClr val="1F3B4D"/>
+              <a:rPr lang="en-US" sz="1400" b="1" dirty="0">
+                <a:solidFill>
+                  <a:srgbClr val="000000"/>
                 </a:solidFill>
                 <a:latin typeface="Times New Roman" pitchFamily="18" charset="0"/>
                 <a:cs typeface="Times New Roman" pitchFamily="18" charset="0"/>
@@ -9769,9 +10269,9 @@
               <a:t>Goals: </a:t>
             </a:r>
             <a:r>
-              <a:rPr lang="en-US" sz="1600" dirty="0">
-                <a:solidFill>
-                  <a:srgbClr val="222222"/>
+              <a:rPr lang="en-US" sz="1400" dirty="0">
+                <a:solidFill>
+                  <a:srgbClr val="000000"/>
                 </a:solidFill>
                 <a:latin typeface="Times New Roman" pitchFamily="18" charset="0"/>
                 <a:cs typeface="Times New Roman" pitchFamily="18" charset="0"/>
@@ -9788,9 +10288,9 @@
               <a:buChar char="•"/>
             </a:pPr>
             <a:r>
-              <a:rPr lang="en-US" sz="1600" b="1" dirty="0">
-                <a:solidFill>
-                  <a:srgbClr val="1F3B4D"/>
+              <a:rPr lang="en-US" sz="1400" b="1" dirty="0">
+                <a:solidFill>
+                  <a:srgbClr val="000000"/>
                 </a:solidFill>
                 <a:latin typeface="Times New Roman" pitchFamily="18" charset="0"/>
                 <a:cs typeface="Times New Roman" pitchFamily="18" charset="0"/>
@@ -9798,9 +10298,9 @@
               <a:t>Intervention: </a:t>
             </a:r>
             <a:r>
-              <a:rPr lang="en-US" sz="1600" dirty="0">
-                <a:solidFill>
-                  <a:srgbClr val="222222"/>
+              <a:rPr lang="en-US" sz="1400" dirty="0">
+                <a:solidFill>
+                  <a:srgbClr val="000000"/>
                 </a:solidFill>
                 <a:latin typeface="Times New Roman" pitchFamily="18" charset="0"/>
                 <a:cs typeface="Times New Roman" pitchFamily="18" charset="0"/>
@@ -9817,9 +10317,9 @@
               <a:buChar char="•"/>
             </a:pPr>
             <a:r>
-              <a:rPr lang="en-US" sz="1600" b="1" dirty="0">
-                <a:solidFill>
-                  <a:srgbClr val="1F3B4D"/>
+              <a:rPr lang="en-US" sz="1400" b="1" dirty="0">
+                <a:solidFill>
+                  <a:srgbClr val="000000"/>
                 </a:solidFill>
                 <a:latin typeface="Times New Roman" pitchFamily="18" charset="0"/>
                 <a:cs typeface="Times New Roman" pitchFamily="18" charset="0"/>
@@ -9827,9 +10327,9 @@
               <a:t>Outcome: </a:t>
             </a:r>
             <a:r>
-              <a:rPr lang="en-US" sz="1600" dirty="0">
-                <a:solidFill>
-                  <a:srgbClr val="222222"/>
+              <a:rPr lang="en-US" sz="1400" dirty="0">
+                <a:solidFill>
+                  <a:srgbClr val="000000"/>
                 </a:solidFill>
                 <a:latin typeface="Times New Roman" pitchFamily="18" charset="0"/>
                 <a:cs typeface="Times New Roman" pitchFamily="18" charset="0"/>
@@ -9846,9 +10346,9 @@
               <a:buChar char="•"/>
             </a:pPr>
             <a:r>
-              <a:rPr lang="en-US" sz="1600" b="1" dirty="0">
-                <a:solidFill>
-                  <a:srgbClr val="1F3B4D"/>
+              <a:rPr lang="en-US" sz="1400" b="1" dirty="0">
+                <a:solidFill>
+                  <a:srgbClr val="000000"/>
                 </a:solidFill>
                 <a:latin typeface="Times New Roman" pitchFamily="18" charset="0"/>
                 <a:cs typeface="Times New Roman" pitchFamily="18" charset="0"/>
@@ -9856,9 +10356,9 @@
               <a:t>Homework: </a:t>
             </a:r>
             <a:r>
-              <a:rPr lang="en-US" sz="1600" dirty="0">
-                <a:solidFill>
-                  <a:srgbClr val="222222"/>
+              <a:rPr lang="en-US" sz="1400" dirty="0">
+                <a:solidFill>
+                  <a:srgbClr val="000000"/>
                 </a:solidFill>
                 <a:latin typeface="Times New Roman" pitchFamily="18" charset="0"/>
                 <a:cs typeface="Times New Roman" pitchFamily="18" charset="0"/>
@@ -9895,7 +10395,7 @@
       </p:grpSpPr>
       <p:sp>
         <p:nvSpPr>
-          <p:cNvPr id="10" name="TitleBar"/>
+          <p:cNvPr id="9" name="WhiteBG"/>
           <p:cNvSpPr>
             <a:spLocks noGrp="1"/>
           </p:cNvSpPr>
@@ -9904,43 +10404,25 @@
         <p:spPr>
           <a:xfrm>
             <a:off x="0" y="0"/>
-            <a:ext cx="12192000" cy="900000"/>
+            <a:ext cx="12192000" cy="6858000"/>
           </a:xfrm>
           <a:prstGeom prst="rect">
             <a:avLst/>
           </a:prstGeom>
           <a:solidFill>
-            <a:srgbClr val="3494BA"/>
+            <a:srgbClr val="FFFFFF"/>
           </a:solidFill>
         </p:spPr>
         <p:txBody>
-          <a:bodyPr wrap="square" anchor="ctr">
+          <a:bodyPr wrap="square" anchor="t">
             <a:normAutofit/>
           </a:bodyPr>
           <a:lstStyle/>
-          <a:p>
-            <a:pPr lvl="0" algn="l">
-              <a:spcAft>
-                <a:spcPts val="0"/>
-              </a:spcAft>
-              <a:buNone/>
-            </a:pPr>
-            <a:r>
-              <a:rPr lang="en-US" sz="2600" b="1" dirty="0">
-                <a:solidFill>
-                  <a:srgbClr val="FFFFFF"/>
-                </a:solidFill>
-                <a:latin typeface="Times New Roman" pitchFamily="18" charset="0"/>
-                <a:cs typeface="Times New Roman" pitchFamily="18" charset="0"/>
-              </a:rPr>
-              <a:t>  Sessions Done — Session 2</a:t>
-            </a:r>
-          </a:p>
-        </p:txBody>
-      </p:sp>
-      <p:sp>
-        <p:nvSpPr>
-          <p:cNvPr id="11" name="Body"/>
+        </p:txBody>
+      </p:sp>
+      <p:sp>
+        <p:nvSpPr>
+          <p:cNvPr id="10" name="Heading"/>
           <p:cNvSpPr>
             <a:spLocks noGrp="1"/>
           </p:cNvSpPr>
@@ -9948,8 +10430,8 @@
         </p:nvSpPr>
         <p:spPr>
           <a:xfrm>
-            <a:off x="610000" y="1050000"/>
-            <a:ext cx="10972000" cy="5558000"/>
+            <a:off x="610000" y="300000"/>
+            <a:ext cx="10972000" cy="900000"/>
           </a:xfrm>
           <a:prstGeom prst="rect">
             <a:avLst/>
@@ -9962,6 +10444,49 @@
           </a:bodyPr>
           <a:lstStyle/>
           <a:p>
+            <a:pPr lvl="0" algn="l">
+              <a:spcAft>
+                <a:spcPts val="0"/>
+              </a:spcAft>
+              <a:buNone/>
+            </a:pPr>
+            <a:r>
+              <a:rPr lang="en-US" sz="2800" b="1" u="sng" dirty="0">
+                <a:solidFill>
+                  <a:srgbClr val="000000"/>
+                </a:solidFill>
+                <a:latin typeface="Times New Roman" pitchFamily="18" charset="0"/>
+                <a:cs typeface="Times New Roman" pitchFamily="18" charset="0"/>
+              </a:rPr>
+              <a:t>Sessions Done — Session 2</a:t>
+            </a:r>
+          </a:p>
+        </p:txBody>
+      </p:sp>
+      <p:sp>
+        <p:nvSpPr>
+          <p:cNvPr id="11" name="Body"/>
+          <p:cNvSpPr>
+            <a:spLocks noGrp="1"/>
+          </p:cNvSpPr>
+          <p:nvPr/>
+        </p:nvSpPr>
+        <p:spPr>
+          <a:xfrm>
+            <a:off x="610000" y="1250000"/>
+            <a:ext cx="10972000" cy="5358000"/>
+          </a:xfrm>
+          <a:prstGeom prst="rect">
+            <a:avLst/>
+          </a:prstGeom>
+          <a:noFill/>
+        </p:spPr>
+        <p:txBody>
+          <a:bodyPr wrap="square" anchor="t">
+            <a:normAutofit/>
+          </a:bodyPr>
+          <a:lstStyle/>
+          <a:p>
             <a:pPr lvl="0">
               <a:spcAft>
                 <a:spcPts val="300"/>
@@ -9969,9 +10494,9 @@
               <a:buNone/>
             </a:pPr>
             <a:r>
-              <a:rPr lang="en-US" sz="1800" b="1" dirty="0">
-                <a:solidFill>
-                  <a:srgbClr val="3494BA"/>
+              <a:rPr lang="en-US" sz="2000" b="1" dirty="0">
+                <a:solidFill>
+                  <a:srgbClr val="000000"/>
                 </a:solidFill>
                 <a:latin typeface="Times New Roman" pitchFamily="18" charset="0"/>
                 <a:cs typeface="Times New Roman" pitchFamily="18" charset="0"/>
@@ -9988,9 +10513,9 @@
               <a:buChar char="•"/>
             </a:pPr>
             <a:r>
-              <a:rPr lang="en-US" sz="1600" b="1" dirty="0">
-                <a:solidFill>
-                  <a:srgbClr val="1F3B4D"/>
+              <a:rPr lang="en-US" sz="1400" b="1" dirty="0">
+                <a:solidFill>
+                  <a:srgbClr val="000000"/>
                 </a:solidFill>
                 <a:latin typeface="Times New Roman" pitchFamily="18" charset="0"/>
                 <a:cs typeface="Times New Roman" pitchFamily="18" charset="0"/>
@@ -9998,9 +10523,9 @@
               <a:t>Goals: </a:t>
             </a:r>
             <a:r>
-              <a:rPr lang="en-US" sz="1600" dirty="0">
-                <a:solidFill>
-                  <a:srgbClr val="222222"/>
+              <a:rPr lang="en-US" sz="1400" dirty="0">
+                <a:solidFill>
+                  <a:srgbClr val="000000"/>
                 </a:solidFill>
                 <a:latin typeface="Times New Roman" pitchFamily="18" charset="0"/>
                 <a:cs typeface="Times New Roman" pitchFamily="18" charset="0"/>
@@ -10017,9 +10542,9 @@
               <a:buChar char="•"/>
             </a:pPr>
             <a:r>
-              <a:rPr lang="en-US" sz="1600" b="1" dirty="0">
-                <a:solidFill>
-                  <a:srgbClr val="1F3B4D"/>
+              <a:rPr lang="en-US" sz="1400" b="1" dirty="0">
+                <a:solidFill>
+                  <a:srgbClr val="000000"/>
                 </a:solidFill>
                 <a:latin typeface="Times New Roman" pitchFamily="18" charset="0"/>
                 <a:cs typeface="Times New Roman" pitchFamily="18" charset="0"/>
@@ -10027,9 +10552,9 @@
               <a:t>Intervention: </a:t>
             </a:r>
             <a:r>
-              <a:rPr lang="en-US" sz="1600" dirty="0">
-                <a:solidFill>
-                  <a:srgbClr val="222222"/>
+              <a:rPr lang="en-US" sz="1400" dirty="0">
+                <a:solidFill>
+                  <a:srgbClr val="000000"/>
                 </a:solidFill>
                 <a:latin typeface="Times New Roman" pitchFamily="18" charset="0"/>
                 <a:cs typeface="Times New Roman" pitchFamily="18" charset="0"/>
@@ -10046,9 +10571,9 @@
               <a:buChar char="•"/>
             </a:pPr>
             <a:r>
-              <a:rPr lang="en-US" sz="1600" b="1" dirty="0">
-                <a:solidFill>
-                  <a:srgbClr val="1F3B4D"/>
+              <a:rPr lang="en-US" sz="1400" b="1" dirty="0">
+                <a:solidFill>
+                  <a:srgbClr val="000000"/>
                 </a:solidFill>
                 <a:latin typeface="Times New Roman" pitchFamily="18" charset="0"/>
                 <a:cs typeface="Times New Roman" pitchFamily="18" charset="0"/>
@@ -10056,9 +10581,9 @@
               <a:t>Outcome: </a:t>
             </a:r>
             <a:r>
-              <a:rPr lang="en-US" sz="1600" dirty="0">
-                <a:solidFill>
-                  <a:srgbClr val="222222"/>
+              <a:rPr lang="en-US" sz="1400" dirty="0">
+                <a:solidFill>
+                  <a:srgbClr val="000000"/>
                 </a:solidFill>
                 <a:latin typeface="Times New Roman" pitchFamily="18" charset="0"/>
                 <a:cs typeface="Times New Roman" pitchFamily="18" charset="0"/>
@@ -10075,9 +10600,9 @@
               <a:buChar char="•"/>
             </a:pPr>
             <a:r>
-              <a:rPr lang="en-US" sz="1600" b="1" dirty="0">
-                <a:solidFill>
-                  <a:srgbClr val="1F3B4D"/>
+              <a:rPr lang="en-US" sz="1400" b="1" dirty="0">
+                <a:solidFill>
+                  <a:srgbClr val="000000"/>
                 </a:solidFill>
                 <a:latin typeface="Times New Roman" pitchFamily="18" charset="0"/>
                 <a:cs typeface="Times New Roman" pitchFamily="18" charset="0"/>
@@ -10085,9 +10610,9 @@
               <a:t>Homework: </a:t>
             </a:r>
             <a:r>
-              <a:rPr lang="en-US" sz="1600" dirty="0">
-                <a:solidFill>
-                  <a:srgbClr val="222222"/>
+              <a:rPr lang="en-US" sz="1400" dirty="0">
+                <a:solidFill>
+                  <a:srgbClr val="000000"/>
                 </a:solidFill>
                 <a:latin typeface="Times New Roman" pitchFamily="18" charset="0"/>
                 <a:cs typeface="Times New Roman" pitchFamily="18" charset="0"/>
@@ -10124,7 +10649,7 @@
       </p:grpSpPr>
       <p:sp>
         <p:nvSpPr>
-          <p:cNvPr id="10" name="TitleBar"/>
+          <p:cNvPr id="9" name="WhiteBG"/>
           <p:cNvSpPr>
             <a:spLocks noGrp="1"/>
           </p:cNvSpPr>
@@ -10133,43 +10658,25 @@
         <p:spPr>
           <a:xfrm>
             <a:off x="0" y="0"/>
-            <a:ext cx="12192000" cy="900000"/>
+            <a:ext cx="12192000" cy="6858000"/>
           </a:xfrm>
           <a:prstGeom prst="rect">
             <a:avLst/>
           </a:prstGeom>
           <a:solidFill>
-            <a:srgbClr val="3494BA"/>
+            <a:srgbClr val="FFFFFF"/>
           </a:solidFill>
         </p:spPr>
         <p:txBody>
-          <a:bodyPr wrap="square" anchor="ctr">
+          <a:bodyPr wrap="square" anchor="t">
             <a:normAutofit/>
           </a:bodyPr>
           <a:lstStyle/>
-          <a:p>
-            <a:pPr lvl="0" algn="l">
-              <a:spcAft>
-                <a:spcPts val="0"/>
-              </a:spcAft>
-              <a:buNone/>
-            </a:pPr>
-            <a:r>
-              <a:rPr lang="en-US" sz="2600" b="1" dirty="0">
-                <a:solidFill>
-                  <a:srgbClr val="FFFFFF"/>
-                </a:solidFill>
-                <a:latin typeface="Times New Roman" pitchFamily="18" charset="0"/>
-                <a:cs typeface="Times New Roman" pitchFamily="18" charset="0"/>
-              </a:rPr>
-              <a:t>  Informant Details &amp; Reason for Consultation</a:t>
-            </a:r>
-          </a:p>
-        </p:txBody>
-      </p:sp>
-      <p:sp>
-        <p:nvSpPr>
-          <p:cNvPr id="11" name="Body"/>
+        </p:txBody>
+      </p:sp>
+      <p:sp>
+        <p:nvSpPr>
+          <p:cNvPr id="10" name="Heading"/>
           <p:cNvSpPr>
             <a:spLocks noGrp="1"/>
           </p:cNvSpPr>
@@ -10177,8 +10684,8 @@
         </p:nvSpPr>
         <p:spPr>
           <a:xfrm>
-            <a:off x="610000" y="1050000"/>
-            <a:ext cx="10972000" cy="5558000"/>
+            <a:off x="610000" y="300000"/>
+            <a:ext cx="10972000" cy="900000"/>
           </a:xfrm>
           <a:prstGeom prst="rect">
             <a:avLst/>
@@ -10191,6 +10698,49 @@
           </a:bodyPr>
           <a:lstStyle/>
           <a:p>
+            <a:pPr lvl="0" algn="l">
+              <a:spcAft>
+                <a:spcPts val="0"/>
+              </a:spcAft>
+              <a:buNone/>
+            </a:pPr>
+            <a:r>
+              <a:rPr lang="en-US" sz="2800" b="1" u="sng" dirty="0">
+                <a:solidFill>
+                  <a:srgbClr val="000000"/>
+                </a:solidFill>
+                <a:latin typeface="Times New Roman" pitchFamily="18" charset="0"/>
+                <a:cs typeface="Times New Roman" pitchFamily="18" charset="0"/>
+              </a:rPr>
+              <a:t>Informant Details &amp; Reason for Consultation</a:t>
+            </a:r>
+          </a:p>
+        </p:txBody>
+      </p:sp>
+      <p:sp>
+        <p:nvSpPr>
+          <p:cNvPr id="11" name="Body"/>
+          <p:cNvSpPr>
+            <a:spLocks noGrp="1"/>
+          </p:cNvSpPr>
+          <p:nvPr/>
+        </p:nvSpPr>
+        <p:spPr>
+          <a:xfrm>
+            <a:off x="610000" y="1250000"/>
+            <a:ext cx="10972000" cy="5358000"/>
+          </a:xfrm>
+          <a:prstGeom prst="rect">
+            <a:avLst/>
+          </a:prstGeom>
+          <a:noFill/>
+        </p:spPr>
+        <p:txBody>
+          <a:bodyPr wrap="square" anchor="t">
+            <a:normAutofit/>
+          </a:bodyPr>
+          <a:lstStyle/>
+          <a:p>
             <a:pPr lvl="0">
               <a:spcAft>
                 <a:spcPts val="300"/>
@@ -10198,9 +10748,9 @@
               <a:buNone/>
             </a:pPr>
             <a:r>
-              <a:rPr lang="en-US" sz="1800" b="1" dirty="0">
-                <a:solidFill>
-                  <a:srgbClr val="3494BA"/>
+              <a:rPr lang="en-US" sz="2000" b="1" dirty="0">
+                <a:solidFill>
+                  <a:srgbClr val="000000"/>
                 </a:solidFill>
                 <a:latin typeface="Times New Roman" pitchFamily="18" charset="0"/>
                 <a:cs typeface="Times New Roman" pitchFamily="18" charset="0"/>
@@ -10216,9 +10766,9 @@
               <a:buNone/>
             </a:pPr>
             <a:r>
-              <a:rPr lang="en-US" sz="1500" b="1" dirty="0">
-                <a:solidFill>
-                  <a:srgbClr val="1F3B4D"/>
+              <a:rPr lang="en-US" sz="1400" b="1" dirty="0">
+                <a:solidFill>
+                  <a:srgbClr val="000000"/>
                 </a:solidFill>
                 <a:latin typeface="Times New Roman" pitchFamily="18" charset="0"/>
                 <a:cs typeface="Times New Roman" pitchFamily="18" charset="0"/>
@@ -10226,9 +10776,9 @@
               <a:t>Name: </a:t>
             </a:r>
             <a:r>
-              <a:rPr lang="en-US" sz="1500" dirty="0">
-                <a:solidFill>
-                  <a:srgbClr val="222222"/>
+              <a:rPr lang="en-US" sz="1400" dirty="0">
+                <a:solidFill>
+                  <a:srgbClr val="000000"/>
                 </a:solidFill>
                 <a:latin typeface="Times New Roman" pitchFamily="18" charset="0"/>
                 <a:cs typeface="Times New Roman" pitchFamily="18" charset="0"/>
@@ -10244,9 +10794,9 @@
               <a:buNone/>
             </a:pPr>
             <a:r>
-              <a:rPr lang="en-US" sz="1500" b="1" dirty="0">
-                <a:solidFill>
-                  <a:srgbClr val="1F3B4D"/>
+              <a:rPr lang="en-US" sz="1400" b="1" dirty="0">
+                <a:solidFill>
+                  <a:srgbClr val="000000"/>
                 </a:solidFill>
                 <a:latin typeface="Times New Roman" pitchFamily="18" charset="0"/>
                 <a:cs typeface="Times New Roman" pitchFamily="18" charset="0"/>
@@ -10254,9 +10804,9 @@
               <a:t>Relationship: </a:t>
             </a:r>
             <a:r>
-              <a:rPr lang="en-US" sz="1500" dirty="0">
-                <a:solidFill>
-                  <a:srgbClr val="222222"/>
+              <a:rPr lang="en-US" sz="1400" dirty="0">
+                <a:solidFill>
+                  <a:srgbClr val="000000"/>
                 </a:solidFill>
                 <a:latin typeface="Times New Roman" pitchFamily="18" charset="0"/>
                 <a:cs typeface="Times New Roman" pitchFamily="18" charset="0"/>
@@ -10272,9 +10822,9 @@
               <a:buNone/>
             </a:pPr>
             <a:r>
-              <a:rPr lang="en-US" sz="1500" b="1" dirty="0">
-                <a:solidFill>
-                  <a:srgbClr val="1F3B4D"/>
+              <a:rPr lang="en-US" sz="1400" b="1" dirty="0">
+                <a:solidFill>
+                  <a:srgbClr val="000000"/>
                 </a:solidFill>
                 <a:latin typeface="Times New Roman" pitchFamily="18" charset="0"/>
                 <a:cs typeface="Times New Roman" pitchFamily="18" charset="0"/>
@@ -10282,9 +10832,9 @@
               <a:t>Duration of acquaintance: </a:t>
             </a:r>
             <a:r>
-              <a:rPr lang="en-US" sz="1500" dirty="0">
-                <a:solidFill>
-                  <a:srgbClr val="222222"/>
+              <a:rPr lang="en-US" sz="1400" dirty="0">
+                <a:solidFill>
+                  <a:srgbClr val="000000"/>
                 </a:solidFill>
                 <a:latin typeface="Times New Roman" pitchFamily="18" charset="0"/>
                 <a:cs typeface="Times New Roman" pitchFamily="18" charset="0"/>
@@ -10300,9 +10850,9 @@
               <a:buNone/>
             </a:pPr>
             <a:r>
-              <a:rPr lang="en-US" sz="1500" dirty="0">
-                <a:solidFill>
-                  <a:srgbClr val="222222"/>
+              <a:rPr lang="en-US" sz="1400" dirty="0">
+                <a:solidFill>
+                  <a:srgbClr val="000000"/>
                 </a:solidFill>
                 <a:latin typeface="Times New Roman" pitchFamily="18" charset="0"/>
                 <a:cs typeface="Times New Roman" pitchFamily="18" charset="0"/>
@@ -10318,9 +10868,9 @@
               <a:buNone/>
             </a:pPr>
             <a:r>
-              <a:rPr lang="en-US" sz="1800" b="1" dirty="0">
-                <a:solidFill>
-                  <a:srgbClr val="3494BA"/>
+              <a:rPr lang="en-US" sz="2000" b="1" dirty="0">
+                <a:solidFill>
+                  <a:srgbClr val="000000"/>
                 </a:solidFill>
                 <a:latin typeface="Times New Roman" pitchFamily="18" charset="0"/>
                 <a:cs typeface="Times New Roman" pitchFamily="18" charset="0"/>
@@ -10336,9 +10886,9 @@
               <a:buNone/>
             </a:pPr>
             <a:r>
-              <a:rPr lang="en-US" sz="1500" dirty="0">
-                <a:solidFill>
-                  <a:srgbClr val="222222"/>
+              <a:rPr lang="en-US" sz="1400" dirty="0">
+                <a:solidFill>
+                  <a:srgbClr val="000000"/>
                 </a:solidFill>
                 <a:latin typeface="Times New Roman" pitchFamily="18" charset="0"/>
                 <a:cs typeface="Times New Roman" pitchFamily="18" charset="0"/>
@@ -10375,7 +10925,7 @@
       </p:grpSpPr>
       <p:sp>
         <p:nvSpPr>
-          <p:cNvPr id="10" name="TitleBar"/>
+          <p:cNvPr id="9" name="WhiteBG"/>
           <p:cNvSpPr>
             <a:spLocks noGrp="1"/>
           </p:cNvSpPr>
@@ -10384,43 +10934,25 @@
         <p:spPr>
           <a:xfrm>
             <a:off x="0" y="0"/>
-            <a:ext cx="12192000" cy="900000"/>
+            <a:ext cx="12192000" cy="6858000"/>
           </a:xfrm>
           <a:prstGeom prst="rect">
             <a:avLst/>
           </a:prstGeom>
           <a:solidFill>
-            <a:srgbClr val="3494BA"/>
+            <a:srgbClr val="FFFFFF"/>
           </a:solidFill>
         </p:spPr>
         <p:txBody>
-          <a:bodyPr wrap="square" anchor="ctr">
+          <a:bodyPr wrap="square" anchor="t">
             <a:normAutofit/>
           </a:bodyPr>
           <a:lstStyle/>
-          <a:p>
-            <a:pPr lvl="0" algn="l">
-              <a:spcAft>
-                <a:spcPts val="0"/>
-              </a:spcAft>
-              <a:buNone/>
-            </a:pPr>
-            <a:r>
-              <a:rPr lang="en-US" sz="2600" b="1" dirty="0">
-                <a:solidFill>
-                  <a:srgbClr val="FFFFFF"/>
-                </a:solidFill>
-                <a:latin typeface="Times New Roman" pitchFamily="18" charset="0"/>
-                <a:cs typeface="Times New Roman" pitchFamily="18" charset="0"/>
-              </a:rPr>
-              <a:t>  Sessions Done — Session 3</a:t>
-            </a:r>
-          </a:p>
-        </p:txBody>
-      </p:sp>
-      <p:sp>
-        <p:nvSpPr>
-          <p:cNvPr id="11" name="Body"/>
+        </p:txBody>
+      </p:sp>
+      <p:sp>
+        <p:nvSpPr>
+          <p:cNvPr id="10" name="Heading"/>
           <p:cNvSpPr>
             <a:spLocks noGrp="1"/>
           </p:cNvSpPr>
@@ -10428,8 +10960,8 @@
         </p:nvSpPr>
         <p:spPr>
           <a:xfrm>
-            <a:off x="610000" y="1050000"/>
-            <a:ext cx="10972000" cy="5558000"/>
+            <a:off x="610000" y="300000"/>
+            <a:ext cx="10972000" cy="900000"/>
           </a:xfrm>
           <a:prstGeom prst="rect">
             <a:avLst/>
@@ -10442,6 +10974,49 @@
           </a:bodyPr>
           <a:lstStyle/>
           <a:p>
+            <a:pPr lvl="0" algn="l">
+              <a:spcAft>
+                <a:spcPts val="0"/>
+              </a:spcAft>
+              <a:buNone/>
+            </a:pPr>
+            <a:r>
+              <a:rPr lang="en-US" sz="2800" b="1" u="sng" dirty="0">
+                <a:solidFill>
+                  <a:srgbClr val="000000"/>
+                </a:solidFill>
+                <a:latin typeface="Times New Roman" pitchFamily="18" charset="0"/>
+                <a:cs typeface="Times New Roman" pitchFamily="18" charset="0"/>
+              </a:rPr>
+              <a:t>Sessions Done — Session 3</a:t>
+            </a:r>
+          </a:p>
+        </p:txBody>
+      </p:sp>
+      <p:sp>
+        <p:nvSpPr>
+          <p:cNvPr id="11" name="Body"/>
+          <p:cNvSpPr>
+            <a:spLocks noGrp="1"/>
+          </p:cNvSpPr>
+          <p:nvPr/>
+        </p:nvSpPr>
+        <p:spPr>
+          <a:xfrm>
+            <a:off x="610000" y="1250000"/>
+            <a:ext cx="10972000" cy="5358000"/>
+          </a:xfrm>
+          <a:prstGeom prst="rect">
+            <a:avLst/>
+          </a:prstGeom>
+          <a:noFill/>
+        </p:spPr>
+        <p:txBody>
+          <a:bodyPr wrap="square" anchor="t">
+            <a:normAutofit/>
+          </a:bodyPr>
+          <a:lstStyle/>
+          <a:p>
             <a:pPr lvl="0">
               <a:spcAft>
                 <a:spcPts val="300"/>
@@ -10449,9 +11024,9 @@
               <a:buNone/>
             </a:pPr>
             <a:r>
-              <a:rPr lang="en-US" sz="1800" b="1" dirty="0">
-                <a:solidFill>
-                  <a:srgbClr val="3494BA"/>
+              <a:rPr lang="en-US" sz="2000" b="1" dirty="0">
+                <a:solidFill>
+                  <a:srgbClr val="000000"/>
                 </a:solidFill>
                 <a:latin typeface="Times New Roman" pitchFamily="18" charset="0"/>
                 <a:cs typeface="Times New Roman" pitchFamily="18" charset="0"/>
@@ -10468,9 +11043,9 @@
               <a:buChar char="•"/>
             </a:pPr>
             <a:r>
-              <a:rPr lang="en-US" sz="1600" b="1" dirty="0">
-                <a:solidFill>
-                  <a:srgbClr val="1F3B4D"/>
+              <a:rPr lang="en-US" sz="1400" b="1" dirty="0">
+                <a:solidFill>
+                  <a:srgbClr val="000000"/>
                 </a:solidFill>
                 <a:latin typeface="Times New Roman" pitchFamily="18" charset="0"/>
                 <a:cs typeface="Times New Roman" pitchFamily="18" charset="0"/>
@@ -10478,9 +11053,9 @@
               <a:t>Goals: </a:t>
             </a:r>
             <a:r>
-              <a:rPr lang="en-US" sz="1600" dirty="0">
-                <a:solidFill>
-                  <a:srgbClr val="222222"/>
+              <a:rPr lang="en-US" sz="1400" dirty="0">
+                <a:solidFill>
+                  <a:srgbClr val="000000"/>
                 </a:solidFill>
                 <a:latin typeface="Times New Roman" pitchFamily="18" charset="0"/>
                 <a:cs typeface="Times New Roman" pitchFamily="18" charset="0"/>
@@ -10497,9 +11072,9 @@
               <a:buChar char="•"/>
             </a:pPr>
             <a:r>
-              <a:rPr lang="en-US" sz="1600" b="1" dirty="0">
-                <a:solidFill>
-                  <a:srgbClr val="1F3B4D"/>
+              <a:rPr lang="en-US" sz="1400" b="1" dirty="0">
+                <a:solidFill>
+                  <a:srgbClr val="000000"/>
                 </a:solidFill>
                 <a:latin typeface="Times New Roman" pitchFamily="18" charset="0"/>
                 <a:cs typeface="Times New Roman" pitchFamily="18" charset="0"/>
@@ -10507,9 +11082,9 @@
               <a:t>Intervention: </a:t>
             </a:r>
             <a:r>
-              <a:rPr lang="en-US" sz="1600" dirty="0">
-                <a:solidFill>
-                  <a:srgbClr val="222222"/>
+              <a:rPr lang="en-US" sz="1400" dirty="0">
+                <a:solidFill>
+                  <a:srgbClr val="000000"/>
                 </a:solidFill>
                 <a:latin typeface="Times New Roman" pitchFamily="18" charset="0"/>
                 <a:cs typeface="Times New Roman" pitchFamily="18" charset="0"/>
@@ -10526,9 +11101,9 @@
               <a:buChar char="•"/>
             </a:pPr>
             <a:r>
-              <a:rPr lang="en-US" sz="1600" b="1" dirty="0">
-                <a:solidFill>
-                  <a:srgbClr val="1F3B4D"/>
+              <a:rPr lang="en-US" sz="1400" b="1" dirty="0">
+                <a:solidFill>
+                  <a:srgbClr val="000000"/>
                 </a:solidFill>
                 <a:latin typeface="Times New Roman" pitchFamily="18" charset="0"/>
                 <a:cs typeface="Times New Roman" pitchFamily="18" charset="0"/>
@@ -10536,9 +11111,9 @@
               <a:t>Outcome: </a:t>
             </a:r>
             <a:r>
-              <a:rPr lang="en-US" sz="1600" dirty="0">
-                <a:solidFill>
-                  <a:srgbClr val="222222"/>
+              <a:rPr lang="en-US" sz="1400" dirty="0">
+                <a:solidFill>
+                  <a:srgbClr val="000000"/>
                 </a:solidFill>
                 <a:latin typeface="Times New Roman" pitchFamily="18" charset="0"/>
                 <a:cs typeface="Times New Roman" pitchFamily="18" charset="0"/>
@@ -10555,9 +11130,9 @@
               <a:buChar char="•"/>
             </a:pPr>
             <a:r>
-              <a:rPr lang="en-US" sz="1600" b="1" dirty="0">
-                <a:solidFill>
-                  <a:srgbClr val="1F3B4D"/>
+              <a:rPr lang="en-US" sz="1400" b="1" dirty="0">
+                <a:solidFill>
+                  <a:srgbClr val="000000"/>
                 </a:solidFill>
                 <a:latin typeface="Times New Roman" pitchFamily="18" charset="0"/>
                 <a:cs typeface="Times New Roman" pitchFamily="18" charset="0"/>
@@ -10565,9 +11140,9 @@
               <a:t>Homework: </a:t>
             </a:r>
             <a:r>
-              <a:rPr lang="en-US" sz="1600" dirty="0">
-                <a:solidFill>
-                  <a:srgbClr val="222222"/>
+              <a:rPr lang="en-US" sz="1400" dirty="0">
+                <a:solidFill>
+                  <a:srgbClr val="000000"/>
                 </a:solidFill>
                 <a:latin typeface="Times New Roman" pitchFamily="18" charset="0"/>
                 <a:cs typeface="Times New Roman" pitchFamily="18" charset="0"/>
@@ -10604,7 +11179,7 @@
       </p:grpSpPr>
       <p:sp>
         <p:nvSpPr>
-          <p:cNvPr id="10" name="TitleBar"/>
+          <p:cNvPr id="9" name="WhiteBG"/>
           <p:cNvSpPr>
             <a:spLocks noGrp="1"/>
           </p:cNvSpPr>
@@ -10613,43 +11188,25 @@
         <p:spPr>
           <a:xfrm>
             <a:off x="0" y="0"/>
-            <a:ext cx="12192000" cy="900000"/>
+            <a:ext cx="12192000" cy="6858000"/>
           </a:xfrm>
           <a:prstGeom prst="rect">
             <a:avLst/>
           </a:prstGeom>
           <a:solidFill>
-            <a:srgbClr val="3494BA"/>
+            <a:srgbClr val="FFFFFF"/>
           </a:solidFill>
         </p:spPr>
         <p:txBody>
-          <a:bodyPr wrap="square" anchor="ctr">
+          <a:bodyPr wrap="square" anchor="t">
             <a:normAutofit/>
           </a:bodyPr>
           <a:lstStyle/>
-          <a:p>
-            <a:pPr lvl="0" algn="l">
-              <a:spcAft>
-                <a:spcPts val="0"/>
-              </a:spcAft>
-              <a:buNone/>
-            </a:pPr>
-            <a:r>
-              <a:rPr lang="en-US" sz="2600" b="1" dirty="0">
-                <a:solidFill>
-                  <a:srgbClr val="FFFFFF"/>
-                </a:solidFill>
-                <a:latin typeface="Times New Roman" pitchFamily="18" charset="0"/>
-                <a:cs typeface="Times New Roman" pitchFamily="18" charset="0"/>
-              </a:rPr>
-              <a:t>  Further (Planned) Sessions</a:t>
-            </a:r>
-          </a:p>
-        </p:txBody>
-      </p:sp>
-      <p:sp>
-        <p:nvSpPr>
-          <p:cNvPr id="11" name="Body"/>
+        </p:txBody>
+      </p:sp>
+      <p:sp>
+        <p:nvSpPr>
+          <p:cNvPr id="10" name="Heading"/>
           <p:cNvSpPr>
             <a:spLocks noGrp="1"/>
           </p:cNvSpPr>
@@ -10657,8 +11214,8 @@
         </p:nvSpPr>
         <p:spPr>
           <a:xfrm>
-            <a:off x="610000" y="1050000"/>
-            <a:ext cx="10972000" cy="5558000"/>
+            <a:off x="610000" y="300000"/>
+            <a:ext cx="10972000" cy="900000"/>
           </a:xfrm>
           <a:prstGeom prst="rect">
             <a:avLst/>
@@ -10671,6 +11228,49 @@
           </a:bodyPr>
           <a:lstStyle/>
           <a:p>
+            <a:pPr lvl="0" algn="l">
+              <a:spcAft>
+                <a:spcPts val="0"/>
+              </a:spcAft>
+              <a:buNone/>
+            </a:pPr>
+            <a:r>
+              <a:rPr lang="en-US" sz="2800" b="1" u="sng" dirty="0">
+                <a:solidFill>
+                  <a:srgbClr val="000000"/>
+                </a:solidFill>
+                <a:latin typeface="Times New Roman" pitchFamily="18" charset="0"/>
+                <a:cs typeface="Times New Roman" pitchFamily="18" charset="0"/>
+              </a:rPr>
+              <a:t>Further (Planned) Sessions</a:t>
+            </a:r>
+          </a:p>
+        </p:txBody>
+      </p:sp>
+      <p:sp>
+        <p:nvSpPr>
+          <p:cNvPr id="11" name="Body"/>
+          <p:cNvSpPr>
+            <a:spLocks noGrp="1"/>
+          </p:cNvSpPr>
+          <p:nvPr/>
+        </p:nvSpPr>
+        <p:spPr>
+          <a:xfrm>
+            <a:off x="610000" y="1250000"/>
+            <a:ext cx="10972000" cy="5358000"/>
+          </a:xfrm>
+          <a:prstGeom prst="rect">
+            <a:avLst/>
+          </a:prstGeom>
+          <a:noFill/>
+        </p:spPr>
+        <p:txBody>
+          <a:bodyPr wrap="square" anchor="t">
+            <a:normAutofit/>
+          </a:bodyPr>
+          <a:lstStyle/>
+          <a:p>
             <a:pPr lvl="0">
               <a:spcAft>
                 <a:spcPts val="600"/>
@@ -10678,9 +11278,9 @@
               <a:buNone/>
             </a:pPr>
             <a:r>
-              <a:rPr lang="en-US" sz="1300" dirty="0">
-                <a:solidFill>
-                  <a:srgbClr val="222222"/>
+              <a:rPr lang="en-US" sz="1400" dirty="0">
+                <a:solidFill>
+                  <a:srgbClr val="000000"/>
                 </a:solidFill>
                 <a:latin typeface="Times New Roman" pitchFamily="18" charset="0"/>
                 <a:cs typeface="Times New Roman" pitchFamily="18" charset="0"/>
@@ -10697,9 +11297,9 @@
               <a:buChar char="•"/>
             </a:pPr>
             <a:r>
-              <a:rPr lang="en-US" sz="1600" b="1" dirty="0">
-                <a:solidFill>
-                  <a:srgbClr val="1F3B4D"/>
+              <a:rPr lang="en-US" sz="1400" b="1" dirty="0">
+                <a:solidFill>
+                  <a:srgbClr val="000000"/>
                 </a:solidFill>
                 <a:latin typeface="Times New Roman" pitchFamily="18" charset="0"/>
                 <a:cs typeface="Times New Roman" pitchFamily="18" charset="0"/>
@@ -10707,9 +11307,9 @@
               <a:t>Sessions 4–5: </a:t>
             </a:r>
             <a:r>
-              <a:rPr lang="en-US" sz="1600" dirty="0">
-                <a:solidFill>
-                  <a:srgbClr val="222222"/>
+              <a:rPr lang="en-US" sz="1400" dirty="0">
+                <a:solidFill>
+                  <a:srgbClr val="000000"/>
                 </a:solidFill>
                 <a:latin typeface="Times New Roman" pitchFamily="18" charset="0"/>
                 <a:cs typeface="Times New Roman" pitchFamily="18" charset="0"/>
@@ -10726,9 +11326,9 @@
               <a:buChar char="•"/>
             </a:pPr>
             <a:r>
-              <a:rPr lang="en-US" sz="1600" b="1" dirty="0">
-                <a:solidFill>
-                  <a:srgbClr val="1F3B4D"/>
+              <a:rPr lang="en-US" sz="1400" b="1" dirty="0">
+                <a:solidFill>
+                  <a:srgbClr val="000000"/>
                 </a:solidFill>
                 <a:latin typeface="Times New Roman" pitchFamily="18" charset="0"/>
                 <a:cs typeface="Times New Roman" pitchFamily="18" charset="0"/>
@@ -10736,9 +11336,9 @@
               <a:t>Session 6: </a:t>
             </a:r>
             <a:r>
-              <a:rPr lang="en-US" sz="1600" dirty="0">
-                <a:solidFill>
-                  <a:srgbClr val="222222"/>
+              <a:rPr lang="en-US" sz="1400" dirty="0">
+                <a:solidFill>
+                  <a:srgbClr val="000000"/>
                 </a:solidFill>
                 <a:latin typeface="Times New Roman" pitchFamily="18" charset="0"/>
                 <a:cs typeface="Times New Roman" pitchFamily="18" charset="0"/>
@@ -10755,9 +11355,9 @@
               <a:buChar char="•"/>
             </a:pPr>
             <a:r>
-              <a:rPr lang="en-US" sz="1600" b="1" dirty="0">
-                <a:solidFill>
-                  <a:srgbClr val="1F3B4D"/>
+              <a:rPr lang="en-US" sz="1400" b="1" dirty="0">
+                <a:solidFill>
+                  <a:srgbClr val="000000"/>
                 </a:solidFill>
                 <a:latin typeface="Times New Roman" pitchFamily="18" charset="0"/>
                 <a:cs typeface="Times New Roman" pitchFamily="18" charset="0"/>
@@ -10765,9 +11365,9 @@
               <a:t>Sessions 7–8: </a:t>
             </a:r>
             <a:r>
-              <a:rPr lang="en-US" sz="1600" dirty="0">
-                <a:solidFill>
-                  <a:srgbClr val="222222"/>
+              <a:rPr lang="en-US" sz="1400" dirty="0">
+                <a:solidFill>
+                  <a:srgbClr val="000000"/>
                 </a:solidFill>
                 <a:latin typeface="Times New Roman" pitchFamily="18" charset="0"/>
                 <a:cs typeface="Times New Roman" pitchFamily="18" charset="0"/>
@@ -10784,9 +11384,9 @@
               <a:buChar char="•"/>
             </a:pPr>
             <a:r>
-              <a:rPr lang="en-US" sz="1600" b="1" dirty="0">
-                <a:solidFill>
-                  <a:srgbClr val="1F3B4D"/>
+              <a:rPr lang="en-US" sz="1400" b="1" dirty="0">
+                <a:solidFill>
+                  <a:srgbClr val="000000"/>
                 </a:solidFill>
                 <a:latin typeface="Times New Roman" pitchFamily="18" charset="0"/>
                 <a:cs typeface="Times New Roman" pitchFamily="18" charset="0"/>
@@ -10794,9 +11394,9 @@
               <a:t>Sessions 9–10: </a:t>
             </a:r>
             <a:r>
-              <a:rPr lang="en-US" sz="1600" dirty="0">
-                <a:solidFill>
-                  <a:srgbClr val="222222"/>
+              <a:rPr lang="en-US" sz="1400" dirty="0">
+                <a:solidFill>
+                  <a:srgbClr val="000000"/>
                 </a:solidFill>
                 <a:latin typeface="Times New Roman" pitchFamily="18" charset="0"/>
                 <a:cs typeface="Times New Roman" pitchFamily="18" charset="0"/>
@@ -10833,7 +11433,7 @@
       </p:grpSpPr>
       <p:sp>
         <p:nvSpPr>
-          <p:cNvPr id="10" name="TitleBar"/>
+          <p:cNvPr id="9" name="WhiteBG"/>
           <p:cNvSpPr>
             <a:spLocks noGrp="1"/>
           </p:cNvSpPr>
@@ -10842,43 +11442,25 @@
         <p:spPr>
           <a:xfrm>
             <a:off x="0" y="0"/>
-            <a:ext cx="12192000" cy="900000"/>
+            <a:ext cx="12192000" cy="6858000"/>
           </a:xfrm>
           <a:prstGeom prst="rect">
             <a:avLst/>
           </a:prstGeom>
           <a:solidFill>
-            <a:srgbClr val="3494BA"/>
+            <a:srgbClr val="FFFFFF"/>
           </a:solidFill>
         </p:spPr>
         <p:txBody>
-          <a:bodyPr wrap="square" anchor="ctr">
+          <a:bodyPr wrap="square" anchor="t">
             <a:normAutofit/>
           </a:bodyPr>
           <a:lstStyle/>
-          <a:p>
-            <a:pPr lvl="0" algn="l">
-              <a:spcAft>
-                <a:spcPts val="0"/>
-              </a:spcAft>
-              <a:buNone/>
-            </a:pPr>
-            <a:r>
-              <a:rPr lang="en-US" sz="2600" b="1" dirty="0">
-                <a:solidFill>
-                  <a:srgbClr val="FFFFFF"/>
-                </a:solidFill>
-                <a:latin typeface="Times New Roman" pitchFamily="18" charset="0"/>
-                <a:cs typeface="Times New Roman" pitchFamily="18" charset="0"/>
-              </a:rPr>
-              <a:t>  Prognosis &amp; Recommendations</a:t>
-            </a:r>
-          </a:p>
-        </p:txBody>
-      </p:sp>
-      <p:sp>
-        <p:nvSpPr>
-          <p:cNvPr id="11" name="Body"/>
+        </p:txBody>
+      </p:sp>
+      <p:sp>
+        <p:nvSpPr>
+          <p:cNvPr id="10" name="Heading"/>
           <p:cNvSpPr>
             <a:spLocks noGrp="1"/>
           </p:cNvSpPr>
@@ -10886,8 +11468,8 @@
         </p:nvSpPr>
         <p:spPr>
           <a:xfrm>
-            <a:off x="610000" y="1050000"/>
-            <a:ext cx="10972000" cy="5558000"/>
+            <a:off x="610000" y="300000"/>
+            <a:ext cx="10972000" cy="900000"/>
           </a:xfrm>
           <a:prstGeom prst="rect">
             <a:avLst/>
@@ -10900,6 +11482,49 @@
           </a:bodyPr>
           <a:lstStyle/>
           <a:p>
+            <a:pPr lvl="0" algn="l">
+              <a:spcAft>
+                <a:spcPts val="0"/>
+              </a:spcAft>
+              <a:buNone/>
+            </a:pPr>
+            <a:r>
+              <a:rPr lang="en-US" sz="2800" b="1" u="sng" dirty="0">
+                <a:solidFill>
+                  <a:srgbClr val="000000"/>
+                </a:solidFill>
+                <a:latin typeface="Times New Roman" pitchFamily="18" charset="0"/>
+                <a:cs typeface="Times New Roman" pitchFamily="18" charset="0"/>
+              </a:rPr>
+              <a:t>Prognosis &amp; Recommendations</a:t>
+            </a:r>
+          </a:p>
+        </p:txBody>
+      </p:sp>
+      <p:sp>
+        <p:nvSpPr>
+          <p:cNvPr id="11" name="Body"/>
+          <p:cNvSpPr>
+            <a:spLocks noGrp="1"/>
+          </p:cNvSpPr>
+          <p:nvPr/>
+        </p:nvSpPr>
+        <p:spPr>
+          <a:xfrm>
+            <a:off x="610000" y="1250000"/>
+            <a:ext cx="10972000" cy="5358000"/>
+          </a:xfrm>
+          <a:prstGeom prst="rect">
+            <a:avLst/>
+          </a:prstGeom>
+          <a:noFill/>
+        </p:spPr>
+        <p:txBody>
+          <a:bodyPr wrap="square" anchor="t">
+            <a:normAutofit/>
+          </a:bodyPr>
+          <a:lstStyle/>
+          <a:p>
             <a:pPr lvl="0">
               <a:spcAft>
                 <a:spcPts val="300"/>
@@ -10907,9 +11532,9 @@
               <a:buNone/>
             </a:pPr>
             <a:r>
-              <a:rPr lang="en-US" sz="1800" b="1" dirty="0">
-                <a:solidFill>
-                  <a:srgbClr val="3494BA"/>
+              <a:rPr lang="en-US" sz="2000" b="1" dirty="0">
+                <a:solidFill>
+                  <a:srgbClr val="000000"/>
                 </a:solidFill>
                 <a:latin typeface="Times New Roman" pitchFamily="18" charset="0"/>
                 <a:cs typeface="Times New Roman" pitchFamily="18" charset="0"/>
@@ -10927,7 +11552,7 @@
             <a:r>
               <a:rPr lang="en-US" sz="1400" dirty="0">
                 <a:solidFill>
-                  <a:srgbClr val="222222"/>
+                  <a:srgbClr val="000000"/>
                 </a:solidFill>
                 <a:latin typeface="Times New Roman" pitchFamily="18" charset="0"/>
                 <a:cs typeface="Times New Roman" pitchFamily="18" charset="0"/>
@@ -10943,9 +11568,9 @@
               <a:buNone/>
             </a:pPr>
             <a:r>
-              <a:rPr lang="en-US" sz="1800" b="1" dirty="0">
-                <a:solidFill>
-                  <a:srgbClr val="3494BA"/>
+              <a:rPr lang="en-US" sz="2000" b="1" dirty="0">
+                <a:solidFill>
+                  <a:srgbClr val="000000"/>
                 </a:solidFill>
                 <a:latin typeface="Times New Roman" pitchFamily="18" charset="0"/>
                 <a:cs typeface="Times New Roman" pitchFamily="18" charset="0"/>
@@ -10962,9 +11587,9 @@
               <a:buChar char="•"/>
             </a:pPr>
             <a:r>
-              <a:rPr lang="en-US" sz="1600" dirty="0">
-                <a:solidFill>
-                  <a:srgbClr val="222222"/>
+              <a:rPr lang="en-US" sz="1400" dirty="0">
+                <a:solidFill>
+                  <a:srgbClr val="000000"/>
                 </a:solidFill>
                 <a:latin typeface="Times New Roman" pitchFamily="18" charset="0"/>
                 <a:cs typeface="Times New Roman" pitchFamily="18" charset="0"/>
@@ -10981,9 +11606,9 @@
               <a:buChar char="•"/>
             </a:pPr>
             <a:r>
-              <a:rPr lang="en-US" sz="1600" dirty="0">
-                <a:solidFill>
-                  <a:srgbClr val="222222"/>
+              <a:rPr lang="en-US" sz="1400" dirty="0">
+                <a:solidFill>
+                  <a:srgbClr val="000000"/>
                 </a:solidFill>
                 <a:latin typeface="Times New Roman" pitchFamily="18" charset="0"/>
                 <a:cs typeface="Times New Roman" pitchFamily="18" charset="0"/>
@@ -11000,9 +11625,9 @@
               <a:buChar char="•"/>
             </a:pPr>
             <a:r>
-              <a:rPr lang="en-US" sz="1600" dirty="0">
-                <a:solidFill>
-                  <a:srgbClr val="222222"/>
+              <a:rPr lang="en-US" sz="1400" dirty="0">
+                <a:solidFill>
+                  <a:srgbClr val="000000"/>
                 </a:solidFill>
                 <a:latin typeface="Times New Roman" pitchFamily="18" charset="0"/>
                 <a:cs typeface="Times New Roman" pitchFamily="18" charset="0"/>
@@ -11019,9 +11644,9 @@
               <a:buChar char="•"/>
             </a:pPr>
             <a:r>
-              <a:rPr lang="en-US" sz="1600" dirty="0">
-                <a:solidFill>
-                  <a:srgbClr val="222222"/>
+              <a:rPr lang="en-US" sz="1400" dirty="0">
+                <a:solidFill>
+                  <a:srgbClr val="000000"/>
                 </a:solidFill>
                 <a:latin typeface="Times New Roman" pitchFamily="18" charset="0"/>
                 <a:cs typeface="Times New Roman" pitchFamily="18" charset="0"/>
@@ -11058,7 +11683,7 @@
       </p:grpSpPr>
       <p:sp>
         <p:nvSpPr>
-          <p:cNvPr id="10" name="TitleBar"/>
+          <p:cNvPr id="9" name="WhiteBG"/>
           <p:cNvSpPr>
             <a:spLocks noGrp="1"/>
           </p:cNvSpPr>
@@ -11067,43 +11692,25 @@
         <p:spPr>
           <a:xfrm>
             <a:off x="0" y="0"/>
-            <a:ext cx="12192000" cy="900000"/>
+            <a:ext cx="12192000" cy="6858000"/>
           </a:xfrm>
           <a:prstGeom prst="rect">
             <a:avLst/>
           </a:prstGeom>
           <a:solidFill>
-            <a:srgbClr val="3494BA"/>
+            <a:srgbClr val="FFFFFF"/>
           </a:solidFill>
         </p:spPr>
         <p:txBody>
-          <a:bodyPr wrap="square" anchor="ctr">
+          <a:bodyPr wrap="square" anchor="t">
             <a:normAutofit/>
           </a:bodyPr>
           <a:lstStyle/>
-          <a:p>
-            <a:pPr lvl="0" algn="l">
-              <a:spcAft>
-                <a:spcPts val="0"/>
-              </a:spcAft>
-              <a:buNone/>
-            </a:pPr>
-            <a:r>
-              <a:rPr lang="en-US" sz="2600" b="1" dirty="0">
-                <a:solidFill>
-                  <a:srgbClr val="FFFFFF"/>
-                </a:solidFill>
-                <a:latin typeface="Times New Roman" pitchFamily="18" charset="0"/>
-                <a:cs typeface="Times New Roman" pitchFamily="18" charset="0"/>
-              </a:rPr>
-              <a:t>  References (selected)</a:t>
-            </a:r>
-          </a:p>
-        </p:txBody>
-      </p:sp>
-      <p:sp>
-        <p:nvSpPr>
-          <p:cNvPr id="11" name="Body"/>
+        </p:txBody>
+      </p:sp>
+      <p:sp>
+        <p:nvSpPr>
+          <p:cNvPr id="10" name="Heading"/>
           <p:cNvSpPr>
             <a:spLocks noGrp="1"/>
           </p:cNvSpPr>
@@ -11111,8 +11718,8 @@
         </p:nvSpPr>
         <p:spPr>
           <a:xfrm>
-            <a:off x="610000" y="1050000"/>
-            <a:ext cx="10972000" cy="5558000"/>
+            <a:off x="610000" y="300000"/>
+            <a:ext cx="10972000" cy="900000"/>
           </a:xfrm>
           <a:prstGeom prst="rect">
             <a:avLst/>
@@ -11125,6 +11732,49 @@
           </a:bodyPr>
           <a:lstStyle/>
           <a:p>
+            <a:pPr lvl="0" algn="l">
+              <a:spcAft>
+                <a:spcPts val="0"/>
+              </a:spcAft>
+              <a:buNone/>
+            </a:pPr>
+            <a:r>
+              <a:rPr lang="en-US" sz="2800" b="1" u="sng" dirty="0">
+                <a:solidFill>
+                  <a:srgbClr val="000000"/>
+                </a:solidFill>
+                <a:latin typeface="Times New Roman" pitchFamily="18" charset="0"/>
+                <a:cs typeface="Times New Roman" pitchFamily="18" charset="0"/>
+              </a:rPr>
+              <a:t>References (selected)</a:t>
+            </a:r>
+          </a:p>
+        </p:txBody>
+      </p:sp>
+      <p:sp>
+        <p:nvSpPr>
+          <p:cNvPr id="11" name="Body"/>
+          <p:cNvSpPr>
+            <a:spLocks noGrp="1"/>
+          </p:cNvSpPr>
+          <p:nvPr/>
+        </p:nvSpPr>
+        <p:spPr>
+          <a:xfrm>
+            <a:off x="610000" y="1250000"/>
+            <a:ext cx="10972000" cy="5358000"/>
+          </a:xfrm>
+          <a:prstGeom prst="rect">
+            <a:avLst/>
+          </a:prstGeom>
+          <a:noFill/>
+        </p:spPr>
+        <p:txBody>
+          <a:bodyPr wrap="square" anchor="t">
+            <a:normAutofit/>
+          </a:bodyPr>
+          <a:lstStyle/>
+          <a:p>
             <a:pPr marL="285750" indent="-285750" lvl="0">
               <a:spcAft>
                 <a:spcPts val="600"/>
@@ -11133,9 +11783,9 @@
               <a:buChar char="•"/>
             </a:pPr>
             <a:r>
-              <a:rPr lang="en-US" sz="1300" dirty="0">
-                <a:solidFill>
-                  <a:srgbClr val="222222"/>
+              <a:rPr lang="en-US" sz="1400" dirty="0">
+                <a:solidFill>
+                  <a:srgbClr val="000000"/>
                 </a:solidFill>
                 <a:latin typeface="Times New Roman" pitchFamily="18" charset="0"/>
                 <a:cs typeface="Times New Roman" pitchFamily="18" charset="0"/>
@@ -11152,9 +11802,9 @@
               <a:buChar char="•"/>
             </a:pPr>
             <a:r>
-              <a:rPr lang="en-US" sz="1300" dirty="0">
-                <a:solidFill>
-                  <a:srgbClr val="222222"/>
+              <a:rPr lang="en-US" sz="1400" dirty="0">
+                <a:solidFill>
+                  <a:srgbClr val="000000"/>
                 </a:solidFill>
                 <a:latin typeface="Times New Roman" pitchFamily="18" charset="0"/>
                 <a:cs typeface="Times New Roman" pitchFamily="18" charset="0"/>
@@ -11171,9 +11821,9 @@
               <a:buChar char="•"/>
             </a:pPr>
             <a:r>
-              <a:rPr lang="en-US" sz="1300" dirty="0">
-                <a:solidFill>
-                  <a:srgbClr val="222222"/>
+              <a:rPr lang="en-US" sz="1400" dirty="0">
+                <a:solidFill>
+                  <a:srgbClr val="000000"/>
                 </a:solidFill>
                 <a:latin typeface="Times New Roman" pitchFamily="18" charset="0"/>
                 <a:cs typeface="Times New Roman" pitchFamily="18" charset="0"/>
@@ -11190,9 +11840,9 @@
               <a:buChar char="•"/>
             </a:pPr>
             <a:r>
-              <a:rPr lang="en-US" sz="1300" dirty="0">
-                <a:solidFill>
-                  <a:srgbClr val="222222"/>
+              <a:rPr lang="en-US" sz="1400" dirty="0">
+                <a:solidFill>
+                  <a:srgbClr val="000000"/>
                 </a:solidFill>
                 <a:latin typeface="Times New Roman" pitchFamily="18" charset="0"/>
                 <a:cs typeface="Times New Roman" pitchFamily="18" charset="0"/>
@@ -11209,9 +11859,9 @@
               <a:buChar char="•"/>
             </a:pPr>
             <a:r>
-              <a:rPr lang="en-US" sz="1300" dirty="0">
-                <a:solidFill>
-                  <a:srgbClr val="222222"/>
+              <a:rPr lang="en-US" sz="1400" dirty="0">
+                <a:solidFill>
+                  <a:srgbClr val="000000"/>
                 </a:solidFill>
                 <a:latin typeface="Times New Roman" pitchFamily="18" charset="0"/>
                 <a:cs typeface="Times New Roman" pitchFamily="18" charset="0"/>
@@ -11228,9 +11878,9 @@
               <a:buChar char="•"/>
             </a:pPr>
             <a:r>
-              <a:rPr lang="en-US" sz="1300" dirty="0">
-                <a:solidFill>
-                  <a:srgbClr val="222222"/>
+              <a:rPr lang="en-US" sz="1400" dirty="0">
+                <a:solidFill>
+                  <a:srgbClr val="000000"/>
                 </a:solidFill>
                 <a:latin typeface="Times New Roman" pitchFamily="18" charset="0"/>
                 <a:cs typeface="Times New Roman" pitchFamily="18" charset="0"/>
@@ -11246,9 +11896,9 @@
               <a:buNone/>
             </a:pPr>
             <a:r>
-              <a:rPr lang="en-US" sz="1100" dirty="0">
-                <a:solidFill>
-                  <a:srgbClr val="222222"/>
+              <a:rPr lang="en-US" sz="1400" dirty="0">
+                <a:solidFill>
+                  <a:srgbClr val="000000"/>
                 </a:solidFill>
                 <a:latin typeface="Times New Roman" pitchFamily="18" charset="0"/>
                 <a:cs typeface="Times New Roman" pitchFamily="18" charset="0"/>
@@ -11285,7 +11935,7 @@
       </p:grpSpPr>
       <p:sp>
         <p:nvSpPr>
-          <p:cNvPr id="10" name="TitleBar"/>
+          <p:cNvPr id="9" name="WhiteBG"/>
           <p:cNvSpPr>
             <a:spLocks noGrp="1"/>
           </p:cNvSpPr>
@@ -11294,43 +11944,25 @@
         <p:spPr>
           <a:xfrm>
             <a:off x="0" y="0"/>
-            <a:ext cx="12192000" cy="900000"/>
+            <a:ext cx="12192000" cy="6858000"/>
           </a:xfrm>
           <a:prstGeom prst="rect">
             <a:avLst/>
           </a:prstGeom>
           <a:solidFill>
-            <a:srgbClr val="3494BA"/>
+            <a:srgbClr val="FFFFFF"/>
           </a:solidFill>
         </p:spPr>
         <p:txBody>
-          <a:bodyPr wrap="square" anchor="ctr">
+          <a:bodyPr wrap="square" anchor="t">
             <a:normAutofit/>
           </a:bodyPr>
           <a:lstStyle/>
-          <a:p>
-            <a:pPr lvl="0" algn="l">
-              <a:spcAft>
-                <a:spcPts val="0"/>
-              </a:spcAft>
-              <a:buNone/>
-            </a:pPr>
-            <a:r>
-              <a:rPr lang="en-US" sz="2600" b="1" dirty="0">
-                <a:solidFill>
-                  <a:srgbClr val="FFFFFF"/>
-                </a:solidFill>
-                <a:latin typeface="Times New Roman" pitchFamily="18" charset="0"/>
-                <a:cs typeface="Times New Roman" pitchFamily="18" charset="0"/>
-              </a:rPr>
-              <a:t>  Thank You</a:t>
-            </a:r>
-          </a:p>
-        </p:txBody>
-      </p:sp>
-      <p:sp>
-        <p:nvSpPr>
-          <p:cNvPr id="11" name="Body"/>
+        </p:txBody>
+      </p:sp>
+      <p:sp>
+        <p:nvSpPr>
+          <p:cNvPr id="10" name="Heading"/>
           <p:cNvSpPr>
             <a:spLocks noGrp="1"/>
           </p:cNvSpPr>
@@ -11338,8 +11970,8 @@
         </p:nvSpPr>
         <p:spPr>
           <a:xfrm>
-            <a:off x="610000" y="1050000"/>
-            <a:ext cx="10972000" cy="5558000"/>
+            <a:off x="610000" y="300000"/>
+            <a:ext cx="10972000" cy="900000"/>
           </a:xfrm>
           <a:prstGeom prst="rect">
             <a:avLst/>
@@ -11352,6 +11984,49 @@
           </a:bodyPr>
           <a:lstStyle/>
           <a:p>
+            <a:pPr lvl="0" algn="l">
+              <a:spcAft>
+                <a:spcPts val="0"/>
+              </a:spcAft>
+              <a:buNone/>
+            </a:pPr>
+            <a:r>
+              <a:rPr lang="en-US" sz="2800" b="1" u="sng" dirty="0">
+                <a:solidFill>
+                  <a:srgbClr val="000000"/>
+                </a:solidFill>
+                <a:latin typeface="Times New Roman" pitchFamily="18" charset="0"/>
+                <a:cs typeface="Times New Roman" pitchFamily="18" charset="0"/>
+              </a:rPr>
+              <a:t>Thank You</a:t>
+            </a:r>
+          </a:p>
+        </p:txBody>
+      </p:sp>
+      <p:sp>
+        <p:nvSpPr>
+          <p:cNvPr id="11" name="Body"/>
+          <p:cNvSpPr>
+            <a:spLocks noGrp="1"/>
+          </p:cNvSpPr>
+          <p:nvPr/>
+        </p:nvSpPr>
+        <p:spPr>
+          <a:xfrm>
+            <a:off x="610000" y="1250000"/>
+            <a:ext cx="10972000" cy="5358000"/>
+          </a:xfrm>
+          <a:prstGeom prst="rect">
+            <a:avLst/>
+          </a:prstGeom>
+          <a:noFill/>
+        </p:spPr>
+        <p:txBody>
+          <a:bodyPr wrap="square" anchor="t">
+            <a:normAutofit/>
+          </a:bodyPr>
+          <a:lstStyle/>
+          <a:p>
             <a:pPr lvl="0" algn="ctr">
               <a:spcAft>
                 <a:spcPts val="400"/>
@@ -11359,9 +12034,9 @@
               <a:buNone/>
             </a:pPr>
             <a:r>
-              <a:rPr lang="en-US" sz="4000" b="1" dirty="0">
-                <a:solidFill>
-                  <a:srgbClr val="3494BA"/>
+              <a:rPr lang="en-US" sz="2800" b="1" u="sng" dirty="0">
+                <a:solidFill>
+                  <a:srgbClr val="000000"/>
                 </a:solidFill>
                 <a:latin typeface="Times New Roman" pitchFamily="18" charset="0"/>
                 <a:cs typeface="Times New Roman" pitchFamily="18" charset="0"/>
@@ -11377,9 +12052,9 @@
               <a:buNone/>
             </a:pPr>
             <a:r>
-              <a:rPr lang="en-US" sz="2000" dirty="0">
-                <a:solidFill>
-                  <a:srgbClr val="1F3B4D"/>
+              <a:rPr lang="en-US" sz="2000" b="1" dirty="0">
+                <a:solidFill>
+                  <a:srgbClr val="000000"/>
                 </a:solidFill>
                 <a:latin typeface="Times New Roman" pitchFamily="18" charset="0"/>
                 <a:cs typeface="Times New Roman" pitchFamily="18" charset="0"/>
@@ -11416,7 +12091,7 @@
       </p:grpSpPr>
       <p:sp>
         <p:nvSpPr>
-          <p:cNvPr id="10" name="TitleBar"/>
+          <p:cNvPr id="9" name="WhiteBG"/>
           <p:cNvSpPr>
             <a:spLocks noGrp="1"/>
           </p:cNvSpPr>
@@ -11425,43 +12100,25 @@
         <p:spPr>
           <a:xfrm>
             <a:off x="0" y="0"/>
-            <a:ext cx="12192000" cy="900000"/>
+            <a:ext cx="12192000" cy="6858000"/>
           </a:xfrm>
           <a:prstGeom prst="rect">
             <a:avLst/>
           </a:prstGeom>
           <a:solidFill>
-            <a:srgbClr val="3494BA"/>
+            <a:srgbClr val="FFFFFF"/>
           </a:solidFill>
         </p:spPr>
         <p:txBody>
-          <a:bodyPr wrap="square" anchor="ctr">
+          <a:bodyPr wrap="square" anchor="t">
             <a:normAutofit/>
           </a:bodyPr>
           <a:lstStyle/>
-          <a:p>
-            <a:pPr lvl="0" algn="l">
-              <a:spcAft>
-                <a:spcPts val="0"/>
-              </a:spcAft>
-              <a:buNone/>
-            </a:pPr>
-            <a:r>
-              <a:rPr lang="en-US" sz="2600" b="1" dirty="0">
-                <a:solidFill>
-                  <a:srgbClr val="FFFFFF"/>
-                </a:solidFill>
-                <a:latin typeface="Times New Roman" pitchFamily="18" charset="0"/>
-                <a:cs typeface="Times New Roman" pitchFamily="18" charset="0"/>
-              </a:rPr>
-              <a:t>  Chief Complaints</a:t>
-            </a:r>
-          </a:p>
-        </p:txBody>
-      </p:sp>
-      <p:sp>
-        <p:nvSpPr>
-          <p:cNvPr id="11" name="Body"/>
+        </p:txBody>
+      </p:sp>
+      <p:sp>
+        <p:nvSpPr>
+          <p:cNvPr id="10" name="Heading"/>
           <p:cNvSpPr>
             <a:spLocks noGrp="1"/>
           </p:cNvSpPr>
@@ -11469,8 +12126,8 @@
         </p:nvSpPr>
         <p:spPr>
           <a:xfrm>
-            <a:off x="610000" y="1050000"/>
-            <a:ext cx="10972000" cy="5558000"/>
+            <a:off x="610000" y="300000"/>
+            <a:ext cx="10972000" cy="900000"/>
           </a:xfrm>
           <a:prstGeom prst="rect">
             <a:avLst/>
@@ -11483,6 +12140,49 @@
           </a:bodyPr>
           <a:lstStyle/>
           <a:p>
+            <a:pPr lvl="0" algn="l">
+              <a:spcAft>
+                <a:spcPts val="0"/>
+              </a:spcAft>
+              <a:buNone/>
+            </a:pPr>
+            <a:r>
+              <a:rPr lang="en-US" sz="2800" b="1" u="sng" dirty="0">
+                <a:solidFill>
+                  <a:srgbClr val="000000"/>
+                </a:solidFill>
+                <a:latin typeface="Times New Roman" pitchFamily="18" charset="0"/>
+                <a:cs typeface="Times New Roman" pitchFamily="18" charset="0"/>
+              </a:rPr>
+              <a:t>Chief Complaints</a:t>
+            </a:r>
+          </a:p>
+        </p:txBody>
+      </p:sp>
+      <p:sp>
+        <p:nvSpPr>
+          <p:cNvPr id="11" name="Body"/>
+          <p:cNvSpPr>
+            <a:spLocks noGrp="1"/>
+          </p:cNvSpPr>
+          <p:nvPr/>
+        </p:nvSpPr>
+        <p:spPr>
+          <a:xfrm>
+            <a:off x="610000" y="1250000"/>
+            <a:ext cx="10972000" cy="5358000"/>
+          </a:xfrm>
+          <a:prstGeom prst="rect">
+            <a:avLst/>
+          </a:prstGeom>
+          <a:noFill/>
+        </p:spPr>
+        <p:txBody>
+          <a:bodyPr wrap="square" anchor="t">
+            <a:normAutofit/>
+          </a:bodyPr>
+          <a:lstStyle/>
+          <a:p>
             <a:pPr lvl="0">
               <a:spcAft>
                 <a:spcPts val="600"/>
@@ -11490,9 +12190,9 @@
               <a:buNone/>
             </a:pPr>
             <a:r>
-              <a:rPr lang="en-US" sz="1300" dirty="0">
-                <a:solidFill>
-                  <a:srgbClr val="222222"/>
+              <a:rPr lang="en-US" sz="1400" dirty="0">
+                <a:solidFill>
+                  <a:srgbClr val="000000"/>
                 </a:solidFill>
                 <a:latin typeface="Times New Roman" pitchFamily="18" charset="0"/>
                 <a:cs typeface="Times New Roman" pitchFamily="18" charset="0"/>
@@ -11509,9 +12209,9 @@
               <a:buChar char="•"/>
             </a:pPr>
             <a:r>
-              <a:rPr lang="en-US" sz="1600" b="1" dirty="0">
-                <a:solidFill>
-                  <a:srgbClr val="1F3B4D"/>
+              <a:rPr lang="en-US" sz="1400" b="1" dirty="0">
+                <a:solidFill>
+                  <a:srgbClr val="000000"/>
                 </a:solidFill>
                 <a:latin typeface="Times New Roman" pitchFamily="18" charset="0"/>
                 <a:cs typeface="Times New Roman" pitchFamily="18" charset="0"/>
@@ -11519,9 +12219,9 @@
               <a:t>1 year: </a:t>
             </a:r>
             <a:r>
-              <a:rPr lang="en-US" sz="1600" dirty="0">
-                <a:solidFill>
-                  <a:srgbClr val="222222"/>
+              <a:rPr lang="en-US" sz="1400" dirty="0">
+                <a:solidFill>
+                  <a:srgbClr val="000000"/>
                 </a:solidFill>
                 <a:latin typeface="Times New Roman" pitchFamily="18" charset="0"/>
                 <a:cs typeface="Times New Roman" pitchFamily="18" charset="0"/>
@@ -11538,9 +12238,9 @@
               <a:buChar char="•"/>
             </a:pPr>
             <a:r>
-              <a:rPr lang="en-US" sz="1600" b="1" dirty="0">
-                <a:solidFill>
-                  <a:srgbClr val="1F3B4D"/>
+              <a:rPr lang="en-US" sz="1400" b="1" dirty="0">
+                <a:solidFill>
+                  <a:srgbClr val="000000"/>
                 </a:solidFill>
                 <a:latin typeface="Times New Roman" pitchFamily="18" charset="0"/>
                 <a:cs typeface="Times New Roman" pitchFamily="18" charset="0"/>
@@ -11548,9 +12248,9 @@
               <a:t>1 year: </a:t>
             </a:r>
             <a:r>
-              <a:rPr lang="en-US" sz="1600" dirty="0">
-                <a:solidFill>
-                  <a:srgbClr val="222222"/>
+              <a:rPr lang="en-US" sz="1400" dirty="0">
+                <a:solidFill>
+                  <a:srgbClr val="000000"/>
                 </a:solidFill>
                 <a:latin typeface="Times New Roman" pitchFamily="18" charset="0"/>
                 <a:cs typeface="Times New Roman" pitchFamily="18" charset="0"/>
@@ -11567,9 +12267,9 @@
               <a:buChar char="•"/>
             </a:pPr>
             <a:r>
-              <a:rPr lang="en-US" sz="1600" b="1" dirty="0">
-                <a:solidFill>
-                  <a:srgbClr val="1F3B4D"/>
+              <a:rPr lang="en-US" sz="1400" b="1" dirty="0">
+                <a:solidFill>
+                  <a:srgbClr val="000000"/>
                 </a:solidFill>
                 <a:latin typeface="Times New Roman" pitchFamily="18" charset="0"/>
                 <a:cs typeface="Times New Roman" pitchFamily="18" charset="0"/>
@@ -11577,9 +12277,9 @@
               <a:t>1 year: </a:t>
             </a:r>
             <a:r>
-              <a:rPr lang="en-US" sz="1600" dirty="0">
-                <a:solidFill>
-                  <a:srgbClr val="222222"/>
+              <a:rPr lang="en-US" sz="1400" dirty="0">
+                <a:solidFill>
+                  <a:srgbClr val="000000"/>
                 </a:solidFill>
                 <a:latin typeface="Times New Roman" pitchFamily="18" charset="0"/>
                 <a:cs typeface="Times New Roman" pitchFamily="18" charset="0"/>
@@ -11596,9 +12296,9 @@
               <a:buChar char="•"/>
             </a:pPr>
             <a:r>
-              <a:rPr lang="en-US" sz="1600" b="1" dirty="0">
-                <a:solidFill>
-                  <a:srgbClr val="1F3B4D"/>
+              <a:rPr lang="en-US" sz="1400" b="1" dirty="0">
+                <a:solidFill>
+                  <a:srgbClr val="000000"/>
                 </a:solidFill>
                 <a:latin typeface="Times New Roman" pitchFamily="18" charset="0"/>
                 <a:cs typeface="Times New Roman" pitchFamily="18" charset="0"/>
@@ -11606,9 +12306,9 @@
               <a:t>Since Jan 12: </a:t>
             </a:r>
             <a:r>
-              <a:rPr lang="en-US" sz="1600" dirty="0">
-                <a:solidFill>
-                  <a:srgbClr val="222222"/>
+              <a:rPr lang="en-US" sz="1400" dirty="0">
+                <a:solidFill>
+                  <a:srgbClr val="000000"/>
                 </a:solidFill>
                 <a:latin typeface="Times New Roman" pitchFamily="18" charset="0"/>
                 <a:cs typeface="Times New Roman" pitchFamily="18" charset="0"/>
@@ -11625,9 +12325,9 @@
               <a:buChar char="•"/>
             </a:pPr>
             <a:r>
-              <a:rPr lang="en-US" sz="1600" b="1" dirty="0">
-                <a:solidFill>
-                  <a:srgbClr val="1F3B4D"/>
+              <a:rPr lang="en-US" sz="1400" b="1" dirty="0">
+                <a:solidFill>
+                  <a:srgbClr val="000000"/>
                 </a:solidFill>
                 <a:latin typeface="Times New Roman" pitchFamily="18" charset="0"/>
                 <a:cs typeface="Times New Roman" pitchFamily="18" charset="0"/>
@@ -11635,9 +12335,9 @@
               <a:t>Recent: </a:t>
             </a:r>
             <a:r>
-              <a:rPr lang="en-US" sz="1600" dirty="0">
-                <a:solidFill>
-                  <a:srgbClr val="222222"/>
+              <a:rPr lang="en-US" sz="1400" dirty="0">
+                <a:solidFill>
+                  <a:srgbClr val="000000"/>
                 </a:solidFill>
                 <a:latin typeface="Times New Roman" pitchFamily="18" charset="0"/>
                 <a:cs typeface="Times New Roman" pitchFamily="18" charset="0"/>
@@ -11674,7 +12374,7 @@
       </p:grpSpPr>
       <p:sp>
         <p:nvSpPr>
-          <p:cNvPr id="10" name="TitleBar"/>
+          <p:cNvPr id="9" name="WhiteBG"/>
           <p:cNvSpPr>
             <a:spLocks noGrp="1"/>
           </p:cNvSpPr>
@@ -11683,43 +12383,25 @@
         <p:spPr>
           <a:xfrm>
             <a:off x="0" y="0"/>
-            <a:ext cx="12192000" cy="900000"/>
+            <a:ext cx="12192000" cy="6858000"/>
           </a:xfrm>
           <a:prstGeom prst="rect">
             <a:avLst/>
           </a:prstGeom>
           <a:solidFill>
-            <a:srgbClr val="3494BA"/>
+            <a:srgbClr val="FFFFFF"/>
           </a:solidFill>
         </p:spPr>
         <p:txBody>
-          <a:bodyPr wrap="square" anchor="ctr">
+          <a:bodyPr wrap="square" anchor="t">
             <a:normAutofit/>
           </a:bodyPr>
           <a:lstStyle/>
-          <a:p>
-            <a:pPr lvl="0" algn="l">
-              <a:spcAft>
-                <a:spcPts val="0"/>
-              </a:spcAft>
-              <a:buNone/>
-            </a:pPr>
-            <a:r>
-              <a:rPr lang="en-US" sz="2600" b="1" dirty="0">
-                <a:solidFill>
-                  <a:srgbClr val="FFFFFF"/>
-                </a:solidFill>
-                <a:latin typeface="Times New Roman" pitchFamily="18" charset="0"/>
-                <a:cs typeface="Times New Roman" pitchFamily="18" charset="0"/>
-              </a:rPr>
-              <a:t>  History of Present Illness (HOPI)</a:t>
-            </a:r>
-          </a:p>
-        </p:txBody>
-      </p:sp>
-      <p:sp>
-        <p:nvSpPr>
-          <p:cNvPr id="11" name="Body"/>
+        </p:txBody>
+      </p:sp>
+      <p:sp>
+        <p:nvSpPr>
+          <p:cNvPr id="10" name="Heading"/>
           <p:cNvSpPr>
             <a:spLocks noGrp="1"/>
           </p:cNvSpPr>
@@ -11727,8 +12409,8 @@
         </p:nvSpPr>
         <p:spPr>
           <a:xfrm>
-            <a:off x="610000" y="1050000"/>
-            <a:ext cx="10972000" cy="5558000"/>
+            <a:off x="610000" y="300000"/>
+            <a:ext cx="10972000" cy="900000"/>
           </a:xfrm>
           <a:prstGeom prst="rect">
             <a:avLst/>
@@ -11741,6 +12423,49 @@
           </a:bodyPr>
           <a:lstStyle/>
           <a:p>
+            <a:pPr lvl="0" algn="l">
+              <a:spcAft>
+                <a:spcPts val="0"/>
+              </a:spcAft>
+              <a:buNone/>
+            </a:pPr>
+            <a:r>
+              <a:rPr lang="en-US" sz="2800" b="1" u="sng" dirty="0">
+                <a:solidFill>
+                  <a:srgbClr val="000000"/>
+                </a:solidFill>
+                <a:latin typeface="Times New Roman" pitchFamily="18" charset="0"/>
+                <a:cs typeface="Times New Roman" pitchFamily="18" charset="0"/>
+              </a:rPr>
+              <a:t>History of Present Illness (HOPI)</a:t>
+            </a:r>
+          </a:p>
+        </p:txBody>
+      </p:sp>
+      <p:sp>
+        <p:nvSpPr>
+          <p:cNvPr id="11" name="Body"/>
+          <p:cNvSpPr>
+            <a:spLocks noGrp="1"/>
+          </p:cNvSpPr>
+          <p:nvPr/>
+        </p:nvSpPr>
+        <p:spPr>
+          <a:xfrm>
+            <a:off x="610000" y="1250000"/>
+            <a:ext cx="10972000" cy="5358000"/>
+          </a:xfrm>
+          <a:prstGeom prst="rect">
+            <a:avLst/>
+          </a:prstGeom>
+          <a:noFill/>
+        </p:spPr>
+        <p:txBody>
+          <a:bodyPr wrap="square" anchor="t">
+            <a:normAutofit/>
+          </a:bodyPr>
+          <a:lstStyle/>
+          <a:p>
             <a:pPr lvl="0">
               <a:spcAft>
                 <a:spcPts val="600"/>
@@ -11748,9 +12473,9 @@
               <a:buNone/>
             </a:pPr>
             <a:r>
-              <a:rPr lang="en-US" sz="1500" b="1" dirty="0">
-                <a:solidFill>
-                  <a:srgbClr val="1F3B4D"/>
+              <a:rPr lang="en-US" sz="1400" b="1" dirty="0">
+                <a:solidFill>
+                  <a:srgbClr val="000000"/>
                 </a:solidFill>
                 <a:latin typeface="Times New Roman" pitchFamily="18" charset="0"/>
                 <a:cs typeface="Times New Roman" pitchFamily="18" charset="0"/>
@@ -11758,9 +12483,9 @@
               <a:t>Total Duration: </a:t>
             </a:r>
             <a:r>
-              <a:rPr lang="en-US" sz="1500" dirty="0">
-                <a:solidFill>
-                  <a:srgbClr val="222222"/>
+              <a:rPr lang="en-US" sz="1400" dirty="0">
+                <a:solidFill>
+                  <a:srgbClr val="000000"/>
                 </a:solidFill>
                 <a:latin typeface="Times New Roman" pitchFamily="18" charset="0"/>
                 <a:cs typeface="Times New Roman" pitchFamily="18" charset="0"/>
@@ -11776,9 +12501,9 @@
               <a:buNone/>
             </a:pPr>
             <a:r>
-              <a:rPr lang="en-US" sz="1500" b="1" dirty="0">
-                <a:solidFill>
-                  <a:srgbClr val="1F3B4D"/>
+              <a:rPr lang="en-US" sz="1400" b="1" dirty="0">
+                <a:solidFill>
+                  <a:srgbClr val="000000"/>
                 </a:solidFill>
                 <a:latin typeface="Times New Roman" pitchFamily="18" charset="0"/>
                 <a:cs typeface="Times New Roman" pitchFamily="18" charset="0"/>
@@ -11786,9 +12511,9 @@
               <a:t>Onset: </a:t>
             </a:r>
             <a:r>
-              <a:rPr lang="en-US" sz="1500" dirty="0">
-                <a:solidFill>
-                  <a:srgbClr val="222222"/>
+              <a:rPr lang="en-US" sz="1400" dirty="0">
+                <a:solidFill>
+                  <a:srgbClr val="000000"/>
                 </a:solidFill>
                 <a:latin typeface="Times New Roman" pitchFamily="18" charset="0"/>
                 <a:cs typeface="Times New Roman" pitchFamily="18" charset="0"/>
@@ -11804,9 +12529,9 @@
               <a:buNone/>
             </a:pPr>
             <a:r>
-              <a:rPr lang="en-US" sz="1500" b="1" dirty="0">
-                <a:solidFill>
-                  <a:srgbClr val="1F3B4D"/>
+              <a:rPr lang="en-US" sz="1400" b="1" dirty="0">
+                <a:solidFill>
+                  <a:srgbClr val="000000"/>
                 </a:solidFill>
                 <a:latin typeface="Times New Roman" pitchFamily="18" charset="0"/>
                 <a:cs typeface="Times New Roman" pitchFamily="18" charset="0"/>
@@ -11814,9 +12539,9 @@
               <a:t>Course: </a:t>
             </a:r>
             <a:r>
-              <a:rPr lang="en-US" sz="1500" dirty="0">
-                <a:solidFill>
-                  <a:srgbClr val="222222"/>
+              <a:rPr lang="en-US" sz="1400" dirty="0">
+                <a:solidFill>
+                  <a:srgbClr val="000000"/>
                 </a:solidFill>
                 <a:latin typeface="Times New Roman" pitchFamily="18" charset="0"/>
                 <a:cs typeface="Times New Roman" pitchFamily="18" charset="0"/>
@@ -11832,9 +12557,9 @@
               <a:buNone/>
             </a:pPr>
             <a:r>
-              <a:rPr lang="en-US" sz="1500" b="1" dirty="0">
-                <a:solidFill>
-                  <a:srgbClr val="1F3B4D"/>
+              <a:rPr lang="en-US" sz="1400" b="1" dirty="0">
+                <a:solidFill>
+                  <a:srgbClr val="000000"/>
                 </a:solidFill>
                 <a:latin typeface="Times New Roman" pitchFamily="18" charset="0"/>
                 <a:cs typeface="Times New Roman" pitchFamily="18" charset="0"/>
@@ -11842,9 +12567,9 @@
               <a:t>Progress: </a:t>
             </a:r>
             <a:r>
-              <a:rPr lang="en-US" sz="1500" dirty="0">
-                <a:solidFill>
-                  <a:srgbClr val="222222"/>
+              <a:rPr lang="en-US" sz="1400" dirty="0">
+                <a:solidFill>
+                  <a:srgbClr val="000000"/>
                 </a:solidFill>
                 <a:latin typeface="Times New Roman" pitchFamily="18" charset="0"/>
                 <a:cs typeface="Times New Roman" pitchFamily="18" charset="0"/>
@@ -11860,9 +12585,9 @@
               <a:buNone/>
             </a:pPr>
             <a:r>
-              <a:rPr lang="en-US" sz="1800" b="1" dirty="0">
-                <a:solidFill>
-                  <a:srgbClr val="3494BA"/>
+              <a:rPr lang="en-US" sz="2000" b="1" dirty="0">
+                <a:solidFill>
+                  <a:srgbClr val="000000"/>
                 </a:solidFill>
                 <a:latin typeface="Times New Roman" pitchFamily="18" charset="0"/>
                 <a:cs typeface="Times New Roman" pitchFamily="18" charset="0"/>
@@ -11879,9 +12604,9 @@
               <a:buChar char="•"/>
             </a:pPr>
             <a:r>
-              <a:rPr lang="en-US" sz="1600" b="1" dirty="0">
-                <a:solidFill>
-                  <a:srgbClr val="1F3B4D"/>
+              <a:rPr lang="en-US" sz="1400" b="1" dirty="0">
+                <a:solidFill>
+                  <a:srgbClr val="000000"/>
                 </a:solidFill>
                 <a:latin typeface="Times New Roman" pitchFamily="18" charset="0"/>
                 <a:cs typeface="Times New Roman" pitchFamily="18" charset="0"/>
@@ -11889,9 +12614,9 @@
               <a:t>Predisposing: </a:t>
             </a:r>
             <a:r>
-              <a:rPr lang="en-US" sz="1600" dirty="0">
-                <a:solidFill>
-                  <a:srgbClr val="222222"/>
+              <a:rPr lang="en-US" sz="1400" dirty="0">
+                <a:solidFill>
+                  <a:srgbClr val="000000"/>
                 </a:solidFill>
                 <a:latin typeface="Times New Roman" pitchFamily="18" charset="0"/>
                 <a:cs typeface="Times New Roman" pitchFamily="18" charset="0"/>
@@ -11908,9 +12633,9 @@
               <a:buChar char="•"/>
             </a:pPr>
             <a:r>
-              <a:rPr lang="en-US" sz="1600" b="1" dirty="0">
-                <a:solidFill>
-                  <a:srgbClr val="1F3B4D"/>
+              <a:rPr lang="en-US" sz="1400" b="1" dirty="0">
+                <a:solidFill>
+                  <a:srgbClr val="000000"/>
                 </a:solidFill>
                 <a:latin typeface="Times New Roman" pitchFamily="18" charset="0"/>
                 <a:cs typeface="Times New Roman" pitchFamily="18" charset="0"/>
@@ -11918,9 +12643,9 @@
               <a:t>Precipitating: </a:t>
             </a:r>
             <a:r>
-              <a:rPr lang="en-US" sz="1600" dirty="0">
-                <a:solidFill>
-                  <a:srgbClr val="222222"/>
+              <a:rPr lang="en-US" sz="1400" dirty="0">
+                <a:solidFill>
+                  <a:srgbClr val="000000"/>
                 </a:solidFill>
                 <a:latin typeface="Times New Roman" pitchFamily="18" charset="0"/>
                 <a:cs typeface="Times New Roman" pitchFamily="18" charset="0"/>
@@ -11937,9 +12662,9 @@
               <a:buChar char="•"/>
             </a:pPr>
             <a:r>
-              <a:rPr lang="en-US" sz="1600" b="1" dirty="0">
-                <a:solidFill>
-                  <a:srgbClr val="1F3B4D"/>
+              <a:rPr lang="en-US" sz="1400" b="1" dirty="0">
+                <a:solidFill>
+                  <a:srgbClr val="000000"/>
                 </a:solidFill>
                 <a:latin typeface="Times New Roman" pitchFamily="18" charset="0"/>
                 <a:cs typeface="Times New Roman" pitchFamily="18" charset="0"/>
@@ -11947,9 +12672,9 @@
               <a:t>Perpetuating: </a:t>
             </a:r>
             <a:r>
-              <a:rPr lang="en-US" sz="1600" dirty="0">
-                <a:solidFill>
-                  <a:srgbClr val="222222"/>
+              <a:rPr lang="en-US" sz="1400" dirty="0">
+                <a:solidFill>
+                  <a:srgbClr val="000000"/>
                 </a:solidFill>
                 <a:latin typeface="Times New Roman" pitchFamily="18" charset="0"/>
                 <a:cs typeface="Times New Roman" pitchFamily="18" charset="0"/>
@@ -11986,7 +12711,7 @@
       </p:grpSpPr>
       <p:sp>
         <p:nvSpPr>
-          <p:cNvPr id="10" name="TitleBar"/>
+          <p:cNvPr id="9" name="WhiteBG"/>
           <p:cNvSpPr>
             <a:spLocks noGrp="1"/>
           </p:cNvSpPr>
@@ -11995,43 +12720,25 @@
         <p:spPr>
           <a:xfrm>
             <a:off x="0" y="0"/>
-            <a:ext cx="12192000" cy="900000"/>
+            <a:ext cx="12192000" cy="6858000"/>
           </a:xfrm>
           <a:prstGeom prst="rect">
             <a:avLst/>
           </a:prstGeom>
           <a:solidFill>
-            <a:srgbClr val="3494BA"/>
+            <a:srgbClr val="FFFFFF"/>
           </a:solidFill>
         </p:spPr>
         <p:txBody>
-          <a:bodyPr wrap="square" anchor="ctr">
+          <a:bodyPr wrap="square" anchor="t">
             <a:normAutofit/>
           </a:bodyPr>
           <a:lstStyle/>
-          <a:p>
-            <a:pPr lvl="0" algn="l">
-              <a:spcAft>
-                <a:spcPts val="0"/>
-              </a:spcAft>
-              <a:buNone/>
-            </a:pPr>
-            <a:r>
-              <a:rPr lang="en-US" sz="2600" b="1" dirty="0">
-                <a:solidFill>
-                  <a:srgbClr val="FFFFFF"/>
-                </a:solidFill>
-                <a:latin typeface="Times New Roman" pitchFamily="18" charset="0"/>
-                <a:cs typeface="Times New Roman" pitchFamily="18" charset="0"/>
-              </a:rPr>
-              <a:t>  HOPI — Narrative (1/2)</a:t>
-            </a:r>
-          </a:p>
-        </p:txBody>
-      </p:sp>
-      <p:sp>
-        <p:nvSpPr>
-          <p:cNvPr id="11" name="Body"/>
+        </p:txBody>
+      </p:sp>
+      <p:sp>
+        <p:nvSpPr>
+          <p:cNvPr id="10" name="Heading"/>
           <p:cNvSpPr>
             <a:spLocks noGrp="1"/>
           </p:cNvSpPr>
@@ -12039,8 +12746,8 @@
         </p:nvSpPr>
         <p:spPr>
           <a:xfrm>
-            <a:off x="610000" y="1050000"/>
-            <a:ext cx="10972000" cy="5558000"/>
+            <a:off x="610000" y="300000"/>
+            <a:ext cx="10972000" cy="900000"/>
           </a:xfrm>
           <a:prstGeom prst="rect">
             <a:avLst/>
@@ -12053,6 +12760,49 @@
           </a:bodyPr>
           <a:lstStyle/>
           <a:p>
+            <a:pPr lvl="0" algn="l">
+              <a:spcAft>
+                <a:spcPts val="0"/>
+              </a:spcAft>
+              <a:buNone/>
+            </a:pPr>
+            <a:r>
+              <a:rPr lang="en-US" sz="2800" b="1" u="sng" dirty="0">
+                <a:solidFill>
+                  <a:srgbClr val="000000"/>
+                </a:solidFill>
+                <a:latin typeface="Times New Roman" pitchFamily="18" charset="0"/>
+                <a:cs typeface="Times New Roman" pitchFamily="18" charset="0"/>
+              </a:rPr>
+              <a:t>HOPI — Narrative (1/2)</a:t>
+            </a:r>
+          </a:p>
+        </p:txBody>
+      </p:sp>
+      <p:sp>
+        <p:nvSpPr>
+          <p:cNvPr id="11" name="Body"/>
+          <p:cNvSpPr>
+            <a:spLocks noGrp="1"/>
+          </p:cNvSpPr>
+          <p:nvPr/>
+        </p:nvSpPr>
+        <p:spPr>
+          <a:xfrm>
+            <a:off x="610000" y="1250000"/>
+            <a:ext cx="10972000" cy="5358000"/>
+          </a:xfrm>
+          <a:prstGeom prst="rect">
+            <a:avLst/>
+          </a:prstGeom>
+          <a:noFill/>
+        </p:spPr>
+        <p:txBody>
+          <a:bodyPr wrap="square" anchor="t">
+            <a:normAutofit/>
+          </a:bodyPr>
+          <a:lstStyle/>
+          <a:p>
             <a:pPr lvl="0">
               <a:spcAft>
                 <a:spcPts val="600"/>
@@ -12062,7 +12812,7 @@
             <a:r>
               <a:rPr lang="en-US" sz="1400" dirty="0">
                 <a:solidFill>
-                  <a:srgbClr val="222222"/>
+                  <a:srgbClr val="000000"/>
                 </a:solidFill>
                 <a:latin typeface="Times New Roman" pitchFamily="18" charset="0"/>
                 <a:cs typeface="Times New Roman" pitchFamily="18" charset="0"/>
@@ -12080,7 +12830,7 @@
             <a:r>
               <a:rPr lang="en-US" sz="1400" dirty="0">
                 <a:solidFill>
-                  <a:srgbClr val="222222"/>
+                  <a:srgbClr val="000000"/>
                 </a:solidFill>
                 <a:latin typeface="Times New Roman" pitchFamily="18" charset="0"/>
                 <a:cs typeface="Times New Roman" pitchFamily="18" charset="0"/>
@@ -12117,7 +12867,7 @@
       </p:grpSpPr>
       <p:sp>
         <p:nvSpPr>
-          <p:cNvPr id="10" name="TitleBar"/>
+          <p:cNvPr id="9" name="WhiteBG"/>
           <p:cNvSpPr>
             <a:spLocks noGrp="1"/>
           </p:cNvSpPr>
@@ -12126,43 +12876,25 @@
         <p:spPr>
           <a:xfrm>
             <a:off x="0" y="0"/>
-            <a:ext cx="12192000" cy="900000"/>
+            <a:ext cx="12192000" cy="6858000"/>
           </a:xfrm>
           <a:prstGeom prst="rect">
             <a:avLst/>
           </a:prstGeom>
           <a:solidFill>
-            <a:srgbClr val="3494BA"/>
+            <a:srgbClr val="FFFFFF"/>
           </a:solidFill>
         </p:spPr>
         <p:txBody>
-          <a:bodyPr wrap="square" anchor="ctr">
+          <a:bodyPr wrap="square" anchor="t">
             <a:normAutofit/>
           </a:bodyPr>
           <a:lstStyle/>
-          <a:p>
-            <a:pPr lvl="0" algn="l">
-              <a:spcAft>
-                <a:spcPts val="0"/>
-              </a:spcAft>
-              <a:buNone/>
-            </a:pPr>
-            <a:r>
-              <a:rPr lang="en-US" sz="2600" b="1" dirty="0">
-                <a:solidFill>
-                  <a:srgbClr val="FFFFFF"/>
-                </a:solidFill>
-                <a:latin typeface="Times New Roman" pitchFamily="18" charset="0"/>
-                <a:cs typeface="Times New Roman" pitchFamily="18" charset="0"/>
-              </a:rPr>
-              <a:t>  HOPI — Narrative (2/2)</a:t>
-            </a:r>
-          </a:p>
-        </p:txBody>
-      </p:sp>
-      <p:sp>
-        <p:nvSpPr>
-          <p:cNvPr id="11" name="Body"/>
+        </p:txBody>
+      </p:sp>
+      <p:sp>
+        <p:nvSpPr>
+          <p:cNvPr id="10" name="Heading"/>
           <p:cNvSpPr>
             <a:spLocks noGrp="1"/>
           </p:cNvSpPr>
@@ -12170,8 +12902,8 @@
         </p:nvSpPr>
         <p:spPr>
           <a:xfrm>
-            <a:off x="610000" y="1050000"/>
-            <a:ext cx="10972000" cy="5558000"/>
+            <a:off x="610000" y="300000"/>
+            <a:ext cx="10972000" cy="900000"/>
           </a:xfrm>
           <a:prstGeom prst="rect">
             <a:avLst/>
@@ -12184,6 +12916,49 @@
           </a:bodyPr>
           <a:lstStyle/>
           <a:p>
+            <a:pPr lvl="0" algn="l">
+              <a:spcAft>
+                <a:spcPts val="0"/>
+              </a:spcAft>
+              <a:buNone/>
+            </a:pPr>
+            <a:r>
+              <a:rPr lang="en-US" sz="2800" b="1" u="sng" dirty="0">
+                <a:solidFill>
+                  <a:srgbClr val="000000"/>
+                </a:solidFill>
+                <a:latin typeface="Times New Roman" pitchFamily="18" charset="0"/>
+                <a:cs typeface="Times New Roman" pitchFamily="18" charset="0"/>
+              </a:rPr>
+              <a:t>HOPI — Narrative (2/2)</a:t>
+            </a:r>
+          </a:p>
+        </p:txBody>
+      </p:sp>
+      <p:sp>
+        <p:nvSpPr>
+          <p:cNvPr id="11" name="Body"/>
+          <p:cNvSpPr>
+            <a:spLocks noGrp="1"/>
+          </p:cNvSpPr>
+          <p:nvPr/>
+        </p:nvSpPr>
+        <p:spPr>
+          <a:xfrm>
+            <a:off x="610000" y="1250000"/>
+            <a:ext cx="10972000" cy="5358000"/>
+          </a:xfrm>
+          <a:prstGeom prst="rect">
+            <a:avLst/>
+          </a:prstGeom>
+          <a:noFill/>
+        </p:spPr>
+        <p:txBody>
+          <a:bodyPr wrap="square" anchor="t">
+            <a:normAutofit/>
+          </a:bodyPr>
+          <a:lstStyle/>
+          <a:p>
             <a:pPr lvl="0">
               <a:spcAft>
                 <a:spcPts val="600"/>
@@ -12193,7 +12968,7 @@
             <a:r>
               <a:rPr lang="en-US" sz="1400" dirty="0">
                 <a:solidFill>
-                  <a:srgbClr val="222222"/>
+                  <a:srgbClr val="000000"/>
                 </a:solidFill>
                 <a:latin typeface="Times New Roman" pitchFamily="18" charset="0"/>
                 <a:cs typeface="Times New Roman" pitchFamily="18" charset="0"/>
@@ -12211,7 +12986,7 @@
             <a:r>
               <a:rPr lang="en-US" sz="1400" dirty="0">
                 <a:solidFill>
-                  <a:srgbClr val="222222"/>
+                  <a:srgbClr val="000000"/>
                 </a:solidFill>
                 <a:latin typeface="Times New Roman" pitchFamily="18" charset="0"/>
                 <a:cs typeface="Times New Roman" pitchFamily="18" charset="0"/>
@@ -12229,7 +13004,7 @@
             <a:r>
               <a:rPr lang="en-US" sz="1400" dirty="0">
                 <a:solidFill>
-                  <a:srgbClr val="222222"/>
+                  <a:srgbClr val="000000"/>
                 </a:solidFill>
                 <a:latin typeface="Times New Roman" pitchFamily="18" charset="0"/>
                 <a:cs typeface="Times New Roman" pitchFamily="18" charset="0"/>
@@ -12266,7 +13041,7 @@
       </p:grpSpPr>
       <p:sp>
         <p:nvSpPr>
-          <p:cNvPr id="10" name="TitleBar"/>
+          <p:cNvPr id="9" name="WhiteBG"/>
           <p:cNvSpPr>
             <a:spLocks noGrp="1"/>
           </p:cNvSpPr>
@@ -12275,43 +13050,25 @@
         <p:spPr>
           <a:xfrm>
             <a:off x="0" y="0"/>
-            <a:ext cx="12192000" cy="900000"/>
+            <a:ext cx="12192000" cy="6858000"/>
           </a:xfrm>
           <a:prstGeom prst="rect">
             <a:avLst/>
           </a:prstGeom>
           <a:solidFill>
-            <a:srgbClr val="3494BA"/>
+            <a:srgbClr val="FFFFFF"/>
           </a:solidFill>
         </p:spPr>
         <p:txBody>
-          <a:bodyPr wrap="square" anchor="ctr">
+          <a:bodyPr wrap="square" anchor="t">
             <a:normAutofit/>
           </a:bodyPr>
           <a:lstStyle/>
-          <a:p>
-            <a:pPr lvl="0" algn="l">
-              <a:spcAft>
-                <a:spcPts val="0"/>
-              </a:spcAft>
-              <a:buNone/>
-            </a:pPr>
-            <a:r>
-              <a:rPr lang="en-US" sz="2600" b="1" dirty="0">
-                <a:solidFill>
-                  <a:srgbClr val="FFFFFF"/>
-                </a:solidFill>
-                <a:latin typeface="Times New Roman" pitchFamily="18" charset="0"/>
-                <a:cs typeface="Times New Roman" pitchFamily="18" charset="0"/>
-              </a:rPr>
-              <a:t>  Biological Functioning &amp; Negative History</a:t>
-            </a:r>
-          </a:p>
-        </p:txBody>
-      </p:sp>
-      <p:sp>
-        <p:nvSpPr>
-          <p:cNvPr id="11" name="Body"/>
+        </p:txBody>
+      </p:sp>
+      <p:sp>
+        <p:nvSpPr>
+          <p:cNvPr id="10" name="Heading"/>
           <p:cNvSpPr>
             <a:spLocks noGrp="1"/>
           </p:cNvSpPr>
@@ -12319,8 +13076,8 @@
         </p:nvSpPr>
         <p:spPr>
           <a:xfrm>
-            <a:off x="610000" y="1050000"/>
-            <a:ext cx="10972000" cy="5558000"/>
+            <a:off x="610000" y="300000"/>
+            <a:ext cx="10972000" cy="900000"/>
           </a:xfrm>
           <a:prstGeom prst="rect">
             <a:avLst/>
@@ -12333,6 +13090,49 @@
           </a:bodyPr>
           <a:lstStyle/>
           <a:p>
+            <a:pPr lvl="0" algn="l">
+              <a:spcAft>
+                <a:spcPts val="0"/>
+              </a:spcAft>
+              <a:buNone/>
+            </a:pPr>
+            <a:r>
+              <a:rPr lang="en-US" sz="2800" b="1" u="sng" dirty="0">
+                <a:solidFill>
+                  <a:srgbClr val="000000"/>
+                </a:solidFill>
+                <a:latin typeface="Times New Roman" pitchFamily="18" charset="0"/>
+                <a:cs typeface="Times New Roman" pitchFamily="18" charset="0"/>
+              </a:rPr>
+              <a:t>Biological Functioning &amp; Negative History</a:t>
+            </a:r>
+          </a:p>
+        </p:txBody>
+      </p:sp>
+      <p:sp>
+        <p:nvSpPr>
+          <p:cNvPr id="11" name="Body"/>
+          <p:cNvSpPr>
+            <a:spLocks noGrp="1"/>
+          </p:cNvSpPr>
+          <p:nvPr/>
+        </p:nvSpPr>
+        <p:spPr>
+          <a:xfrm>
+            <a:off x="610000" y="1250000"/>
+            <a:ext cx="10972000" cy="5358000"/>
+          </a:xfrm>
+          <a:prstGeom prst="rect">
+            <a:avLst/>
+          </a:prstGeom>
+          <a:noFill/>
+        </p:spPr>
+        <p:txBody>
+          <a:bodyPr wrap="square" anchor="t">
+            <a:normAutofit/>
+          </a:bodyPr>
+          <a:lstStyle/>
+          <a:p>
             <a:pPr lvl="0">
               <a:spcAft>
                 <a:spcPts val="300"/>
@@ -12340,9 +13140,9 @@
               <a:buNone/>
             </a:pPr>
             <a:r>
-              <a:rPr lang="en-US" sz="1800" b="1" dirty="0">
-                <a:solidFill>
-                  <a:srgbClr val="3494BA"/>
+              <a:rPr lang="en-US" sz="2000" b="1" dirty="0">
+                <a:solidFill>
+                  <a:srgbClr val="000000"/>
                 </a:solidFill>
                 <a:latin typeface="Times New Roman" pitchFamily="18" charset="0"/>
                 <a:cs typeface="Times New Roman" pitchFamily="18" charset="0"/>
@@ -12359,9 +13159,9 @@
               <a:buChar char="•"/>
             </a:pPr>
             <a:r>
-              <a:rPr lang="en-US" sz="1600" b="1" dirty="0">
-                <a:solidFill>
-                  <a:srgbClr val="1F3B4D"/>
+              <a:rPr lang="en-US" sz="1400" b="1" dirty="0">
+                <a:solidFill>
+                  <a:srgbClr val="000000"/>
                 </a:solidFill>
                 <a:latin typeface="Times New Roman" pitchFamily="18" charset="0"/>
                 <a:cs typeface="Times New Roman" pitchFamily="18" charset="0"/>
@@ -12369,9 +13169,9 @@
               <a:t>Sleep: </a:t>
             </a:r>
             <a:r>
-              <a:rPr lang="en-US" sz="1600" dirty="0">
-                <a:solidFill>
-                  <a:srgbClr val="222222"/>
+              <a:rPr lang="en-US" sz="1400" dirty="0">
+                <a:solidFill>
+                  <a:srgbClr val="000000"/>
                 </a:solidFill>
                 <a:latin typeface="Times New Roman" pitchFamily="18" charset="0"/>
                 <a:cs typeface="Times New Roman" pitchFamily="18" charset="0"/>
@@ -12388,9 +13188,9 @@
               <a:buChar char="•"/>
             </a:pPr>
             <a:r>
-              <a:rPr lang="en-US" sz="1600" b="1" dirty="0">
-                <a:solidFill>
-                  <a:srgbClr val="1F3B4D"/>
+              <a:rPr lang="en-US" sz="1400" b="1" dirty="0">
+                <a:solidFill>
+                  <a:srgbClr val="000000"/>
                 </a:solidFill>
                 <a:latin typeface="Times New Roman" pitchFamily="18" charset="0"/>
                 <a:cs typeface="Times New Roman" pitchFamily="18" charset="0"/>
@@ -12398,9 +13198,9 @@
               <a:t>Appetite: </a:t>
             </a:r>
             <a:r>
-              <a:rPr lang="en-US" sz="1600" dirty="0">
-                <a:solidFill>
-                  <a:srgbClr val="222222"/>
+              <a:rPr lang="en-US" sz="1400" dirty="0">
+                <a:solidFill>
+                  <a:srgbClr val="000000"/>
                 </a:solidFill>
                 <a:latin typeface="Times New Roman" pitchFamily="18" charset="0"/>
                 <a:cs typeface="Times New Roman" pitchFamily="18" charset="0"/>
@@ -12417,9 +13217,9 @@
               <a:buChar char="•"/>
             </a:pPr>
             <a:r>
-              <a:rPr lang="en-US" sz="1600" b="1" dirty="0">
-                <a:solidFill>
-                  <a:srgbClr val="1F3B4D"/>
+              <a:rPr lang="en-US" sz="1400" b="1" dirty="0">
+                <a:solidFill>
+                  <a:srgbClr val="000000"/>
                 </a:solidFill>
                 <a:latin typeface="Times New Roman" pitchFamily="18" charset="0"/>
                 <a:cs typeface="Times New Roman" pitchFamily="18" charset="0"/>
@@ -12427,9 +13227,9 @@
               <a:t>Self-care: </a:t>
             </a:r>
             <a:r>
-              <a:rPr lang="en-US" sz="1600" dirty="0">
-                <a:solidFill>
-                  <a:srgbClr val="222222"/>
+              <a:rPr lang="en-US" sz="1400" dirty="0">
+                <a:solidFill>
+                  <a:srgbClr val="000000"/>
                 </a:solidFill>
                 <a:latin typeface="Times New Roman" pitchFamily="18" charset="0"/>
                 <a:cs typeface="Times New Roman" pitchFamily="18" charset="0"/>
@@ -12446,9 +13246,9 @@
               <a:buChar char="•"/>
             </a:pPr>
             <a:r>
-              <a:rPr lang="en-US" sz="1600" b="1" dirty="0">
-                <a:solidFill>
-                  <a:srgbClr val="1F3B4D"/>
+              <a:rPr lang="en-US" sz="1400" b="1" dirty="0">
+                <a:solidFill>
+                  <a:srgbClr val="000000"/>
                 </a:solidFill>
                 <a:latin typeface="Times New Roman" pitchFamily="18" charset="0"/>
                 <a:cs typeface="Times New Roman" pitchFamily="18" charset="0"/>
@@ -12456,9 +13256,9 @@
               <a:t>Occupational (household): </a:t>
             </a:r>
             <a:r>
-              <a:rPr lang="en-US" sz="1600" dirty="0">
-                <a:solidFill>
-                  <a:srgbClr val="222222"/>
+              <a:rPr lang="en-US" sz="1400" dirty="0">
+                <a:solidFill>
+                  <a:srgbClr val="000000"/>
                 </a:solidFill>
                 <a:latin typeface="Times New Roman" pitchFamily="18" charset="0"/>
                 <a:cs typeface="Times New Roman" pitchFamily="18" charset="0"/>
@@ -12474,9 +13274,9 @@
               <a:buNone/>
             </a:pPr>
             <a:r>
-              <a:rPr lang="en-US" sz="1800" b="1" dirty="0">
-                <a:solidFill>
-                  <a:srgbClr val="3494BA"/>
+              <a:rPr lang="en-US" sz="2000" b="1" dirty="0">
+                <a:solidFill>
+                  <a:srgbClr val="000000"/>
                 </a:solidFill>
                 <a:latin typeface="Times New Roman" pitchFamily="18" charset="0"/>
                 <a:cs typeface="Times New Roman" pitchFamily="18" charset="0"/>
@@ -12493,9 +13293,9 @@
               <a:buChar char="•"/>
             </a:pPr>
             <a:r>
-              <a:rPr lang="en-US" sz="1600" dirty="0">
-                <a:solidFill>
-                  <a:srgbClr val="222222"/>
+              <a:rPr lang="en-US" sz="1400" dirty="0">
+                <a:solidFill>
+                  <a:srgbClr val="000000"/>
                 </a:solidFill>
                 <a:latin typeface="Times New Roman" pitchFamily="18" charset="0"/>
                 <a:cs typeface="Times New Roman" pitchFamily="18" charset="0"/>
@@ -12512,9 +13312,9 @@
               <a:buChar char="•"/>
             </a:pPr>
             <a:r>
-              <a:rPr lang="en-US" sz="1600" dirty="0">
-                <a:solidFill>
-                  <a:srgbClr val="222222"/>
+              <a:rPr lang="en-US" sz="1400" dirty="0">
+                <a:solidFill>
+                  <a:srgbClr val="000000"/>
                 </a:solidFill>
                 <a:latin typeface="Times New Roman" pitchFamily="18" charset="0"/>
                 <a:cs typeface="Times New Roman" pitchFamily="18" charset="0"/>
@@ -12531,9 +13331,9 @@
               <a:buChar char="•"/>
             </a:pPr>
             <a:r>
-              <a:rPr lang="en-US" sz="1600" dirty="0">
-                <a:solidFill>
-                  <a:srgbClr val="222222"/>
+              <a:rPr lang="en-US" sz="1400" dirty="0">
+                <a:solidFill>
+                  <a:srgbClr val="000000"/>
                 </a:solidFill>
                 <a:latin typeface="Times New Roman" pitchFamily="18" charset="0"/>
                 <a:cs typeface="Times New Roman" pitchFamily="18" charset="0"/>
@@ -12550,9 +13350,9 @@
               <a:buChar char="•"/>
             </a:pPr>
             <a:r>
-              <a:rPr lang="en-US" sz="1600" dirty="0">
-                <a:solidFill>
-                  <a:srgbClr val="222222"/>
+              <a:rPr lang="en-US" sz="1400" dirty="0">
+                <a:solidFill>
+                  <a:srgbClr val="000000"/>
                 </a:solidFill>
                 <a:latin typeface="Times New Roman" pitchFamily="18" charset="0"/>
                 <a:cs typeface="Times New Roman" pitchFamily="18" charset="0"/>
@@ -12569,9 +13369,9 @@
               <a:buChar char="•"/>
             </a:pPr>
             <a:r>
-              <a:rPr lang="en-US" sz="1600" dirty="0">
-                <a:solidFill>
-                  <a:srgbClr val="222222"/>
+              <a:rPr lang="en-US" sz="1400" dirty="0">
+                <a:solidFill>
+                  <a:srgbClr val="000000"/>
                 </a:solidFill>
                 <a:latin typeface="Times New Roman" pitchFamily="18" charset="0"/>
                 <a:cs typeface="Times New Roman" pitchFamily="18" charset="0"/>
@@ -12608,7 +13408,7 @@
       </p:grpSpPr>
       <p:sp>
         <p:nvSpPr>
-          <p:cNvPr id="10" name="TitleBar"/>
+          <p:cNvPr id="9" name="WhiteBG"/>
           <p:cNvSpPr>
             <a:spLocks noGrp="1"/>
           </p:cNvSpPr>
@@ -12617,43 +13417,25 @@
         <p:spPr>
           <a:xfrm>
             <a:off x="0" y="0"/>
-            <a:ext cx="12192000" cy="900000"/>
+            <a:ext cx="12192000" cy="6858000"/>
           </a:xfrm>
           <a:prstGeom prst="rect">
             <a:avLst/>
           </a:prstGeom>
           <a:solidFill>
-            <a:srgbClr val="3494BA"/>
+            <a:srgbClr val="FFFFFF"/>
           </a:solidFill>
         </p:spPr>
         <p:txBody>
-          <a:bodyPr wrap="square" anchor="ctr">
+          <a:bodyPr wrap="square" anchor="t">
             <a:normAutofit/>
           </a:bodyPr>
           <a:lstStyle/>
-          <a:p>
-            <a:pPr lvl="0" algn="l">
-              <a:spcAft>
-                <a:spcPts val="0"/>
-              </a:spcAft>
-              <a:buNone/>
-            </a:pPr>
-            <a:r>
-              <a:rPr lang="en-US" sz="2600" b="1" dirty="0">
-                <a:solidFill>
-                  <a:srgbClr val="FFFFFF"/>
-                </a:solidFill>
-                <a:latin typeface="Times New Roman" pitchFamily="18" charset="0"/>
-                <a:cs typeface="Times New Roman" pitchFamily="18" charset="0"/>
-              </a:rPr>
-              <a:t>  Treatment History &amp; Past History</a:t>
-            </a:r>
-          </a:p>
-        </p:txBody>
-      </p:sp>
-      <p:sp>
-        <p:nvSpPr>
-          <p:cNvPr id="11" name="Body"/>
+        </p:txBody>
+      </p:sp>
+      <p:sp>
+        <p:nvSpPr>
+          <p:cNvPr id="10" name="Heading"/>
           <p:cNvSpPr>
             <a:spLocks noGrp="1"/>
           </p:cNvSpPr>
@@ -12661,8 +13443,8 @@
         </p:nvSpPr>
         <p:spPr>
           <a:xfrm>
-            <a:off x="610000" y="1050000"/>
-            <a:ext cx="10972000" cy="5558000"/>
+            <a:off x="610000" y="300000"/>
+            <a:ext cx="10972000" cy="900000"/>
           </a:xfrm>
           <a:prstGeom prst="rect">
             <a:avLst/>
@@ -12675,6 +13457,49 @@
           </a:bodyPr>
           <a:lstStyle/>
           <a:p>
+            <a:pPr lvl="0" algn="l">
+              <a:spcAft>
+                <a:spcPts val="0"/>
+              </a:spcAft>
+              <a:buNone/>
+            </a:pPr>
+            <a:r>
+              <a:rPr lang="en-US" sz="2800" b="1" u="sng" dirty="0">
+                <a:solidFill>
+                  <a:srgbClr val="000000"/>
+                </a:solidFill>
+                <a:latin typeface="Times New Roman" pitchFamily="18" charset="0"/>
+                <a:cs typeface="Times New Roman" pitchFamily="18" charset="0"/>
+              </a:rPr>
+              <a:t>Treatment History &amp; Past History</a:t>
+            </a:r>
+          </a:p>
+        </p:txBody>
+      </p:sp>
+      <p:sp>
+        <p:nvSpPr>
+          <p:cNvPr id="11" name="Body"/>
+          <p:cNvSpPr>
+            <a:spLocks noGrp="1"/>
+          </p:cNvSpPr>
+          <p:nvPr/>
+        </p:nvSpPr>
+        <p:spPr>
+          <a:xfrm>
+            <a:off x="610000" y="1250000"/>
+            <a:ext cx="10972000" cy="5358000"/>
+          </a:xfrm>
+          <a:prstGeom prst="rect">
+            <a:avLst/>
+          </a:prstGeom>
+          <a:noFill/>
+        </p:spPr>
+        <p:txBody>
+          <a:bodyPr wrap="square" anchor="t">
+            <a:normAutofit/>
+          </a:bodyPr>
+          <a:lstStyle/>
+          <a:p>
             <a:pPr lvl="0">
               <a:spcAft>
                 <a:spcPts val="300"/>
@@ -12682,9 +13507,9 @@
               <a:buNone/>
             </a:pPr>
             <a:r>
-              <a:rPr lang="en-US" sz="1800" b="1" dirty="0">
-                <a:solidFill>
-                  <a:srgbClr val="3494BA"/>
+              <a:rPr lang="en-US" sz="2000" b="1" dirty="0">
+                <a:solidFill>
+                  <a:srgbClr val="000000"/>
                 </a:solidFill>
                 <a:latin typeface="Times New Roman" pitchFamily="18" charset="0"/>
                 <a:cs typeface="Times New Roman" pitchFamily="18" charset="0"/>
@@ -12701,9 +13526,9 @@
               <a:buChar char="•"/>
             </a:pPr>
             <a:r>
-              <a:rPr lang="en-US" sz="1600" b="1" dirty="0">
-                <a:solidFill>
-                  <a:srgbClr val="1F3B4D"/>
+              <a:rPr lang="en-US" sz="1400" b="1" dirty="0">
+                <a:solidFill>
+                  <a:srgbClr val="000000"/>
                 </a:solidFill>
                 <a:latin typeface="Times New Roman" pitchFamily="18" charset="0"/>
                 <a:cs typeface="Times New Roman" pitchFamily="18" charset="0"/>
@@ -12711,9 +13536,9 @@
               <a:t>Medical: </a:t>
             </a:r>
             <a:r>
-              <a:rPr lang="en-US" sz="1600" dirty="0">
-                <a:solidFill>
-                  <a:srgbClr val="222222"/>
+              <a:rPr lang="en-US" sz="1400" dirty="0">
+                <a:solidFill>
+                  <a:srgbClr val="000000"/>
                 </a:solidFill>
                 <a:latin typeface="Times New Roman" pitchFamily="18" charset="0"/>
                 <a:cs typeface="Times New Roman" pitchFamily="18" charset="0"/>
@@ -12730,9 +13555,9 @@
               <a:buChar char="•"/>
             </a:pPr>
             <a:r>
-              <a:rPr lang="en-US" sz="1600" b="1" dirty="0">
-                <a:solidFill>
-                  <a:srgbClr val="1F3B4D"/>
+              <a:rPr lang="en-US" sz="1400" b="1" dirty="0">
+                <a:solidFill>
+                  <a:srgbClr val="000000"/>
                 </a:solidFill>
                 <a:latin typeface="Times New Roman" pitchFamily="18" charset="0"/>
                 <a:cs typeface="Times New Roman" pitchFamily="18" charset="0"/>
@@ -12740,9 +13565,9 @@
               <a:t>Past psychiatric: </a:t>
             </a:r>
             <a:r>
-              <a:rPr lang="en-US" sz="1600" dirty="0">
-                <a:solidFill>
-                  <a:srgbClr val="222222"/>
+              <a:rPr lang="en-US" sz="1400" dirty="0">
+                <a:solidFill>
+                  <a:srgbClr val="000000"/>
                 </a:solidFill>
                 <a:latin typeface="Times New Roman" pitchFamily="18" charset="0"/>
                 <a:cs typeface="Times New Roman" pitchFamily="18" charset="0"/>
@@ -12758,9 +13583,9 @@
               <a:buNone/>
             </a:pPr>
             <a:r>
-              <a:rPr lang="en-US" sz="1800" b="1" dirty="0">
-                <a:solidFill>
-                  <a:srgbClr val="3494BA"/>
+              <a:rPr lang="en-US" sz="2000" b="1" dirty="0">
+                <a:solidFill>
+                  <a:srgbClr val="000000"/>
                 </a:solidFill>
                 <a:latin typeface="Times New Roman" pitchFamily="18" charset="0"/>
                 <a:cs typeface="Times New Roman" pitchFamily="18" charset="0"/>
@@ -12777,9 +13602,9 @@
               <a:buChar char="•"/>
             </a:pPr>
             <a:r>
-              <a:rPr lang="en-US" sz="1600" dirty="0">
-                <a:solidFill>
-                  <a:srgbClr val="222222"/>
+              <a:rPr lang="en-US" sz="1400" dirty="0">
+                <a:solidFill>
+                  <a:srgbClr val="000000"/>
                 </a:solidFill>
                 <a:latin typeface="Times New Roman" pitchFamily="18" charset="0"/>
                 <a:cs typeface="Times New Roman" pitchFamily="18" charset="0"/>
@@ -12796,9 +13621,9 @@
               <a:buChar char="•"/>
             </a:pPr>
             <a:r>
-              <a:rPr lang="en-US" sz="1600" dirty="0">
-                <a:solidFill>
-                  <a:srgbClr val="222222"/>
+              <a:rPr lang="en-US" sz="1400" dirty="0">
+                <a:solidFill>
+                  <a:srgbClr val="000000"/>
                 </a:solidFill>
                 <a:latin typeface="Times New Roman" pitchFamily="18" charset="0"/>
                 <a:cs typeface="Times New Roman" pitchFamily="18" charset="0"/>
